--- a/1-DataPreprocessing.pptx
+++ b/1-DataPreprocessing.pptx
@@ -25,6 +25,10 @@
     <p:sldId id="270" r:id="rId20"/>
     <p:sldId id="271" r:id="rId21"/>
     <p:sldId id="272" r:id="rId22"/>
+    <p:sldId id="273" r:id="rId23"/>
+    <p:sldId id="274" r:id="rId24"/>
+    <p:sldId id="275" r:id="rId25"/>
+    <p:sldId id="276" r:id="rId26"/>
   </p:sldIdLst>
   <p:sldSz cy="5143500" cx="9144000"/>
   <p:notesSz cx="6858000" cy="9144000"/>
@@ -959,7 +963,7 @@
   <p:cSld>
     <p:spTree>
       <p:nvGrpSpPr>
-        <p:cNvPr id="145" name="Shape 145"/>
+        <p:cNvPr id="134" name="Shape 134"/>
         <p:cNvGrpSpPr/>
         <p:nvPr/>
       </p:nvGrpSpPr>
@@ -973,7 +977,7 @@
       </p:grpSpPr>
       <p:sp>
         <p:nvSpPr>
-          <p:cNvPr id="146" name="Google Shape;146;p7:notes"/>
+          <p:cNvPr id="135" name="Google Shape;135;p8:notes"/>
           <p:cNvSpPr/>
           <p:nvPr>
             <p:ph idx="2" type="sldImg"/>
@@ -1018,7 +1022,7 @@
       </p:sp>
       <p:sp>
         <p:nvSpPr>
-          <p:cNvPr id="147" name="Google Shape;147;p7:notes"/>
+          <p:cNvPr id="136" name="Google Shape;136;p8:notes"/>
           <p:cNvSpPr txBox="1"/>
           <p:nvPr>
             <p:ph idx="1" type="body"/>
@@ -1076,7 +1080,7 @@
   <p:cSld>
     <p:spTree>
       <p:nvGrpSpPr>
-        <p:cNvPr id="154" name="Shape 154"/>
+        <p:cNvPr id="144" name="Shape 144"/>
         <p:cNvGrpSpPr/>
         <p:nvPr/>
       </p:nvGrpSpPr>
@@ -1090,7 +1094,7 @@
       </p:grpSpPr>
       <p:sp>
         <p:nvSpPr>
-          <p:cNvPr id="155" name="Google Shape;155;p8:notes"/>
+          <p:cNvPr id="145" name="Google Shape;145;p9:notes"/>
           <p:cNvSpPr/>
           <p:nvPr>
             <p:ph idx="2" type="sldImg"/>
@@ -1135,7 +1139,7 @@
       </p:sp>
       <p:sp>
         <p:nvSpPr>
-          <p:cNvPr id="156" name="Google Shape;156;p8:notes"/>
+          <p:cNvPr id="146" name="Google Shape;146;p9:notes"/>
           <p:cNvSpPr txBox="1"/>
           <p:nvPr>
             <p:ph idx="1" type="body"/>
@@ -1193,7 +1197,7 @@
   <p:cSld>
     <p:spTree>
       <p:nvGrpSpPr>
-        <p:cNvPr id="160" name="Shape 160"/>
+        <p:cNvPr id="155" name="Shape 155"/>
         <p:cNvGrpSpPr/>
         <p:nvPr/>
       </p:nvGrpSpPr>
@@ -1207,7 +1211,7 @@
       </p:grpSpPr>
       <p:sp>
         <p:nvSpPr>
-          <p:cNvPr id="161" name="Google Shape;161;p9:notes"/>
+          <p:cNvPr id="156" name="Google Shape;156;p10:notes"/>
           <p:cNvSpPr/>
           <p:nvPr>
             <p:ph idx="2" type="sldImg"/>
@@ -1252,7 +1256,7 @@
       </p:sp>
       <p:sp>
         <p:nvSpPr>
-          <p:cNvPr id="162" name="Google Shape;162;p9:notes"/>
+          <p:cNvPr id="157" name="Google Shape;157;p10:notes"/>
           <p:cNvSpPr txBox="1"/>
           <p:nvPr>
             <p:ph idx="1" type="body"/>
@@ -1310,7 +1314,7 @@
   <p:cSld>
     <p:spTree>
       <p:nvGrpSpPr>
-        <p:cNvPr id="169" name="Shape 169"/>
+        <p:cNvPr id="164" name="Shape 164"/>
         <p:cNvGrpSpPr/>
         <p:nvPr/>
       </p:nvGrpSpPr>
@@ -1324,7 +1328,7 @@
       </p:grpSpPr>
       <p:sp>
         <p:nvSpPr>
-          <p:cNvPr id="170" name="Google Shape;170;p10:notes"/>
+          <p:cNvPr id="165" name="Google Shape;165;p11:notes"/>
           <p:cNvSpPr/>
           <p:nvPr>
             <p:ph idx="2" type="sldImg"/>
@@ -1369,7 +1373,7 @@
       </p:sp>
       <p:sp>
         <p:nvSpPr>
-          <p:cNvPr id="171" name="Google Shape;171;p10:notes"/>
+          <p:cNvPr id="166" name="Google Shape;166;p11:notes"/>
           <p:cNvSpPr txBox="1"/>
           <p:nvPr>
             <p:ph idx="1" type="body"/>
@@ -1427,7 +1431,7 @@
   <p:cSld>
     <p:spTree>
       <p:nvGrpSpPr>
-        <p:cNvPr id="176" name="Shape 176"/>
+        <p:cNvPr id="170" name="Shape 170"/>
         <p:cNvGrpSpPr/>
         <p:nvPr/>
       </p:nvGrpSpPr>
@@ -1441,7 +1445,7 @@
       </p:grpSpPr>
       <p:sp>
         <p:nvSpPr>
-          <p:cNvPr id="177" name="Google Shape;177;p11:notes"/>
+          <p:cNvPr id="171" name="Google Shape;171;p12:notes"/>
           <p:cNvSpPr/>
           <p:nvPr>
             <p:ph idx="2" type="sldImg"/>
@@ -1486,7 +1490,7 @@
       </p:sp>
       <p:sp>
         <p:nvSpPr>
-          <p:cNvPr id="178" name="Google Shape;178;p11:notes"/>
+          <p:cNvPr id="172" name="Google Shape;172;p12:notes"/>
           <p:cNvSpPr txBox="1"/>
           <p:nvPr>
             <p:ph idx="1" type="body"/>
@@ -1544,7 +1548,7 @@
   <p:cSld>
     <p:spTree>
       <p:nvGrpSpPr>
-        <p:cNvPr id="185" name="Shape 185"/>
+        <p:cNvPr id="179" name="Shape 179"/>
         <p:cNvGrpSpPr/>
         <p:nvPr/>
       </p:nvGrpSpPr>
@@ -1558,106 +1562,7 @@
       </p:grpSpPr>
       <p:sp>
         <p:nvSpPr>
-          <p:cNvPr id="186" name="Google Shape;186;g370fe1968c7_0_72:notes"/>
-          <p:cNvSpPr/>
-          <p:nvPr>
-            <p:ph idx="2" type="sldImg"/>
-          </p:nvPr>
-        </p:nvSpPr>
-        <p:spPr>
-          <a:xfrm>
-            <a:off x="381300" y="685800"/>
-            <a:ext cx="6096000" cy="3429000"/>
-          </a:xfrm>
-          <a:custGeom>
-            <a:rect b="b" l="l" r="r" t="t"/>
-            <a:pathLst>
-              <a:path extrusionOk="0" h="120000" w="120000">
-                <a:moveTo>
-                  <a:pt x="0" y="0"/>
-                </a:moveTo>
-                <a:lnTo>
-                  <a:pt x="120000" y="0"/>
-                </a:lnTo>
-                <a:lnTo>
-                  <a:pt x="120000" y="120000"/>
-                </a:lnTo>
-                <a:lnTo>
-                  <a:pt x="0" y="120000"/>
-                </a:lnTo>
-                <a:close/>
-              </a:path>
-            </a:pathLst>
-          </a:custGeom>
-        </p:spPr>
-      </p:sp>
-      <p:sp>
-        <p:nvSpPr>
-          <p:cNvPr id="187" name="Google Shape;187;g370fe1968c7_0_72:notes"/>
-          <p:cNvSpPr txBox="1"/>
-          <p:nvPr>
-            <p:ph idx="1" type="body"/>
-          </p:nvPr>
-        </p:nvSpPr>
-        <p:spPr>
-          <a:xfrm>
-            <a:off x="685800" y="4343400"/>
-            <a:ext cx="5486400" cy="4114800"/>
-          </a:xfrm>
-          <a:prstGeom prst="rect">
-            <a:avLst/>
-          </a:prstGeom>
-        </p:spPr>
-        <p:txBody>
-          <a:bodyPr anchorCtr="0" anchor="t" bIns="91425" lIns="91425" spcFirstLastPara="1" rIns="91425" wrap="square" tIns="91425">
-            <a:noAutofit/>
-          </a:bodyPr>
-          <a:lstStyle/>
-          <a:p>
-            <a:pPr indent="0" lvl="0" marL="0" rtl="0" algn="l">
-              <a:spcBef>
-                <a:spcPts val="0"/>
-              </a:spcBef>
-              <a:spcAft>
-                <a:spcPts val="0"/>
-              </a:spcAft>
-              <a:buNone/>
-            </a:pPr>
-            <a:r>
-              <a:t/>
-            </a:r>
-            <a:endParaRPr/>
-          </a:p>
-        </p:txBody>
-      </p:sp>
-    </p:spTree>
-  </p:cSld>
-  <p:clrMapOvr>
-    <a:masterClrMapping/>
-  </p:clrMapOvr>
-</p:notes>
-</file>
-
-<file path=ppt/notesSlides/notesSlide16.xml><?xml version="1.0" encoding="utf-8"?>
-<p:notes xmlns:a="http://schemas.openxmlformats.org/drawingml/2006/main" xmlns:r="http://schemas.openxmlformats.org/officeDocument/2006/relationships" xmlns:mc="http://schemas.openxmlformats.org/markup-compatibility/2006" xmlns:mv="urn:schemas-microsoft-com:mac:vml" xmlns:p="http://schemas.openxmlformats.org/presentationml/2006/main" xmlns:c="http://schemas.openxmlformats.org/drawingml/2006/chart" xmlns:dgm="http://schemas.openxmlformats.org/drawingml/2006/diagram" xmlns:o="urn:schemas-microsoft-com:office:office" xmlns:v="urn:schemas-microsoft-com:vml" xmlns:pvml="urn:schemas-microsoft-com:office:powerpoint" xmlns:com="http://schemas.openxmlformats.org/drawingml/2006/compatibility" xmlns:p14="http://schemas.microsoft.com/office/powerpoint/2010/main" xmlns:p15="http://schemas.microsoft.com/office/powerpoint/2012/main" xmlns:ahyp="http://schemas.microsoft.com/office/drawing/2018/hyperlinkcolor" showMasterPhAnim="0" showMasterSp="0">
-  <p:cSld>
-    <p:spTree>
-      <p:nvGrpSpPr>
-        <p:cNvPr id="199" name="Shape 199"/>
-        <p:cNvGrpSpPr/>
-        <p:nvPr/>
-      </p:nvGrpSpPr>
-      <p:grpSpPr>
-        <a:xfrm>
-          <a:off x="0" y="0"/>
-          <a:ext cx="0" cy="0"/>
-          <a:chOff x="0" y="0"/>
-          <a:chExt cx="0" cy="0"/>
-        </a:xfrm>
-      </p:grpSpPr>
-      <p:sp>
-        <p:nvSpPr>
-          <p:cNvPr id="200" name="Google Shape;200;p12:notes"/>
+          <p:cNvPr id="180" name="Google Shape;180;p13:notes"/>
           <p:cNvSpPr/>
           <p:nvPr>
             <p:ph idx="2" type="sldImg"/>
@@ -1702,7 +1607,7 @@
       </p:sp>
       <p:sp>
         <p:nvSpPr>
-          <p:cNvPr id="201" name="Google Shape;201;p12:notes"/>
+          <p:cNvPr id="181" name="Google Shape;181;p13:notes"/>
           <p:cNvSpPr txBox="1"/>
           <p:nvPr>
             <p:ph idx="1" type="body"/>
@@ -1755,12 +1660,12 @@
 </p:notes>
 </file>
 
-<file path=ppt/notesSlides/notesSlide17.xml><?xml version="1.0" encoding="utf-8"?>
+<file path=ppt/notesSlides/notesSlide16.xml><?xml version="1.0" encoding="utf-8"?>
 <p:notes xmlns:a="http://schemas.openxmlformats.org/drawingml/2006/main" xmlns:r="http://schemas.openxmlformats.org/officeDocument/2006/relationships" xmlns:mc="http://schemas.openxmlformats.org/markup-compatibility/2006" xmlns:mv="urn:schemas-microsoft-com:mac:vml" xmlns:p="http://schemas.openxmlformats.org/presentationml/2006/main" xmlns:c="http://schemas.openxmlformats.org/drawingml/2006/chart" xmlns:dgm="http://schemas.openxmlformats.org/drawingml/2006/diagram" xmlns:o="urn:schemas-microsoft-com:office:office" xmlns:v="urn:schemas-microsoft-com:vml" xmlns:pvml="urn:schemas-microsoft-com:office:powerpoint" xmlns:com="http://schemas.openxmlformats.org/drawingml/2006/compatibility" xmlns:p14="http://schemas.microsoft.com/office/powerpoint/2010/main" xmlns:p15="http://schemas.microsoft.com/office/powerpoint/2012/main" xmlns:ahyp="http://schemas.microsoft.com/office/drawing/2018/hyperlinkcolor" showMasterPhAnim="0" showMasterSp="0">
   <p:cSld>
     <p:spTree>
       <p:nvGrpSpPr>
-        <p:cNvPr id="214" name="Shape 214"/>
+        <p:cNvPr id="186" name="Shape 186"/>
         <p:cNvGrpSpPr/>
         <p:nvPr/>
       </p:nvGrpSpPr>
@@ -1774,7 +1679,7 @@
       </p:grpSpPr>
       <p:sp>
         <p:nvSpPr>
-          <p:cNvPr id="215" name="Google Shape;215;p13:notes"/>
+          <p:cNvPr id="187" name="Google Shape;187;p14:notes"/>
           <p:cNvSpPr/>
           <p:nvPr>
             <p:ph idx="2" type="sldImg"/>
@@ -1819,7 +1724,358 @@
       </p:sp>
       <p:sp>
         <p:nvSpPr>
-          <p:cNvPr id="216" name="Google Shape;216;p13:notes"/>
+          <p:cNvPr id="188" name="Google Shape;188;p14:notes"/>
+          <p:cNvSpPr txBox="1"/>
+          <p:nvPr>
+            <p:ph idx="1" type="body"/>
+          </p:nvPr>
+        </p:nvSpPr>
+        <p:spPr>
+          <a:xfrm>
+            <a:off x="685800" y="4343400"/>
+            <a:ext cx="5486400" cy="4114800"/>
+          </a:xfrm>
+          <a:prstGeom prst="rect">
+            <a:avLst/>
+          </a:prstGeom>
+          <a:noFill/>
+          <a:ln>
+            <a:noFill/>
+          </a:ln>
+        </p:spPr>
+        <p:txBody>
+          <a:bodyPr anchorCtr="0" anchor="t" bIns="91425" lIns="91425" spcFirstLastPara="1" rIns="91425" wrap="square" tIns="91425">
+            <a:noAutofit/>
+          </a:bodyPr>
+          <a:lstStyle/>
+          <a:p>
+            <a:pPr indent="0" lvl="0" marL="0" rtl="0" algn="l">
+              <a:lnSpc>
+                <a:spcPct val="100000"/>
+              </a:lnSpc>
+              <a:spcBef>
+                <a:spcPts val="0"/>
+              </a:spcBef>
+              <a:spcAft>
+                <a:spcPts val="0"/>
+              </a:spcAft>
+              <a:buSzPts val="1100"/>
+              <a:buNone/>
+            </a:pPr>
+            <a:r>
+              <a:t/>
+            </a:r>
+            <a:endParaRPr/>
+          </a:p>
+        </p:txBody>
+      </p:sp>
+    </p:spTree>
+  </p:cSld>
+  <p:clrMapOvr>
+    <a:masterClrMapping/>
+  </p:clrMapOvr>
+</p:notes>
+</file>
+
+<file path=ppt/notesSlides/notesSlide17.xml><?xml version="1.0" encoding="utf-8"?>
+<p:notes xmlns:a="http://schemas.openxmlformats.org/drawingml/2006/main" xmlns:r="http://schemas.openxmlformats.org/officeDocument/2006/relationships" xmlns:mc="http://schemas.openxmlformats.org/markup-compatibility/2006" xmlns:mv="urn:schemas-microsoft-com:mac:vml" xmlns:p="http://schemas.openxmlformats.org/presentationml/2006/main" xmlns:c="http://schemas.openxmlformats.org/drawingml/2006/chart" xmlns:dgm="http://schemas.openxmlformats.org/drawingml/2006/diagram" xmlns:o="urn:schemas-microsoft-com:office:office" xmlns:v="urn:schemas-microsoft-com:vml" xmlns:pvml="urn:schemas-microsoft-com:office:powerpoint" xmlns:com="http://schemas.openxmlformats.org/drawingml/2006/compatibility" xmlns:p14="http://schemas.microsoft.com/office/powerpoint/2010/main" xmlns:p15="http://schemas.microsoft.com/office/powerpoint/2012/main" xmlns:ahyp="http://schemas.microsoft.com/office/drawing/2018/hyperlinkcolor" showMasterPhAnim="0" showMasterSp="0">
+  <p:cSld>
+    <p:spTree>
+      <p:nvGrpSpPr>
+        <p:cNvPr id="195" name="Shape 195"/>
+        <p:cNvGrpSpPr/>
+        <p:nvPr/>
+      </p:nvGrpSpPr>
+      <p:grpSpPr>
+        <a:xfrm>
+          <a:off x="0" y="0"/>
+          <a:ext cx="0" cy="0"/>
+          <a:chOff x="0" y="0"/>
+          <a:chExt cx="0" cy="0"/>
+        </a:xfrm>
+      </p:grpSpPr>
+      <p:sp>
+        <p:nvSpPr>
+          <p:cNvPr id="196" name="Google Shape;196;p15:notes"/>
+          <p:cNvSpPr/>
+          <p:nvPr>
+            <p:ph idx="2" type="sldImg"/>
+          </p:nvPr>
+        </p:nvSpPr>
+        <p:spPr>
+          <a:xfrm>
+            <a:off x="381300" y="685800"/>
+            <a:ext cx="6096000" cy="3429000"/>
+          </a:xfrm>
+          <a:custGeom>
+            <a:rect b="b" l="l" r="r" t="t"/>
+            <a:pathLst>
+              <a:path extrusionOk="0" h="120000" w="120000">
+                <a:moveTo>
+                  <a:pt x="0" y="0"/>
+                </a:moveTo>
+                <a:lnTo>
+                  <a:pt x="120000" y="0"/>
+                </a:lnTo>
+                <a:lnTo>
+                  <a:pt x="120000" y="120000"/>
+                </a:lnTo>
+                <a:lnTo>
+                  <a:pt x="0" y="120000"/>
+                </a:lnTo>
+                <a:close/>
+              </a:path>
+            </a:pathLst>
+          </a:custGeom>
+          <a:noFill/>
+          <a:ln cap="flat" cmpd="sng" w="9525">
+            <a:solidFill>
+              <a:srgbClr val="000000"/>
+            </a:solidFill>
+            <a:prstDash val="solid"/>
+            <a:round/>
+            <a:headEnd len="sm" w="sm" type="none"/>
+            <a:tailEnd len="sm" w="sm" type="none"/>
+          </a:ln>
+        </p:spPr>
+      </p:sp>
+      <p:sp>
+        <p:nvSpPr>
+          <p:cNvPr id="197" name="Google Shape;197;p15:notes"/>
+          <p:cNvSpPr txBox="1"/>
+          <p:nvPr>
+            <p:ph idx="1" type="body"/>
+          </p:nvPr>
+        </p:nvSpPr>
+        <p:spPr>
+          <a:xfrm>
+            <a:off x="685800" y="4343400"/>
+            <a:ext cx="5486400" cy="4114800"/>
+          </a:xfrm>
+          <a:prstGeom prst="rect">
+            <a:avLst/>
+          </a:prstGeom>
+          <a:noFill/>
+          <a:ln>
+            <a:noFill/>
+          </a:ln>
+        </p:spPr>
+        <p:txBody>
+          <a:bodyPr anchorCtr="0" anchor="t" bIns="91425" lIns="91425" spcFirstLastPara="1" rIns="91425" wrap="square" tIns="91425">
+            <a:noAutofit/>
+          </a:bodyPr>
+          <a:lstStyle/>
+          <a:p>
+            <a:pPr indent="0" lvl="0" marL="0" rtl="0" algn="l">
+              <a:lnSpc>
+                <a:spcPct val="100000"/>
+              </a:lnSpc>
+              <a:spcBef>
+                <a:spcPts val="0"/>
+              </a:spcBef>
+              <a:spcAft>
+                <a:spcPts val="0"/>
+              </a:spcAft>
+              <a:buSzPts val="1100"/>
+              <a:buNone/>
+            </a:pPr>
+            <a:r>
+              <a:t/>
+            </a:r>
+            <a:endParaRPr/>
+          </a:p>
+        </p:txBody>
+      </p:sp>
+    </p:spTree>
+  </p:cSld>
+  <p:clrMapOvr>
+    <a:masterClrMapping/>
+  </p:clrMapOvr>
+</p:notes>
+</file>
+
+<file path=ppt/notesSlides/notesSlide18.xml><?xml version="1.0" encoding="utf-8"?>
+<p:notes xmlns:a="http://schemas.openxmlformats.org/drawingml/2006/main" xmlns:r="http://schemas.openxmlformats.org/officeDocument/2006/relationships" xmlns:mc="http://schemas.openxmlformats.org/markup-compatibility/2006" xmlns:mv="urn:schemas-microsoft-com:mac:vml" xmlns:p="http://schemas.openxmlformats.org/presentationml/2006/main" xmlns:c="http://schemas.openxmlformats.org/drawingml/2006/chart" xmlns:dgm="http://schemas.openxmlformats.org/drawingml/2006/diagram" xmlns:o="urn:schemas-microsoft-com:office:office" xmlns:v="urn:schemas-microsoft-com:vml" xmlns:pvml="urn:schemas-microsoft-com:office:powerpoint" xmlns:com="http://schemas.openxmlformats.org/drawingml/2006/compatibility" xmlns:p14="http://schemas.microsoft.com/office/powerpoint/2010/main" xmlns:p15="http://schemas.microsoft.com/office/powerpoint/2012/main" xmlns:ahyp="http://schemas.microsoft.com/office/drawing/2018/hyperlinkcolor" showMasterPhAnim="0" showMasterSp="0">
+  <p:cSld>
+    <p:spTree>
+      <p:nvGrpSpPr>
+        <p:cNvPr id="209" name="Shape 209"/>
+        <p:cNvGrpSpPr/>
+        <p:nvPr/>
+      </p:nvGrpSpPr>
+      <p:grpSpPr>
+        <a:xfrm>
+          <a:off x="0" y="0"/>
+          <a:ext cx="0" cy="0"/>
+          <a:chOff x="0" y="0"/>
+          <a:chExt cx="0" cy="0"/>
+        </a:xfrm>
+      </p:grpSpPr>
+      <p:sp>
+        <p:nvSpPr>
+          <p:cNvPr id="210" name="Google Shape;210;p16:notes"/>
+          <p:cNvSpPr/>
+          <p:nvPr>
+            <p:ph idx="2" type="sldImg"/>
+          </p:nvPr>
+        </p:nvSpPr>
+        <p:spPr>
+          <a:xfrm>
+            <a:off x="381300" y="685800"/>
+            <a:ext cx="6096000" cy="3429000"/>
+          </a:xfrm>
+          <a:custGeom>
+            <a:rect b="b" l="l" r="r" t="t"/>
+            <a:pathLst>
+              <a:path extrusionOk="0" h="120000" w="120000">
+                <a:moveTo>
+                  <a:pt x="0" y="0"/>
+                </a:moveTo>
+                <a:lnTo>
+                  <a:pt x="120000" y="0"/>
+                </a:lnTo>
+                <a:lnTo>
+                  <a:pt x="120000" y="120000"/>
+                </a:lnTo>
+                <a:lnTo>
+                  <a:pt x="0" y="120000"/>
+                </a:lnTo>
+                <a:close/>
+              </a:path>
+            </a:pathLst>
+          </a:custGeom>
+          <a:noFill/>
+          <a:ln cap="flat" cmpd="sng" w="9525">
+            <a:solidFill>
+              <a:srgbClr val="000000"/>
+            </a:solidFill>
+            <a:prstDash val="solid"/>
+            <a:round/>
+            <a:headEnd len="sm" w="sm" type="none"/>
+            <a:tailEnd len="sm" w="sm" type="none"/>
+          </a:ln>
+        </p:spPr>
+      </p:sp>
+      <p:sp>
+        <p:nvSpPr>
+          <p:cNvPr id="211" name="Google Shape;211;p16:notes"/>
+          <p:cNvSpPr txBox="1"/>
+          <p:nvPr>
+            <p:ph idx="1" type="body"/>
+          </p:nvPr>
+        </p:nvSpPr>
+        <p:spPr>
+          <a:xfrm>
+            <a:off x="685800" y="4343400"/>
+            <a:ext cx="5486400" cy="4114800"/>
+          </a:xfrm>
+          <a:prstGeom prst="rect">
+            <a:avLst/>
+          </a:prstGeom>
+          <a:noFill/>
+          <a:ln>
+            <a:noFill/>
+          </a:ln>
+        </p:spPr>
+        <p:txBody>
+          <a:bodyPr anchorCtr="0" anchor="t" bIns="91425" lIns="91425" spcFirstLastPara="1" rIns="91425" wrap="square" tIns="91425">
+            <a:noAutofit/>
+          </a:bodyPr>
+          <a:lstStyle/>
+          <a:p>
+            <a:pPr indent="0" lvl="0" marL="0" rtl="0" algn="l">
+              <a:lnSpc>
+                <a:spcPct val="100000"/>
+              </a:lnSpc>
+              <a:spcBef>
+                <a:spcPts val="0"/>
+              </a:spcBef>
+              <a:spcAft>
+                <a:spcPts val="0"/>
+              </a:spcAft>
+              <a:buSzPts val="1100"/>
+              <a:buNone/>
+            </a:pPr>
+            <a:r>
+              <a:t/>
+            </a:r>
+            <a:endParaRPr/>
+          </a:p>
+        </p:txBody>
+      </p:sp>
+    </p:spTree>
+  </p:cSld>
+  <p:clrMapOvr>
+    <a:masterClrMapping/>
+  </p:clrMapOvr>
+</p:notes>
+</file>
+
+<file path=ppt/notesSlides/notesSlide19.xml><?xml version="1.0" encoding="utf-8"?>
+<p:notes xmlns:a="http://schemas.openxmlformats.org/drawingml/2006/main" xmlns:r="http://schemas.openxmlformats.org/officeDocument/2006/relationships" xmlns:mc="http://schemas.openxmlformats.org/markup-compatibility/2006" xmlns:mv="urn:schemas-microsoft-com:mac:vml" xmlns:p="http://schemas.openxmlformats.org/presentationml/2006/main" xmlns:c="http://schemas.openxmlformats.org/drawingml/2006/chart" xmlns:dgm="http://schemas.openxmlformats.org/drawingml/2006/diagram" xmlns:o="urn:schemas-microsoft-com:office:office" xmlns:v="urn:schemas-microsoft-com:vml" xmlns:pvml="urn:schemas-microsoft-com:office:powerpoint" xmlns:com="http://schemas.openxmlformats.org/drawingml/2006/compatibility" xmlns:p14="http://schemas.microsoft.com/office/powerpoint/2010/main" xmlns:p15="http://schemas.microsoft.com/office/powerpoint/2012/main" xmlns:ahyp="http://schemas.microsoft.com/office/drawing/2018/hyperlinkcolor" showMasterPhAnim="0" showMasterSp="0">
+  <p:cSld>
+    <p:spTree>
+      <p:nvGrpSpPr>
+        <p:cNvPr id="224" name="Shape 224"/>
+        <p:cNvGrpSpPr/>
+        <p:nvPr/>
+      </p:nvGrpSpPr>
+      <p:grpSpPr>
+        <a:xfrm>
+          <a:off x="0" y="0"/>
+          <a:ext cx="0" cy="0"/>
+          <a:chOff x="0" y="0"/>
+          <a:chExt cx="0" cy="0"/>
+        </a:xfrm>
+      </p:grpSpPr>
+      <p:sp>
+        <p:nvSpPr>
+          <p:cNvPr id="225" name="Google Shape;225;p17:notes"/>
+          <p:cNvSpPr/>
+          <p:nvPr>
+            <p:ph idx="2" type="sldImg"/>
+          </p:nvPr>
+        </p:nvSpPr>
+        <p:spPr>
+          <a:xfrm>
+            <a:off x="381300" y="685800"/>
+            <a:ext cx="6096000" cy="3429000"/>
+          </a:xfrm>
+          <a:custGeom>
+            <a:rect b="b" l="l" r="r" t="t"/>
+            <a:pathLst>
+              <a:path extrusionOk="0" h="120000" w="120000">
+                <a:moveTo>
+                  <a:pt x="0" y="0"/>
+                </a:moveTo>
+                <a:lnTo>
+                  <a:pt x="120000" y="0"/>
+                </a:lnTo>
+                <a:lnTo>
+                  <a:pt x="120000" y="120000"/>
+                </a:lnTo>
+                <a:lnTo>
+                  <a:pt x="0" y="120000"/>
+                </a:lnTo>
+                <a:close/>
+              </a:path>
+            </a:pathLst>
+          </a:custGeom>
+          <a:noFill/>
+          <a:ln cap="flat" cmpd="sng" w="9525">
+            <a:solidFill>
+              <a:srgbClr val="000000"/>
+            </a:solidFill>
+            <a:prstDash val="solid"/>
+            <a:round/>
+            <a:headEnd len="sm" w="sm" type="none"/>
+            <a:tailEnd len="sm" w="sm" type="none"/>
+          </a:ln>
+        </p:spPr>
+      </p:sp>
+      <p:sp>
+        <p:nvSpPr>
+          <p:cNvPr id="226" name="Google Shape;226;p17:notes"/>
           <p:cNvSpPr txBox="1"/>
           <p:nvPr>
             <p:ph idx="1" type="body"/>
@@ -1891,7 +2147,7 @@
       </p:grpSpPr>
       <p:sp>
         <p:nvSpPr>
-          <p:cNvPr id="63" name="Google Shape;63;p2:notes"/>
+          <p:cNvPr id="63" name="Google Shape;63;g37d4eeaee99_0_12:notes"/>
           <p:cNvSpPr/>
           <p:nvPr>
             <p:ph idx="2" type="sldImg"/>
@@ -1922,21 +2178,11 @@
               </a:path>
             </a:pathLst>
           </a:custGeom>
-          <a:noFill/>
-          <a:ln cap="flat" cmpd="sng" w="9525">
-            <a:solidFill>
-              <a:srgbClr val="000000"/>
-            </a:solidFill>
-            <a:prstDash val="solid"/>
-            <a:round/>
-            <a:headEnd len="sm" w="sm" type="none"/>
-            <a:tailEnd len="sm" w="sm" type="none"/>
-          </a:ln>
         </p:spPr>
       </p:sp>
       <p:sp>
         <p:nvSpPr>
-          <p:cNvPr id="64" name="Google Shape;64;p2:notes"/>
+          <p:cNvPr id="64" name="Google Shape;64;g37d4eeaee99_0_12:notes"/>
           <p:cNvSpPr txBox="1"/>
           <p:nvPr>
             <p:ph idx="1" type="body"/>
@@ -1950,10 +2196,6 @@
           <a:prstGeom prst="rect">
             <a:avLst/>
           </a:prstGeom>
-          <a:noFill/>
-          <a:ln>
-            <a:noFill/>
-          </a:ln>
         </p:spPr>
         <p:txBody>
           <a:bodyPr anchorCtr="0" anchor="t" bIns="91425" lIns="91425" spcFirstLastPara="1" rIns="91425" wrap="square" tIns="91425">
@@ -1962,16 +2204,210 @@
           <a:lstStyle/>
           <a:p>
             <a:pPr indent="0" lvl="0" marL="0" rtl="0" algn="l">
-              <a:lnSpc>
-                <a:spcPct val="100000"/>
-              </a:lnSpc>
-              <a:spcBef>
-                <a:spcPts val="0"/>
-              </a:spcBef>
-              <a:spcAft>
-                <a:spcPts val="0"/>
-              </a:spcAft>
-              <a:buSzPts val="1100"/>
+              <a:spcBef>
+                <a:spcPts val="0"/>
+              </a:spcBef>
+              <a:spcAft>
+                <a:spcPts val="0"/>
+              </a:spcAft>
+              <a:buNone/>
+            </a:pPr>
+            <a:r>
+              <a:t/>
+            </a:r>
+            <a:endParaRPr/>
+          </a:p>
+        </p:txBody>
+      </p:sp>
+    </p:spTree>
+  </p:cSld>
+  <p:clrMapOvr>
+    <a:masterClrMapping/>
+  </p:clrMapOvr>
+</p:notes>
+</file>
+
+<file path=ppt/notesSlides/notesSlide20.xml><?xml version="1.0" encoding="utf-8"?>
+<p:notes xmlns:a="http://schemas.openxmlformats.org/drawingml/2006/main" xmlns:r="http://schemas.openxmlformats.org/officeDocument/2006/relationships" xmlns:mc="http://schemas.openxmlformats.org/markup-compatibility/2006" xmlns:mv="urn:schemas-microsoft-com:mac:vml" xmlns:p="http://schemas.openxmlformats.org/presentationml/2006/main" xmlns:c="http://schemas.openxmlformats.org/drawingml/2006/chart" xmlns:dgm="http://schemas.openxmlformats.org/drawingml/2006/diagram" xmlns:o="urn:schemas-microsoft-com:office:office" xmlns:v="urn:schemas-microsoft-com:vml" xmlns:pvml="urn:schemas-microsoft-com:office:powerpoint" xmlns:com="http://schemas.openxmlformats.org/drawingml/2006/compatibility" xmlns:p14="http://schemas.microsoft.com/office/powerpoint/2010/main" xmlns:p15="http://schemas.microsoft.com/office/powerpoint/2012/main" xmlns:ahyp="http://schemas.microsoft.com/office/drawing/2018/hyperlinkcolor" showMasterPhAnim="0" showMasterSp="0">
+  <p:cSld>
+    <p:spTree>
+      <p:nvGrpSpPr>
+        <p:cNvPr id="235" name="Shape 235"/>
+        <p:cNvGrpSpPr/>
+        <p:nvPr/>
+      </p:nvGrpSpPr>
+      <p:grpSpPr>
+        <a:xfrm>
+          <a:off x="0" y="0"/>
+          <a:ext cx="0" cy="0"/>
+          <a:chOff x="0" y="0"/>
+          <a:chExt cx="0" cy="0"/>
+        </a:xfrm>
+      </p:grpSpPr>
+      <p:sp>
+        <p:nvSpPr>
+          <p:cNvPr id="236" name="Google Shape;236;g3b8cb400655_0_0:notes"/>
+          <p:cNvSpPr/>
+          <p:nvPr>
+            <p:ph idx="2" type="sldImg"/>
+          </p:nvPr>
+        </p:nvSpPr>
+        <p:spPr>
+          <a:xfrm>
+            <a:off x="381300" y="685800"/>
+            <a:ext cx="6096000" cy="3429000"/>
+          </a:xfrm>
+          <a:custGeom>
+            <a:rect b="b" l="l" r="r" t="t"/>
+            <a:pathLst>
+              <a:path extrusionOk="0" h="120000" w="120000">
+                <a:moveTo>
+                  <a:pt x="0" y="0"/>
+                </a:moveTo>
+                <a:lnTo>
+                  <a:pt x="120000" y="0"/>
+                </a:lnTo>
+                <a:lnTo>
+                  <a:pt x="120000" y="120000"/>
+                </a:lnTo>
+                <a:lnTo>
+                  <a:pt x="0" y="120000"/>
+                </a:lnTo>
+                <a:close/>
+              </a:path>
+            </a:pathLst>
+          </a:custGeom>
+        </p:spPr>
+      </p:sp>
+      <p:sp>
+        <p:nvSpPr>
+          <p:cNvPr id="237" name="Google Shape;237;g3b8cb400655_0_0:notes"/>
+          <p:cNvSpPr txBox="1"/>
+          <p:nvPr>
+            <p:ph idx="1" type="body"/>
+          </p:nvPr>
+        </p:nvSpPr>
+        <p:spPr>
+          <a:xfrm>
+            <a:off x="685800" y="4343400"/>
+            <a:ext cx="5486400" cy="4114800"/>
+          </a:xfrm>
+          <a:prstGeom prst="rect">
+            <a:avLst/>
+          </a:prstGeom>
+        </p:spPr>
+        <p:txBody>
+          <a:bodyPr anchorCtr="0" anchor="t" bIns="91425" lIns="91425" spcFirstLastPara="1" rIns="91425" wrap="square" tIns="91425">
+            <a:noAutofit/>
+          </a:bodyPr>
+          <a:lstStyle/>
+          <a:p>
+            <a:pPr indent="0" lvl="0" marL="0" rtl="0" algn="l">
+              <a:spcBef>
+                <a:spcPts val="0"/>
+              </a:spcBef>
+              <a:spcAft>
+                <a:spcPts val="0"/>
+              </a:spcAft>
+              <a:buNone/>
+            </a:pPr>
+            <a:r>
+              <a:t/>
+            </a:r>
+            <a:endParaRPr/>
+          </a:p>
+        </p:txBody>
+      </p:sp>
+    </p:spTree>
+  </p:cSld>
+  <p:clrMapOvr>
+    <a:masterClrMapping/>
+  </p:clrMapOvr>
+</p:notes>
+</file>
+
+<file path=ppt/notesSlides/notesSlide21.xml><?xml version="1.0" encoding="utf-8"?>
+<p:notes xmlns:a="http://schemas.openxmlformats.org/drawingml/2006/main" xmlns:r="http://schemas.openxmlformats.org/officeDocument/2006/relationships" xmlns:mc="http://schemas.openxmlformats.org/markup-compatibility/2006" xmlns:mv="urn:schemas-microsoft-com:mac:vml" xmlns:p="http://schemas.openxmlformats.org/presentationml/2006/main" xmlns:c="http://schemas.openxmlformats.org/drawingml/2006/chart" xmlns:dgm="http://schemas.openxmlformats.org/drawingml/2006/diagram" xmlns:o="urn:schemas-microsoft-com:office:office" xmlns:v="urn:schemas-microsoft-com:vml" xmlns:pvml="urn:schemas-microsoft-com:office:powerpoint" xmlns:com="http://schemas.openxmlformats.org/drawingml/2006/compatibility" xmlns:p14="http://schemas.microsoft.com/office/powerpoint/2010/main" xmlns:p15="http://schemas.microsoft.com/office/powerpoint/2012/main" xmlns:ahyp="http://schemas.microsoft.com/office/drawing/2018/hyperlinkcolor" showMasterPhAnim="0" showMasterSp="0">
+  <p:cSld>
+    <p:spTree>
+      <p:nvGrpSpPr>
+        <p:cNvPr id="241" name="Shape 241"/>
+        <p:cNvGrpSpPr/>
+        <p:nvPr/>
+      </p:nvGrpSpPr>
+      <p:grpSpPr>
+        <a:xfrm>
+          <a:off x="0" y="0"/>
+          <a:ext cx="0" cy="0"/>
+          <a:chOff x="0" y="0"/>
+          <a:chExt cx="0" cy="0"/>
+        </a:xfrm>
+      </p:grpSpPr>
+      <p:sp>
+        <p:nvSpPr>
+          <p:cNvPr id="242" name="Google Shape;242;g3b8cb400655_0_6:notes"/>
+          <p:cNvSpPr/>
+          <p:nvPr>
+            <p:ph idx="2" type="sldImg"/>
+          </p:nvPr>
+        </p:nvSpPr>
+        <p:spPr>
+          <a:xfrm>
+            <a:off x="381300" y="685800"/>
+            <a:ext cx="6096000" cy="3429000"/>
+          </a:xfrm>
+          <a:custGeom>
+            <a:rect b="b" l="l" r="r" t="t"/>
+            <a:pathLst>
+              <a:path extrusionOk="0" h="120000" w="120000">
+                <a:moveTo>
+                  <a:pt x="0" y="0"/>
+                </a:moveTo>
+                <a:lnTo>
+                  <a:pt x="120000" y="0"/>
+                </a:lnTo>
+                <a:lnTo>
+                  <a:pt x="120000" y="120000"/>
+                </a:lnTo>
+                <a:lnTo>
+                  <a:pt x="0" y="120000"/>
+                </a:lnTo>
+                <a:close/>
+              </a:path>
+            </a:pathLst>
+          </a:custGeom>
+        </p:spPr>
+      </p:sp>
+      <p:sp>
+        <p:nvSpPr>
+          <p:cNvPr id="243" name="Google Shape;243;g3b8cb400655_0_6:notes"/>
+          <p:cNvSpPr txBox="1"/>
+          <p:nvPr>
+            <p:ph idx="1" type="body"/>
+          </p:nvPr>
+        </p:nvSpPr>
+        <p:spPr>
+          <a:xfrm>
+            <a:off x="685800" y="4343400"/>
+            <a:ext cx="5486400" cy="4114800"/>
+          </a:xfrm>
+          <a:prstGeom prst="rect">
+            <a:avLst/>
+          </a:prstGeom>
+        </p:spPr>
+        <p:txBody>
+          <a:bodyPr anchorCtr="0" anchor="t" bIns="91425" lIns="91425" spcFirstLastPara="1" rIns="91425" wrap="square" tIns="91425">
+            <a:noAutofit/>
+          </a:bodyPr>
+          <a:lstStyle/>
+          <a:p>
+            <a:pPr indent="0" lvl="0" marL="0" rtl="0" algn="l">
+              <a:spcBef>
+                <a:spcPts val="0"/>
+              </a:spcBef>
+              <a:spcAft>
+                <a:spcPts val="0"/>
+              </a:spcAft>
               <a:buNone/>
             </a:pPr>
             <a:r>
@@ -2008,7 +2444,7 @@
       </p:grpSpPr>
       <p:sp>
         <p:nvSpPr>
-          <p:cNvPr id="68" name="Google Shape;68;p3:notes"/>
+          <p:cNvPr id="68" name="Google Shape;68;p2:notes"/>
           <p:cNvSpPr/>
           <p:nvPr>
             <p:ph idx="2" type="sldImg"/>
@@ -2053,7 +2489,7 @@
       </p:sp>
       <p:sp>
         <p:nvSpPr>
-          <p:cNvPr id="69" name="Google Shape;69;p3:notes"/>
+          <p:cNvPr id="69" name="Google Shape;69;p2:notes"/>
           <p:cNvSpPr txBox="1"/>
           <p:nvPr>
             <p:ph idx="1" type="body"/>
@@ -2111,7 +2547,7 @@
   <p:cSld>
     <p:spTree>
       <p:nvGrpSpPr>
-        <p:cNvPr id="78" name="Shape 78"/>
+        <p:cNvPr id="72" name="Shape 72"/>
         <p:cNvGrpSpPr/>
         <p:nvPr/>
       </p:nvGrpSpPr>
@@ -2125,205 +2561,7 @@
       </p:grpSpPr>
       <p:sp>
         <p:nvSpPr>
-          <p:cNvPr id="79" name="Google Shape;79;g370fe1968c7_0_0:notes"/>
-          <p:cNvSpPr/>
-          <p:nvPr>
-            <p:ph idx="2" type="sldImg"/>
-          </p:nvPr>
-        </p:nvSpPr>
-        <p:spPr>
-          <a:xfrm>
-            <a:off x="381300" y="685800"/>
-            <a:ext cx="6096000" cy="3429000"/>
-          </a:xfrm>
-          <a:custGeom>
-            <a:rect b="b" l="l" r="r" t="t"/>
-            <a:pathLst>
-              <a:path extrusionOk="0" h="120000" w="120000">
-                <a:moveTo>
-                  <a:pt x="0" y="0"/>
-                </a:moveTo>
-                <a:lnTo>
-                  <a:pt x="120000" y="0"/>
-                </a:lnTo>
-                <a:lnTo>
-                  <a:pt x="120000" y="120000"/>
-                </a:lnTo>
-                <a:lnTo>
-                  <a:pt x="0" y="120000"/>
-                </a:lnTo>
-                <a:close/>
-              </a:path>
-            </a:pathLst>
-          </a:custGeom>
-        </p:spPr>
-      </p:sp>
-      <p:sp>
-        <p:nvSpPr>
-          <p:cNvPr id="80" name="Google Shape;80;g370fe1968c7_0_0:notes"/>
-          <p:cNvSpPr txBox="1"/>
-          <p:nvPr>
-            <p:ph idx="1" type="body"/>
-          </p:nvPr>
-        </p:nvSpPr>
-        <p:spPr>
-          <a:xfrm>
-            <a:off x="685800" y="4343400"/>
-            <a:ext cx="5486400" cy="4114800"/>
-          </a:xfrm>
-          <a:prstGeom prst="rect">
-            <a:avLst/>
-          </a:prstGeom>
-        </p:spPr>
-        <p:txBody>
-          <a:bodyPr anchorCtr="0" anchor="t" bIns="91425" lIns="91425" spcFirstLastPara="1" rIns="91425" wrap="square" tIns="91425">
-            <a:noAutofit/>
-          </a:bodyPr>
-          <a:lstStyle/>
-          <a:p>
-            <a:pPr indent="0" lvl="0" marL="0" rtl="0" algn="l">
-              <a:spcBef>
-                <a:spcPts val="0"/>
-              </a:spcBef>
-              <a:spcAft>
-                <a:spcPts val="0"/>
-              </a:spcAft>
-              <a:buNone/>
-            </a:pPr>
-            <a:r>
-              <a:t/>
-            </a:r>
-            <a:endParaRPr/>
-          </a:p>
-        </p:txBody>
-      </p:sp>
-    </p:spTree>
-  </p:cSld>
-  <p:clrMapOvr>
-    <a:masterClrMapping/>
-  </p:clrMapOvr>
-</p:notes>
-</file>
-
-<file path=ppt/notesSlides/notesSlide5.xml><?xml version="1.0" encoding="utf-8"?>
-<p:notes xmlns:a="http://schemas.openxmlformats.org/drawingml/2006/main" xmlns:r="http://schemas.openxmlformats.org/officeDocument/2006/relationships" xmlns:mc="http://schemas.openxmlformats.org/markup-compatibility/2006" xmlns:mv="urn:schemas-microsoft-com:mac:vml" xmlns:p="http://schemas.openxmlformats.org/presentationml/2006/main" xmlns:c="http://schemas.openxmlformats.org/drawingml/2006/chart" xmlns:dgm="http://schemas.openxmlformats.org/drawingml/2006/diagram" xmlns:o="urn:schemas-microsoft-com:office:office" xmlns:v="urn:schemas-microsoft-com:vml" xmlns:pvml="urn:schemas-microsoft-com:office:powerpoint" xmlns:com="http://schemas.openxmlformats.org/drawingml/2006/compatibility" xmlns:p14="http://schemas.microsoft.com/office/powerpoint/2010/main" xmlns:p15="http://schemas.microsoft.com/office/powerpoint/2012/main" xmlns:ahyp="http://schemas.microsoft.com/office/drawing/2018/hyperlinkcolor" showMasterPhAnim="0" showMasterSp="0">
-  <p:cSld>
-    <p:spTree>
-      <p:nvGrpSpPr>
-        <p:cNvPr id="99" name="Shape 99"/>
-        <p:cNvGrpSpPr/>
-        <p:nvPr/>
-      </p:nvGrpSpPr>
-      <p:grpSpPr>
-        <a:xfrm>
-          <a:off x="0" y="0"/>
-          <a:ext cx="0" cy="0"/>
-          <a:chOff x="0" y="0"/>
-          <a:chExt cx="0" cy="0"/>
-        </a:xfrm>
-      </p:grpSpPr>
-      <p:sp>
-        <p:nvSpPr>
-          <p:cNvPr id="100" name="Google Shape;100;g370fe1968c7_0_44:notes"/>
-          <p:cNvSpPr/>
-          <p:nvPr>
-            <p:ph idx="2" type="sldImg"/>
-          </p:nvPr>
-        </p:nvSpPr>
-        <p:spPr>
-          <a:xfrm>
-            <a:off x="381300" y="685800"/>
-            <a:ext cx="6096000" cy="3429000"/>
-          </a:xfrm>
-          <a:custGeom>
-            <a:rect b="b" l="l" r="r" t="t"/>
-            <a:pathLst>
-              <a:path extrusionOk="0" h="120000" w="120000">
-                <a:moveTo>
-                  <a:pt x="0" y="0"/>
-                </a:moveTo>
-                <a:lnTo>
-                  <a:pt x="120000" y="0"/>
-                </a:lnTo>
-                <a:lnTo>
-                  <a:pt x="120000" y="120000"/>
-                </a:lnTo>
-                <a:lnTo>
-                  <a:pt x="0" y="120000"/>
-                </a:lnTo>
-                <a:close/>
-              </a:path>
-            </a:pathLst>
-          </a:custGeom>
-        </p:spPr>
-      </p:sp>
-      <p:sp>
-        <p:nvSpPr>
-          <p:cNvPr id="101" name="Google Shape;101;g370fe1968c7_0_44:notes"/>
-          <p:cNvSpPr txBox="1"/>
-          <p:nvPr>
-            <p:ph idx="1" type="body"/>
-          </p:nvPr>
-        </p:nvSpPr>
-        <p:spPr>
-          <a:xfrm>
-            <a:off x="685800" y="4343400"/>
-            <a:ext cx="5486400" cy="4114800"/>
-          </a:xfrm>
-          <a:prstGeom prst="rect">
-            <a:avLst/>
-          </a:prstGeom>
-        </p:spPr>
-        <p:txBody>
-          <a:bodyPr anchorCtr="0" anchor="t" bIns="91425" lIns="91425" spcFirstLastPara="1" rIns="91425" wrap="square" tIns="91425">
-            <a:noAutofit/>
-          </a:bodyPr>
-          <a:lstStyle/>
-          <a:p>
-            <a:pPr indent="0" lvl="0" marL="0" rtl="0" algn="l">
-              <a:spcBef>
-                <a:spcPts val="0"/>
-              </a:spcBef>
-              <a:spcAft>
-                <a:spcPts val="0"/>
-              </a:spcAft>
-              <a:buNone/>
-            </a:pPr>
-            <a:r>
-              <a:t/>
-            </a:r>
-            <a:endParaRPr/>
-          </a:p>
-        </p:txBody>
-      </p:sp>
-    </p:spTree>
-  </p:cSld>
-  <p:clrMapOvr>
-    <a:masterClrMapping/>
-  </p:clrMapOvr>
-</p:notes>
-</file>
-
-<file path=ppt/notesSlides/notesSlide6.xml><?xml version="1.0" encoding="utf-8"?>
-<p:notes xmlns:a="http://schemas.openxmlformats.org/drawingml/2006/main" xmlns:r="http://schemas.openxmlformats.org/officeDocument/2006/relationships" xmlns:mc="http://schemas.openxmlformats.org/markup-compatibility/2006" xmlns:mv="urn:schemas-microsoft-com:mac:vml" xmlns:p="http://schemas.openxmlformats.org/presentationml/2006/main" xmlns:c="http://schemas.openxmlformats.org/drawingml/2006/chart" xmlns:dgm="http://schemas.openxmlformats.org/drawingml/2006/diagram" xmlns:o="urn:schemas-microsoft-com:office:office" xmlns:v="urn:schemas-microsoft-com:vml" xmlns:pvml="urn:schemas-microsoft-com:office:powerpoint" xmlns:com="http://schemas.openxmlformats.org/drawingml/2006/compatibility" xmlns:p14="http://schemas.microsoft.com/office/powerpoint/2010/main" xmlns:p15="http://schemas.microsoft.com/office/powerpoint/2012/main" xmlns:ahyp="http://schemas.microsoft.com/office/drawing/2018/hyperlinkcolor" showMasterPhAnim="0" showMasterSp="0">
-  <p:cSld>
-    <p:spTree>
-      <p:nvGrpSpPr>
-        <p:cNvPr id="111" name="Shape 111"/>
-        <p:cNvGrpSpPr/>
-        <p:nvPr/>
-      </p:nvGrpSpPr>
-      <p:grpSpPr>
-        <a:xfrm>
-          <a:off x="0" y="0"/>
-          <a:ext cx="0" cy="0"/>
-          <a:chOff x="0" y="0"/>
-          <a:chExt cx="0" cy="0"/>
-        </a:xfrm>
-      </p:grpSpPr>
-      <p:sp>
-        <p:nvSpPr>
-          <p:cNvPr id="112" name="Google Shape;112;p4:notes"/>
+          <p:cNvPr id="73" name="Google Shape;73;p3:notes"/>
           <p:cNvSpPr/>
           <p:nvPr>
             <p:ph idx="2" type="sldImg"/>
@@ -2368,7 +2606,7 @@
       </p:sp>
       <p:sp>
         <p:nvSpPr>
-          <p:cNvPr id="113" name="Google Shape;113;p4:notes"/>
+          <p:cNvPr id="74" name="Google Shape;74;p3:notes"/>
           <p:cNvSpPr txBox="1"/>
           <p:nvPr>
             <p:ph idx="1" type="body"/>
@@ -2421,12 +2659,12 @@
 </p:notes>
 </file>
 
-<file path=ppt/notesSlides/notesSlide7.xml><?xml version="1.0" encoding="utf-8"?>
+<file path=ppt/notesSlides/notesSlide5.xml><?xml version="1.0" encoding="utf-8"?>
 <p:notes xmlns:a="http://schemas.openxmlformats.org/drawingml/2006/main" xmlns:r="http://schemas.openxmlformats.org/officeDocument/2006/relationships" xmlns:mc="http://schemas.openxmlformats.org/markup-compatibility/2006" xmlns:mv="urn:schemas-microsoft-com:mac:vml" xmlns:p="http://schemas.openxmlformats.org/presentationml/2006/main" xmlns:c="http://schemas.openxmlformats.org/drawingml/2006/chart" xmlns:dgm="http://schemas.openxmlformats.org/drawingml/2006/diagram" xmlns:o="urn:schemas-microsoft-com:office:office" xmlns:v="urn:schemas-microsoft-com:vml" xmlns:pvml="urn:schemas-microsoft-com:office:powerpoint" xmlns:com="http://schemas.openxmlformats.org/drawingml/2006/compatibility" xmlns:p14="http://schemas.microsoft.com/office/powerpoint/2010/main" xmlns:p15="http://schemas.microsoft.com/office/powerpoint/2012/main" xmlns:ahyp="http://schemas.microsoft.com/office/drawing/2018/hyperlinkcolor" showMasterPhAnim="0" showMasterSp="0">
   <p:cSld>
     <p:spTree>
       <p:nvGrpSpPr>
-        <p:cNvPr id="118" name="Shape 118"/>
+        <p:cNvPr id="83" name="Shape 83"/>
         <p:cNvGrpSpPr/>
         <p:nvPr/>
       </p:nvGrpSpPr>
@@ -2440,7 +2678,7 @@
       </p:grpSpPr>
       <p:sp>
         <p:nvSpPr>
-          <p:cNvPr id="119" name="Google Shape;119;p5:notes"/>
+          <p:cNvPr id="84" name="Google Shape;84;p4:notes"/>
           <p:cNvSpPr/>
           <p:nvPr>
             <p:ph idx="2" type="sldImg"/>
@@ -2485,7 +2723,7 @@
       </p:sp>
       <p:sp>
         <p:nvSpPr>
-          <p:cNvPr id="120" name="Google Shape;120;p5:notes"/>
+          <p:cNvPr id="85" name="Google Shape;85;p4:notes"/>
           <p:cNvSpPr txBox="1"/>
           <p:nvPr>
             <p:ph idx="1" type="body"/>
@@ -2538,12 +2776,12 @@
 </p:notes>
 </file>
 
-<file path=ppt/notesSlides/notesSlide8.xml><?xml version="1.0" encoding="utf-8"?>
+<file path=ppt/notesSlides/notesSlide6.xml><?xml version="1.0" encoding="utf-8"?>
 <p:notes xmlns:a="http://schemas.openxmlformats.org/drawingml/2006/main" xmlns:r="http://schemas.openxmlformats.org/officeDocument/2006/relationships" xmlns:mc="http://schemas.openxmlformats.org/markup-compatibility/2006" xmlns:mv="urn:schemas-microsoft-com:mac:vml" xmlns:p="http://schemas.openxmlformats.org/presentationml/2006/main" xmlns:c="http://schemas.openxmlformats.org/drawingml/2006/chart" xmlns:dgm="http://schemas.openxmlformats.org/drawingml/2006/diagram" xmlns:o="urn:schemas-microsoft-com:office:office" xmlns:v="urn:schemas-microsoft-com:vml" xmlns:pvml="urn:schemas-microsoft-com:office:powerpoint" xmlns:com="http://schemas.openxmlformats.org/drawingml/2006/compatibility" xmlns:p14="http://schemas.microsoft.com/office/powerpoint/2010/main" xmlns:p15="http://schemas.microsoft.com/office/powerpoint/2012/main" xmlns:ahyp="http://schemas.microsoft.com/office/drawing/2018/hyperlinkcolor" showMasterPhAnim="0" showMasterSp="0">
   <p:cSld>
     <p:spTree>
       <p:nvGrpSpPr>
-        <p:cNvPr id="124" name="Shape 124"/>
+        <p:cNvPr id="104" name="Shape 104"/>
         <p:cNvGrpSpPr/>
         <p:nvPr/>
       </p:nvGrpSpPr>
@@ -2557,7 +2795,7 @@
       </p:grpSpPr>
       <p:sp>
         <p:nvSpPr>
-          <p:cNvPr id="125" name="Google Shape;125;p6:notes"/>
+          <p:cNvPr id="105" name="Google Shape;105;p5:notes"/>
           <p:cNvSpPr/>
           <p:nvPr>
             <p:ph idx="2" type="sldImg"/>
@@ -2602,7 +2840,223 @@
       </p:sp>
       <p:sp>
         <p:nvSpPr>
-          <p:cNvPr id="126" name="Google Shape;126;p6:notes"/>
+          <p:cNvPr id="106" name="Google Shape;106;p5:notes"/>
+          <p:cNvSpPr txBox="1"/>
+          <p:nvPr>
+            <p:ph idx="1" type="body"/>
+          </p:nvPr>
+        </p:nvSpPr>
+        <p:spPr>
+          <a:xfrm>
+            <a:off x="685800" y="4343400"/>
+            <a:ext cx="5486400" cy="4114800"/>
+          </a:xfrm>
+          <a:prstGeom prst="rect">
+            <a:avLst/>
+          </a:prstGeom>
+          <a:noFill/>
+          <a:ln>
+            <a:noFill/>
+          </a:ln>
+        </p:spPr>
+        <p:txBody>
+          <a:bodyPr anchorCtr="0" anchor="t" bIns="91425" lIns="91425" spcFirstLastPara="1" rIns="91425" wrap="square" tIns="91425">
+            <a:noAutofit/>
+          </a:bodyPr>
+          <a:lstStyle/>
+          <a:p>
+            <a:pPr indent="0" lvl="0" marL="0" rtl="0" algn="l">
+              <a:lnSpc>
+                <a:spcPct val="100000"/>
+              </a:lnSpc>
+              <a:spcBef>
+                <a:spcPts val="0"/>
+              </a:spcBef>
+              <a:spcAft>
+                <a:spcPts val="0"/>
+              </a:spcAft>
+              <a:buSzPts val="1100"/>
+              <a:buNone/>
+            </a:pPr>
+            <a:r>
+              <a:t/>
+            </a:r>
+            <a:endParaRPr/>
+          </a:p>
+        </p:txBody>
+      </p:sp>
+    </p:spTree>
+  </p:cSld>
+  <p:clrMapOvr>
+    <a:masterClrMapping/>
+  </p:clrMapOvr>
+</p:notes>
+</file>
+
+<file path=ppt/notesSlides/notesSlide7.xml><?xml version="1.0" encoding="utf-8"?>
+<p:notes xmlns:a="http://schemas.openxmlformats.org/drawingml/2006/main" xmlns:r="http://schemas.openxmlformats.org/officeDocument/2006/relationships" xmlns:mc="http://schemas.openxmlformats.org/markup-compatibility/2006" xmlns:mv="urn:schemas-microsoft-com:mac:vml" xmlns:p="http://schemas.openxmlformats.org/presentationml/2006/main" xmlns:c="http://schemas.openxmlformats.org/drawingml/2006/chart" xmlns:dgm="http://schemas.openxmlformats.org/drawingml/2006/diagram" xmlns:o="urn:schemas-microsoft-com:office:office" xmlns:v="urn:schemas-microsoft-com:vml" xmlns:pvml="urn:schemas-microsoft-com:office:powerpoint" xmlns:com="http://schemas.openxmlformats.org/drawingml/2006/compatibility" xmlns:p14="http://schemas.microsoft.com/office/powerpoint/2010/main" xmlns:p15="http://schemas.microsoft.com/office/powerpoint/2012/main" xmlns:ahyp="http://schemas.microsoft.com/office/drawing/2018/hyperlinkcolor" showMasterPhAnim="0" showMasterSp="0">
+  <p:cSld>
+    <p:spTree>
+      <p:nvGrpSpPr>
+        <p:cNvPr id="116" name="Shape 116"/>
+        <p:cNvGrpSpPr/>
+        <p:nvPr/>
+      </p:nvGrpSpPr>
+      <p:grpSpPr>
+        <a:xfrm>
+          <a:off x="0" y="0"/>
+          <a:ext cx="0" cy="0"/>
+          <a:chOff x="0" y="0"/>
+          <a:chExt cx="0" cy="0"/>
+        </a:xfrm>
+      </p:grpSpPr>
+      <p:sp>
+        <p:nvSpPr>
+          <p:cNvPr id="117" name="Google Shape;117;g37d4eeaee99_0_6:notes"/>
+          <p:cNvSpPr/>
+          <p:nvPr>
+            <p:ph idx="2" type="sldImg"/>
+          </p:nvPr>
+        </p:nvSpPr>
+        <p:spPr>
+          <a:xfrm>
+            <a:off x="381300" y="685800"/>
+            <a:ext cx="6096000" cy="3429000"/>
+          </a:xfrm>
+          <a:custGeom>
+            <a:rect b="b" l="l" r="r" t="t"/>
+            <a:pathLst>
+              <a:path extrusionOk="0" h="120000" w="120000">
+                <a:moveTo>
+                  <a:pt x="0" y="0"/>
+                </a:moveTo>
+                <a:lnTo>
+                  <a:pt x="120000" y="0"/>
+                </a:lnTo>
+                <a:lnTo>
+                  <a:pt x="120000" y="120000"/>
+                </a:lnTo>
+                <a:lnTo>
+                  <a:pt x="0" y="120000"/>
+                </a:lnTo>
+                <a:close/>
+              </a:path>
+            </a:pathLst>
+          </a:custGeom>
+        </p:spPr>
+      </p:sp>
+      <p:sp>
+        <p:nvSpPr>
+          <p:cNvPr id="118" name="Google Shape;118;g37d4eeaee99_0_6:notes"/>
+          <p:cNvSpPr txBox="1"/>
+          <p:nvPr>
+            <p:ph idx="1" type="body"/>
+          </p:nvPr>
+        </p:nvSpPr>
+        <p:spPr>
+          <a:xfrm>
+            <a:off x="685800" y="4343400"/>
+            <a:ext cx="5486400" cy="4114800"/>
+          </a:xfrm>
+          <a:prstGeom prst="rect">
+            <a:avLst/>
+          </a:prstGeom>
+        </p:spPr>
+        <p:txBody>
+          <a:bodyPr anchorCtr="0" anchor="t" bIns="91425" lIns="91425" spcFirstLastPara="1" rIns="91425" wrap="square" tIns="91425">
+            <a:noAutofit/>
+          </a:bodyPr>
+          <a:lstStyle/>
+          <a:p>
+            <a:pPr indent="0" lvl="0" marL="0" rtl="0" algn="l">
+              <a:spcBef>
+                <a:spcPts val="0"/>
+              </a:spcBef>
+              <a:spcAft>
+                <a:spcPts val="0"/>
+              </a:spcAft>
+              <a:buNone/>
+            </a:pPr>
+            <a:r>
+              <a:t/>
+            </a:r>
+            <a:endParaRPr/>
+          </a:p>
+        </p:txBody>
+      </p:sp>
+    </p:spTree>
+  </p:cSld>
+  <p:clrMapOvr>
+    <a:masterClrMapping/>
+  </p:clrMapOvr>
+</p:notes>
+</file>
+
+<file path=ppt/notesSlides/notesSlide8.xml><?xml version="1.0" encoding="utf-8"?>
+<p:notes xmlns:a="http://schemas.openxmlformats.org/drawingml/2006/main" xmlns:r="http://schemas.openxmlformats.org/officeDocument/2006/relationships" xmlns:mc="http://schemas.openxmlformats.org/markup-compatibility/2006" xmlns:mv="urn:schemas-microsoft-com:mac:vml" xmlns:p="http://schemas.openxmlformats.org/presentationml/2006/main" xmlns:c="http://schemas.openxmlformats.org/drawingml/2006/chart" xmlns:dgm="http://schemas.openxmlformats.org/drawingml/2006/diagram" xmlns:o="urn:schemas-microsoft-com:office:office" xmlns:v="urn:schemas-microsoft-com:vml" xmlns:pvml="urn:schemas-microsoft-com:office:powerpoint" xmlns:com="http://schemas.openxmlformats.org/drawingml/2006/compatibility" xmlns:p14="http://schemas.microsoft.com/office/powerpoint/2010/main" xmlns:p15="http://schemas.microsoft.com/office/powerpoint/2012/main" xmlns:ahyp="http://schemas.microsoft.com/office/drawing/2018/hyperlinkcolor" showMasterPhAnim="0" showMasterSp="0">
+  <p:cSld>
+    <p:spTree>
+      <p:nvGrpSpPr>
+        <p:cNvPr id="121" name="Shape 121"/>
+        <p:cNvGrpSpPr/>
+        <p:nvPr/>
+      </p:nvGrpSpPr>
+      <p:grpSpPr>
+        <a:xfrm>
+          <a:off x="0" y="0"/>
+          <a:ext cx="0" cy="0"/>
+          <a:chOff x="0" y="0"/>
+          <a:chExt cx="0" cy="0"/>
+        </a:xfrm>
+      </p:grpSpPr>
+      <p:sp>
+        <p:nvSpPr>
+          <p:cNvPr id="122" name="Google Shape;122;p6:notes"/>
+          <p:cNvSpPr/>
+          <p:nvPr>
+            <p:ph idx="2" type="sldImg"/>
+          </p:nvPr>
+        </p:nvSpPr>
+        <p:spPr>
+          <a:xfrm>
+            <a:off x="381300" y="685800"/>
+            <a:ext cx="6096000" cy="3429000"/>
+          </a:xfrm>
+          <a:custGeom>
+            <a:rect b="b" l="l" r="r" t="t"/>
+            <a:pathLst>
+              <a:path extrusionOk="0" h="120000" w="120000">
+                <a:moveTo>
+                  <a:pt x="0" y="0"/>
+                </a:moveTo>
+                <a:lnTo>
+                  <a:pt x="120000" y="0"/>
+                </a:lnTo>
+                <a:lnTo>
+                  <a:pt x="120000" y="120000"/>
+                </a:lnTo>
+                <a:lnTo>
+                  <a:pt x="0" y="120000"/>
+                </a:lnTo>
+                <a:close/>
+              </a:path>
+            </a:pathLst>
+          </a:custGeom>
+          <a:noFill/>
+          <a:ln cap="flat" cmpd="sng" w="9525">
+            <a:solidFill>
+              <a:srgbClr val="000000"/>
+            </a:solidFill>
+            <a:prstDash val="solid"/>
+            <a:round/>
+            <a:headEnd len="sm" w="sm" type="none"/>
+            <a:tailEnd len="sm" w="sm" type="none"/>
+          </a:ln>
+        </p:spPr>
+      </p:sp>
+      <p:sp>
+        <p:nvSpPr>
+          <p:cNvPr id="123" name="Google Shape;123;p6:notes"/>
           <p:cNvSpPr txBox="1"/>
           <p:nvPr>
             <p:ph idx="1" type="body"/>
@@ -2660,7 +3114,7 @@
   <p:cSld>
     <p:spTree>
       <p:nvGrpSpPr>
-        <p:cNvPr id="134" name="Shape 134"/>
+        <p:cNvPr id="128" name="Shape 128"/>
         <p:cNvGrpSpPr/>
         <p:nvPr/>
       </p:nvGrpSpPr>
@@ -2674,7 +3128,7 @@
       </p:grpSpPr>
       <p:sp>
         <p:nvSpPr>
-          <p:cNvPr id="135" name="Google Shape;135;g370fe1968c7_0_34:notes"/>
+          <p:cNvPr id="129" name="Google Shape;129;p7:notes"/>
           <p:cNvSpPr/>
           <p:nvPr>
             <p:ph idx="2" type="sldImg"/>
@@ -2705,11 +3159,21 @@
               </a:path>
             </a:pathLst>
           </a:custGeom>
+          <a:noFill/>
+          <a:ln cap="flat" cmpd="sng" w="9525">
+            <a:solidFill>
+              <a:srgbClr val="000000"/>
+            </a:solidFill>
+            <a:prstDash val="solid"/>
+            <a:round/>
+            <a:headEnd len="sm" w="sm" type="none"/>
+            <a:tailEnd len="sm" w="sm" type="none"/>
+          </a:ln>
         </p:spPr>
       </p:sp>
       <p:sp>
         <p:nvSpPr>
-          <p:cNvPr id="136" name="Google Shape;136;g370fe1968c7_0_34:notes"/>
+          <p:cNvPr id="130" name="Google Shape;130;p7:notes"/>
           <p:cNvSpPr txBox="1"/>
           <p:nvPr>
             <p:ph idx="1" type="body"/>
@@ -2723,6 +3187,10 @@
           <a:prstGeom prst="rect">
             <a:avLst/>
           </a:prstGeom>
+          <a:noFill/>
+          <a:ln>
+            <a:noFill/>
+          </a:ln>
         </p:spPr>
         <p:txBody>
           <a:bodyPr anchorCtr="0" anchor="t" bIns="91425" lIns="91425" spcFirstLastPara="1" rIns="91425" wrap="square" tIns="91425">
@@ -2731,12 +3199,16 @@
           <a:lstStyle/>
           <a:p>
             <a:pPr indent="0" lvl="0" marL="0" rtl="0" algn="l">
-              <a:spcBef>
-                <a:spcPts val="0"/>
-              </a:spcBef>
-              <a:spcAft>
-                <a:spcPts val="0"/>
-              </a:spcAft>
+              <a:lnSpc>
+                <a:spcPct val="100000"/>
+              </a:lnSpc>
+              <a:spcBef>
+                <a:spcPts val="0"/>
+              </a:spcBef>
+              <a:spcAft>
+                <a:spcPts val="0"/>
+              </a:spcAft>
+              <a:buSzPts val="1100"/>
               <a:buNone/>
             </a:pPr>
             <a:r>
@@ -11684,15 +12156,7 @@
                   <a:schemeClr val="dk1"/>
                 </a:solidFill>
               </a:rPr>
-              <a:t>Data Preprocessing &amp; </a:t>
-            </a:r>
-            <a:r>
-              <a:rPr lang="en-GB">
-                <a:solidFill>
-                  <a:schemeClr val="dk1"/>
-                </a:solidFill>
-              </a:rPr>
-              <a:t>Feature Engineering</a:t>
+              <a:t>Data Preprocessing &amp; Feature Engineering</a:t>
             </a:r>
             <a:endParaRPr>
               <a:solidFill>
@@ -11711,7 +12175,7 @@
               <a:spcAft>
                 <a:spcPts val="0"/>
               </a:spcAft>
-              <a:buSzPct val="128918"/>
+              <a:buSzPct val="128917"/>
               <a:buNone/>
             </a:pPr>
             <a:r>
@@ -11738,7 +12202,7 @@
   <p:cSld>
     <p:spTree>
       <p:nvGrpSpPr>
-        <p:cNvPr id="148" name="Shape 148"/>
+        <p:cNvPr id="137" name="Shape 137"/>
         <p:cNvGrpSpPr/>
         <p:nvPr/>
       </p:nvGrpSpPr>
@@ -11752,7 +12216,747 @@
       </p:grpSpPr>
       <p:sp>
         <p:nvSpPr>
-          <p:cNvPr id="149" name="Google Shape;149;p23"/>
+          <p:cNvPr id="138" name="Google Shape;138;p23"/>
+          <p:cNvSpPr txBox="1"/>
+          <p:nvPr>
+            <p:ph type="title"/>
+          </p:nvPr>
+        </p:nvSpPr>
+        <p:spPr>
+          <a:xfrm>
+            <a:off x="0" y="0"/>
+            <a:ext cx="8520600" cy="572700"/>
+          </a:xfrm>
+          <a:prstGeom prst="rect">
+            <a:avLst/>
+          </a:prstGeom>
+          <a:noFill/>
+          <a:ln>
+            <a:noFill/>
+          </a:ln>
+        </p:spPr>
+        <p:txBody>
+          <a:bodyPr anchorCtr="0" anchor="t" bIns="91425" lIns="91425" spcFirstLastPara="1" rIns="91425" wrap="square" tIns="91425">
+            <a:normAutofit fontScale="90000"/>
+          </a:bodyPr>
+          <a:lstStyle/>
+          <a:p>
+            <a:pPr indent="-388620" lvl="0" marL="457200" rtl="0" algn="l">
+              <a:lnSpc>
+                <a:spcPct val="100000"/>
+              </a:lnSpc>
+              <a:spcBef>
+                <a:spcPts val="0"/>
+              </a:spcBef>
+              <a:spcAft>
+                <a:spcPts val="0"/>
+              </a:spcAft>
+              <a:buSzPct val="100000"/>
+              <a:buAutoNum type="alphaLcPeriod"/>
+            </a:pPr>
+            <a:r>
+              <a:rPr lang="en-GB"/>
+              <a:t>Missing values imputation</a:t>
+            </a:r>
+            <a:endParaRPr/>
+          </a:p>
+        </p:txBody>
+      </p:sp>
+      <p:sp>
+        <p:nvSpPr>
+          <p:cNvPr id="139" name="Google Shape;139;p23"/>
+          <p:cNvSpPr txBox="1"/>
+          <p:nvPr>
+            <p:ph idx="1" type="body"/>
+          </p:nvPr>
+        </p:nvSpPr>
+        <p:spPr>
+          <a:xfrm>
+            <a:off x="59025" y="511800"/>
+            <a:ext cx="8520600" cy="3416400"/>
+          </a:xfrm>
+          <a:prstGeom prst="rect">
+            <a:avLst/>
+          </a:prstGeom>
+          <a:noFill/>
+          <a:ln>
+            <a:noFill/>
+          </a:ln>
+        </p:spPr>
+        <p:txBody>
+          <a:bodyPr anchorCtr="0" anchor="t" bIns="91425" lIns="91425" spcFirstLastPara="1" rIns="91425" wrap="square" tIns="91425">
+            <a:normAutofit/>
+          </a:bodyPr>
+          <a:lstStyle/>
+          <a:p>
+            <a:pPr indent="-342900" lvl="0" marL="457200" rtl="0" algn="l">
+              <a:lnSpc>
+                <a:spcPct val="100000"/>
+              </a:lnSpc>
+              <a:spcBef>
+                <a:spcPts val="0"/>
+              </a:spcBef>
+              <a:spcAft>
+                <a:spcPts val="0"/>
+              </a:spcAft>
+              <a:buClr>
+                <a:schemeClr val="dk1"/>
+              </a:buClr>
+              <a:buSzPts val="1800"/>
+              <a:buAutoNum type="arabicPeriod"/>
+            </a:pPr>
+            <a:r>
+              <a:rPr lang="en-GB">
+                <a:solidFill>
+                  <a:schemeClr val="dk1"/>
+                </a:solidFill>
+              </a:rPr>
+              <a:t>Simple Imputer</a:t>
+            </a:r>
+            <a:endParaRPr>
+              <a:solidFill>
+                <a:schemeClr val="dk1"/>
+              </a:solidFill>
+            </a:endParaRPr>
+          </a:p>
+          <a:p>
+            <a:pPr indent="-342900" lvl="0" marL="457200" rtl="0" algn="l">
+              <a:lnSpc>
+                <a:spcPct val="100000"/>
+              </a:lnSpc>
+              <a:spcBef>
+                <a:spcPts val="0"/>
+              </a:spcBef>
+              <a:spcAft>
+                <a:spcPts val="0"/>
+              </a:spcAft>
+              <a:buClr>
+                <a:schemeClr val="dk1"/>
+              </a:buClr>
+              <a:buSzPts val="1800"/>
+              <a:buChar char="●"/>
+            </a:pPr>
+            <a:r>
+              <a:rPr lang="en-GB">
+                <a:solidFill>
+                  <a:schemeClr val="dk1"/>
+                </a:solidFill>
+              </a:rPr>
+              <a:t>Categorical (Most repeated)</a:t>
+            </a:r>
+            <a:endParaRPr>
+              <a:solidFill>
+                <a:schemeClr val="dk1"/>
+              </a:solidFill>
+            </a:endParaRPr>
+          </a:p>
+          <a:p>
+            <a:pPr indent="-342900" lvl="0" marL="457200" rtl="0" algn="l">
+              <a:lnSpc>
+                <a:spcPct val="100000"/>
+              </a:lnSpc>
+              <a:spcBef>
+                <a:spcPts val="0"/>
+              </a:spcBef>
+              <a:spcAft>
+                <a:spcPts val="0"/>
+              </a:spcAft>
+              <a:buClr>
+                <a:schemeClr val="dk1"/>
+              </a:buClr>
+              <a:buSzPts val="1800"/>
+              <a:buChar char="●"/>
+            </a:pPr>
+            <a:r>
+              <a:rPr lang="en-GB">
+                <a:solidFill>
+                  <a:schemeClr val="dk1"/>
+                </a:solidFill>
+              </a:rPr>
+              <a:t>Numerical (mean, mode, median)</a:t>
+            </a:r>
+            <a:endParaRPr>
+              <a:solidFill>
+                <a:schemeClr val="dk1"/>
+              </a:solidFill>
+            </a:endParaRPr>
+          </a:p>
+          <a:p>
+            <a:pPr indent="0" lvl="0" marL="0" rtl="0" algn="l">
+              <a:lnSpc>
+                <a:spcPct val="100000"/>
+              </a:lnSpc>
+              <a:spcBef>
+                <a:spcPts val="0"/>
+              </a:spcBef>
+              <a:spcAft>
+                <a:spcPts val="0"/>
+              </a:spcAft>
+              <a:buSzPts val="1800"/>
+              <a:buNone/>
+            </a:pPr>
+            <a:r>
+              <a:t/>
+            </a:r>
+            <a:endParaRPr>
+              <a:solidFill>
+                <a:schemeClr val="dk1"/>
+              </a:solidFill>
+            </a:endParaRPr>
+          </a:p>
+          <a:p>
+            <a:pPr indent="-342900" lvl="0" marL="457200" rtl="0" algn="l">
+              <a:lnSpc>
+                <a:spcPct val="100000"/>
+              </a:lnSpc>
+              <a:spcBef>
+                <a:spcPts val="0"/>
+              </a:spcBef>
+              <a:spcAft>
+                <a:spcPts val="0"/>
+              </a:spcAft>
+              <a:buClr>
+                <a:schemeClr val="dk1"/>
+              </a:buClr>
+              <a:buSzPts val="1800"/>
+              <a:buAutoNum type="arabicPeriod"/>
+            </a:pPr>
+            <a:r>
+              <a:rPr lang="en-GB">
+                <a:solidFill>
+                  <a:schemeClr val="dk1"/>
+                </a:solidFill>
+              </a:rPr>
+              <a:t>Missing Indicator</a:t>
+            </a:r>
+            <a:endParaRPr>
+              <a:solidFill>
+                <a:schemeClr val="dk1"/>
+              </a:solidFill>
+            </a:endParaRPr>
+          </a:p>
+          <a:p>
+            <a:pPr indent="0" lvl="0" marL="457200" rtl="0" algn="l">
+              <a:lnSpc>
+                <a:spcPct val="100000"/>
+              </a:lnSpc>
+              <a:spcBef>
+                <a:spcPts val="0"/>
+              </a:spcBef>
+              <a:spcAft>
+                <a:spcPts val="0"/>
+              </a:spcAft>
+              <a:buSzPts val="1800"/>
+              <a:buNone/>
+            </a:pPr>
+            <a:r>
+              <a:t/>
+            </a:r>
+            <a:endParaRPr>
+              <a:solidFill>
+                <a:schemeClr val="dk1"/>
+              </a:solidFill>
+            </a:endParaRPr>
+          </a:p>
+          <a:p>
+            <a:pPr indent="-342900" lvl="0" marL="457200" rtl="0" algn="l">
+              <a:lnSpc>
+                <a:spcPct val="100000"/>
+              </a:lnSpc>
+              <a:spcBef>
+                <a:spcPts val="0"/>
+              </a:spcBef>
+              <a:spcAft>
+                <a:spcPts val="0"/>
+              </a:spcAft>
+              <a:buClr>
+                <a:schemeClr val="dk1"/>
+              </a:buClr>
+              <a:buSzPts val="1800"/>
+              <a:buAutoNum type="arabicPeriod"/>
+            </a:pPr>
+            <a:r>
+              <a:rPr lang="en-GB">
+                <a:solidFill>
+                  <a:schemeClr val="dk1"/>
+                </a:solidFill>
+              </a:rPr>
+              <a:t>Random Sample Imputation</a:t>
+            </a:r>
+            <a:endParaRPr>
+              <a:solidFill>
+                <a:schemeClr val="dk1"/>
+              </a:solidFill>
+            </a:endParaRPr>
+          </a:p>
+          <a:p>
+            <a:pPr indent="0" lvl="0" marL="0" rtl="0" algn="l">
+              <a:lnSpc>
+                <a:spcPct val="100000"/>
+              </a:lnSpc>
+              <a:spcBef>
+                <a:spcPts val="0"/>
+              </a:spcBef>
+              <a:spcAft>
+                <a:spcPts val="0"/>
+              </a:spcAft>
+              <a:buSzPts val="1800"/>
+              <a:buNone/>
+            </a:pPr>
+            <a:r>
+              <a:t/>
+            </a:r>
+            <a:endParaRPr>
+              <a:solidFill>
+                <a:schemeClr val="dk1"/>
+              </a:solidFill>
+            </a:endParaRPr>
+          </a:p>
+          <a:p>
+            <a:pPr indent="-342900" lvl="0" marL="457200" rtl="0" algn="l">
+              <a:lnSpc>
+                <a:spcPct val="100000"/>
+              </a:lnSpc>
+              <a:spcBef>
+                <a:spcPts val="0"/>
+              </a:spcBef>
+              <a:spcAft>
+                <a:spcPts val="0"/>
+              </a:spcAft>
+              <a:buClr>
+                <a:schemeClr val="dk1"/>
+              </a:buClr>
+              <a:buSzPts val="1800"/>
+              <a:buAutoNum type="arabicPeriod"/>
+            </a:pPr>
+            <a:r>
+              <a:rPr lang="en-GB">
+                <a:solidFill>
+                  <a:schemeClr val="dk1"/>
+                </a:solidFill>
+              </a:rPr>
+              <a:t>Multivariate Imputer</a:t>
+            </a:r>
+            <a:endParaRPr>
+              <a:solidFill>
+                <a:schemeClr val="dk1"/>
+              </a:solidFill>
+            </a:endParaRPr>
+          </a:p>
+          <a:p>
+            <a:pPr indent="-342900" lvl="0" marL="457200" rtl="0" algn="l">
+              <a:lnSpc>
+                <a:spcPct val="100000"/>
+              </a:lnSpc>
+              <a:spcBef>
+                <a:spcPts val="0"/>
+              </a:spcBef>
+              <a:spcAft>
+                <a:spcPts val="0"/>
+              </a:spcAft>
+              <a:buClr>
+                <a:schemeClr val="dk1"/>
+              </a:buClr>
+              <a:buSzPts val="1800"/>
+              <a:buChar char="●"/>
+            </a:pPr>
+            <a:r>
+              <a:rPr lang="en-GB">
+                <a:solidFill>
+                  <a:schemeClr val="dk1"/>
+                </a:solidFill>
+              </a:rPr>
+              <a:t>kNN</a:t>
+            </a:r>
+            <a:endParaRPr>
+              <a:solidFill>
+                <a:schemeClr val="dk1"/>
+              </a:solidFill>
+            </a:endParaRPr>
+          </a:p>
+          <a:p>
+            <a:pPr indent="-342900" lvl="0" marL="457200" rtl="0" algn="l">
+              <a:lnSpc>
+                <a:spcPct val="100000"/>
+              </a:lnSpc>
+              <a:spcBef>
+                <a:spcPts val="0"/>
+              </a:spcBef>
+              <a:spcAft>
+                <a:spcPts val="0"/>
+              </a:spcAft>
+              <a:buClr>
+                <a:schemeClr val="dk1"/>
+              </a:buClr>
+              <a:buSzPts val="1800"/>
+              <a:buChar char="●"/>
+            </a:pPr>
+            <a:r>
+              <a:rPr lang="en-GB">
+                <a:solidFill>
+                  <a:schemeClr val="dk1"/>
+                </a:solidFill>
+              </a:rPr>
+              <a:t>Chained Equations/Iterative Imputer</a:t>
+            </a:r>
+            <a:endParaRPr>
+              <a:solidFill>
+                <a:schemeClr val="dk1"/>
+              </a:solidFill>
+            </a:endParaRPr>
+          </a:p>
+        </p:txBody>
+      </p:sp>
+      <p:pic>
+        <p:nvPicPr>
+          <p:cNvPr id="140" name="Google Shape;140;p23"/>
+          <p:cNvPicPr preferRelativeResize="0"/>
+          <p:nvPr/>
+        </p:nvPicPr>
+        <p:blipFill rotWithShape="1">
+          <a:blip r:embed="rId3">
+            <a:alphaModFix/>
+          </a:blip>
+          <a:srcRect b="0" l="0" r="0" t="0"/>
+          <a:stretch/>
+        </p:blipFill>
+        <p:spPr>
+          <a:xfrm>
+            <a:off x="4701350" y="96700"/>
+            <a:ext cx="4395525" cy="1517875"/>
+          </a:xfrm>
+          <a:prstGeom prst="rect">
+            <a:avLst/>
+          </a:prstGeom>
+          <a:noFill/>
+          <a:ln>
+            <a:noFill/>
+          </a:ln>
+        </p:spPr>
+      </p:pic>
+      <p:pic>
+        <p:nvPicPr>
+          <p:cNvPr id="141" name="Google Shape;141;p23"/>
+          <p:cNvPicPr preferRelativeResize="0"/>
+          <p:nvPr/>
+        </p:nvPicPr>
+        <p:blipFill rotWithShape="1">
+          <a:blip r:embed="rId4">
+            <a:alphaModFix/>
+          </a:blip>
+          <a:srcRect b="0" l="0" r="0" t="0"/>
+          <a:stretch/>
+        </p:blipFill>
+        <p:spPr>
+          <a:xfrm>
+            <a:off x="4809625" y="1739313"/>
+            <a:ext cx="3212025" cy="1664875"/>
+          </a:xfrm>
+          <a:prstGeom prst="rect">
+            <a:avLst/>
+          </a:prstGeom>
+          <a:noFill/>
+          <a:ln>
+            <a:noFill/>
+          </a:ln>
+        </p:spPr>
+      </p:pic>
+      <p:pic>
+        <p:nvPicPr>
+          <p:cNvPr id="142" name="Google Shape;142;p23"/>
+          <p:cNvPicPr preferRelativeResize="0"/>
+          <p:nvPr/>
+        </p:nvPicPr>
+        <p:blipFill rotWithShape="1">
+          <a:blip r:embed="rId5">
+            <a:alphaModFix/>
+          </a:blip>
+          <a:srcRect b="0" l="0" r="0" t="0"/>
+          <a:stretch/>
+        </p:blipFill>
+        <p:spPr>
+          <a:xfrm>
+            <a:off x="59025" y="3693023"/>
+            <a:ext cx="4482275" cy="1377300"/>
+          </a:xfrm>
+          <a:prstGeom prst="rect">
+            <a:avLst/>
+          </a:prstGeom>
+          <a:noFill/>
+          <a:ln>
+            <a:noFill/>
+          </a:ln>
+        </p:spPr>
+      </p:pic>
+      <p:pic>
+        <p:nvPicPr>
+          <p:cNvPr id="143" name="Google Shape;143;p23"/>
+          <p:cNvPicPr preferRelativeResize="0"/>
+          <p:nvPr/>
+        </p:nvPicPr>
+        <p:blipFill rotWithShape="1">
+          <a:blip r:embed="rId6">
+            <a:alphaModFix/>
+          </a:blip>
+          <a:srcRect b="0" l="0" r="0" t="0"/>
+          <a:stretch/>
+        </p:blipFill>
+        <p:spPr>
+          <a:xfrm>
+            <a:off x="4572000" y="3693025"/>
+            <a:ext cx="4482276" cy="1315125"/>
+          </a:xfrm>
+          <a:prstGeom prst="rect">
+            <a:avLst/>
+          </a:prstGeom>
+          <a:noFill/>
+          <a:ln>
+            <a:noFill/>
+          </a:ln>
+        </p:spPr>
+      </p:pic>
+    </p:spTree>
+  </p:cSld>
+  <p:clrMapOvr>
+    <a:masterClrMapping/>
+  </p:clrMapOvr>
+</p:sld>
+</file>
+
+<file path=ppt/slides/slide11.xml><?xml version="1.0" encoding="utf-8"?>
+<p:sld xmlns:a="http://schemas.openxmlformats.org/drawingml/2006/main" xmlns:r="http://schemas.openxmlformats.org/officeDocument/2006/relationships" xmlns:mc="http://schemas.openxmlformats.org/markup-compatibility/2006" xmlns:mv="urn:schemas-microsoft-com:mac:vml" xmlns:p="http://schemas.openxmlformats.org/presentationml/2006/main" xmlns:c="http://schemas.openxmlformats.org/drawingml/2006/chart" xmlns:dgm="http://schemas.openxmlformats.org/drawingml/2006/diagram" xmlns:o="urn:schemas-microsoft-com:office:office" xmlns:v="urn:schemas-microsoft-com:vml" xmlns:pvml="urn:schemas-microsoft-com:office:powerpoint" xmlns:com="http://schemas.openxmlformats.org/drawingml/2006/compatibility" xmlns:p14="http://schemas.microsoft.com/office/powerpoint/2010/main" xmlns:p15="http://schemas.microsoft.com/office/powerpoint/2012/main" xmlns:ahyp="http://schemas.microsoft.com/office/drawing/2018/hyperlinkcolor">
+  <p:cSld>
+    <p:spTree>
+      <p:nvGrpSpPr>
+        <p:cNvPr id="147" name="Shape 147"/>
+        <p:cNvGrpSpPr/>
+        <p:nvPr/>
+      </p:nvGrpSpPr>
+      <p:grpSpPr>
+        <a:xfrm>
+          <a:off x="0" y="0"/>
+          <a:ext cx="0" cy="0"/>
+          <a:chOff x="0" y="0"/>
+          <a:chExt cx="0" cy="0"/>
+        </a:xfrm>
+      </p:grpSpPr>
+      <p:pic>
+        <p:nvPicPr>
+          <p:cNvPr id="148" name="Google Shape;148;p24"/>
+          <p:cNvPicPr preferRelativeResize="0"/>
+          <p:nvPr/>
+        </p:nvPicPr>
+        <p:blipFill rotWithShape="1">
+          <a:blip r:embed="rId3">
+            <a:alphaModFix/>
+          </a:blip>
+          <a:srcRect b="0" l="14507" r="0" t="25628"/>
+          <a:stretch/>
+        </p:blipFill>
+        <p:spPr>
+          <a:xfrm>
+            <a:off x="93725" y="189500"/>
+            <a:ext cx="2717675" cy="360925"/>
+          </a:xfrm>
+          <a:prstGeom prst="rect">
+            <a:avLst/>
+          </a:prstGeom>
+          <a:noFill/>
+          <a:ln>
+            <a:noFill/>
+          </a:ln>
+        </p:spPr>
+      </p:pic>
+      <p:pic>
+        <p:nvPicPr>
+          <p:cNvPr id="149" name="Google Shape;149;p24"/>
+          <p:cNvPicPr preferRelativeResize="0"/>
+          <p:nvPr/>
+        </p:nvPicPr>
+        <p:blipFill rotWithShape="1">
+          <a:blip r:embed="rId4">
+            <a:alphaModFix/>
+          </a:blip>
+          <a:srcRect b="0" l="0" r="0" t="0"/>
+          <a:stretch/>
+        </p:blipFill>
+        <p:spPr>
+          <a:xfrm>
+            <a:off x="93725" y="675750"/>
+            <a:ext cx="2600325" cy="495300"/>
+          </a:xfrm>
+          <a:prstGeom prst="rect">
+            <a:avLst/>
+          </a:prstGeom>
+          <a:noFill/>
+          <a:ln>
+            <a:noFill/>
+          </a:ln>
+        </p:spPr>
+      </p:pic>
+      <p:pic>
+        <p:nvPicPr>
+          <p:cNvPr id="150" name="Google Shape;150;p24"/>
+          <p:cNvPicPr preferRelativeResize="0"/>
+          <p:nvPr/>
+        </p:nvPicPr>
+        <p:blipFill rotWithShape="1">
+          <a:blip r:embed="rId5">
+            <a:alphaModFix/>
+          </a:blip>
+          <a:srcRect b="0" l="0" r="0" t="0"/>
+          <a:stretch/>
+        </p:blipFill>
+        <p:spPr>
+          <a:xfrm>
+            <a:off x="93725" y="1251275"/>
+            <a:ext cx="4501000" cy="598600"/>
+          </a:xfrm>
+          <a:prstGeom prst="rect">
+            <a:avLst/>
+          </a:prstGeom>
+          <a:noFill/>
+          <a:ln>
+            <a:noFill/>
+          </a:ln>
+        </p:spPr>
+      </p:pic>
+      <p:pic>
+        <p:nvPicPr>
+          <p:cNvPr id="151" name="Google Shape;151;p24"/>
+          <p:cNvPicPr preferRelativeResize="0"/>
+          <p:nvPr/>
+        </p:nvPicPr>
+        <p:blipFill rotWithShape="1">
+          <a:blip r:embed="rId6">
+            <a:alphaModFix/>
+          </a:blip>
+          <a:srcRect b="0" l="0" r="0" t="17626"/>
+          <a:stretch/>
+        </p:blipFill>
+        <p:spPr>
+          <a:xfrm>
+            <a:off x="93725" y="1930100"/>
+            <a:ext cx="6509471" cy="495300"/>
+          </a:xfrm>
+          <a:prstGeom prst="rect">
+            <a:avLst/>
+          </a:prstGeom>
+          <a:noFill/>
+          <a:ln>
+            <a:noFill/>
+          </a:ln>
+        </p:spPr>
+      </p:pic>
+      <p:pic>
+        <p:nvPicPr>
+          <p:cNvPr id="152" name="Google Shape;152;p24"/>
+          <p:cNvPicPr preferRelativeResize="0"/>
+          <p:nvPr/>
+        </p:nvPicPr>
+        <p:blipFill rotWithShape="1">
+          <a:blip r:embed="rId7">
+            <a:alphaModFix/>
+          </a:blip>
+          <a:srcRect b="0" l="0" r="0" t="0"/>
+          <a:stretch/>
+        </p:blipFill>
+        <p:spPr>
+          <a:xfrm>
+            <a:off x="152400" y="2577800"/>
+            <a:ext cx="4767263" cy="495300"/>
+          </a:xfrm>
+          <a:prstGeom prst="rect">
+            <a:avLst/>
+          </a:prstGeom>
+          <a:noFill/>
+          <a:ln>
+            <a:noFill/>
+          </a:ln>
+        </p:spPr>
+      </p:pic>
+      <p:pic>
+        <p:nvPicPr>
+          <p:cNvPr id="153" name="Google Shape;153;p24"/>
+          <p:cNvPicPr preferRelativeResize="0"/>
+          <p:nvPr/>
+        </p:nvPicPr>
+        <p:blipFill rotWithShape="1">
+          <a:blip r:embed="rId8">
+            <a:alphaModFix/>
+          </a:blip>
+          <a:srcRect b="0" l="0" r="0" t="0"/>
+          <a:stretch/>
+        </p:blipFill>
+        <p:spPr>
+          <a:xfrm>
+            <a:off x="152400" y="3225500"/>
+            <a:ext cx="5884636" cy="495300"/>
+          </a:xfrm>
+          <a:prstGeom prst="rect">
+            <a:avLst/>
+          </a:prstGeom>
+          <a:noFill/>
+          <a:ln>
+            <a:noFill/>
+          </a:ln>
+        </p:spPr>
+      </p:pic>
+      <p:pic>
+        <p:nvPicPr>
+          <p:cNvPr id="154" name="Google Shape;154;p24"/>
+          <p:cNvPicPr preferRelativeResize="0"/>
+          <p:nvPr/>
+        </p:nvPicPr>
+        <p:blipFill rotWithShape="1">
+          <a:blip r:embed="rId9">
+            <a:alphaModFix/>
+          </a:blip>
+          <a:srcRect b="0" l="0" r="0" t="0"/>
+          <a:stretch/>
+        </p:blipFill>
+        <p:spPr>
+          <a:xfrm>
+            <a:off x="152400" y="3873200"/>
+            <a:ext cx="6079875" cy="1162025"/>
+          </a:xfrm>
+          <a:prstGeom prst="rect">
+            <a:avLst/>
+          </a:prstGeom>
+          <a:noFill/>
+          <a:ln>
+            <a:noFill/>
+          </a:ln>
+        </p:spPr>
+      </p:pic>
+    </p:spTree>
+  </p:cSld>
+  <p:clrMapOvr>
+    <a:masterClrMapping/>
+  </p:clrMapOvr>
+</p:sld>
+</file>
+
+<file path=ppt/slides/slide12.xml><?xml version="1.0" encoding="utf-8"?>
+<p:sld xmlns:a="http://schemas.openxmlformats.org/drawingml/2006/main" xmlns:r="http://schemas.openxmlformats.org/officeDocument/2006/relationships" xmlns:mc="http://schemas.openxmlformats.org/markup-compatibility/2006" xmlns:mv="urn:schemas-microsoft-com:mac:vml" xmlns:p="http://schemas.openxmlformats.org/presentationml/2006/main" xmlns:c="http://schemas.openxmlformats.org/drawingml/2006/chart" xmlns:dgm="http://schemas.openxmlformats.org/drawingml/2006/diagram" xmlns:o="urn:schemas-microsoft-com:office:office" xmlns:v="urn:schemas-microsoft-com:vml" xmlns:pvml="urn:schemas-microsoft-com:office:powerpoint" xmlns:com="http://schemas.openxmlformats.org/drawingml/2006/compatibility" xmlns:p14="http://schemas.microsoft.com/office/powerpoint/2010/main" xmlns:p15="http://schemas.microsoft.com/office/powerpoint/2012/main" xmlns:ahyp="http://schemas.microsoft.com/office/drawing/2018/hyperlinkcolor">
+  <p:cSld>
+    <p:spTree>
+      <p:nvGrpSpPr>
+        <p:cNvPr id="158" name="Shape 158"/>
+        <p:cNvGrpSpPr/>
+        <p:nvPr/>
+      </p:nvGrpSpPr>
+      <p:grpSpPr>
+        <a:xfrm>
+          <a:off x="0" y="0"/>
+          <a:ext cx="0" cy="0"/>
+          <a:chOff x="0" y="0"/>
+          <a:chExt cx="0" cy="0"/>
+        </a:xfrm>
+      </p:grpSpPr>
+      <p:sp>
+        <p:nvSpPr>
+          <p:cNvPr id="159" name="Google Shape;159;p25"/>
           <p:cNvSpPr txBox="1"/>
           <p:nvPr>
             <p:ph type="title"/>
@@ -11800,7 +13004,7 @@
       </p:sp>
       <p:sp>
         <p:nvSpPr>
-          <p:cNvPr id="150" name="Google Shape;150;p23"/>
+          <p:cNvPr id="160" name="Google Shape;160;p25"/>
           <p:cNvSpPr txBox="1"/>
           <p:nvPr>
             <p:ph idx="1" type="body"/>
@@ -11913,7 +13117,7 @@
       </p:sp>
       <p:pic>
         <p:nvPicPr>
-          <p:cNvPr id="151" name="Google Shape;151;p23"/>
+          <p:cNvPr id="161" name="Google Shape;161;p25"/>
           <p:cNvPicPr preferRelativeResize="0"/>
           <p:nvPr/>
         </p:nvPicPr>
@@ -11940,17 +13144,16 @@
       </p:pic>
       <p:pic>
         <p:nvPicPr>
-          <p:cNvPr id="152" name="Google Shape;152;p23"/>
+          <p:cNvPr id="162" name="Google Shape;162;p25"/>
           <p:cNvPicPr preferRelativeResize="0"/>
           <p:nvPr/>
         </p:nvPicPr>
-        <p:blipFill>
+        <p:blipFill rotWithShape="1">
           <a:blip r:embed="rId4">
             <a:alphaModFix/>
           </a:blip>
-          <a:stretch>
-            <a:fillRect/>
-          </a:stretch>
+          <a:srcRect b="0" l="0" r="0" t="0"/>
+          <a:stretch/>
         </p:blipFill>
         <p:spPr>
           <a:xfrm>
@@ -11968,17 +13171,16 @@
       </p:pic>
       <p:pic>
         <p:nvPicPr>
-          <p:cNvPr id="153" name="Google Shape;153;p23"/>
+          <p:cNvPr id="163" name="Google Shape;163;p25"/>
           <p:cNvPicPr preferRelativeResize="0"/>
           <p:nvPr/>
         </p:nvPicPr>
-        <p:blipFill>
+        <p:blipFill rotWithShape="1">
           <a:blip r:embed="rId5">
             <a:alphaModFix/>
           </a:blip>
-          <a:stretch>
-            <a:fillRect/>
-          </a:stretch>
+          <a:srcRect b="0" l="0" r="0" t="0"/>
+          <a:stretch/>
         </p:blipFill>
         <p:spPr>
           <a:xfrm>
@@ -12002,12 +13204,12 @@
 </p:sld>
 </file>
 
-<file path=ppt/slides/slide11.xml><?xml version="1.0" encoding="utf-8"?>
+<file path=ppt/slides/slide13.xml><?xml version="1.0" encoding="utf-8"?>
 <p:sld xmlns:a="http://schemas.openxmlformats.org/drawingml/2006/main" xmlns:r="http://schemas.openxmlformats.org/officeDocument/2006/relationships" xmlns:mc="http://schemas.openxmlformats.org/markup-compatibility/2006" xmlns:mv="urn:schemas-microsoft-com:mac:vml" xmlns:p="http://schemas.openxmlformats.org/presentationml/2006/main" xmlns:c="http://schemas.openxmlformats.org/drawingml/2006/chart" xmlns:dgm="http://schemas.openxmlformats.org/drawingml/2006/diagram" xmlns:o="urn:schemas-microsoft-com:office:office" xmlns:v="urn:schemas-microsoft-com:vml" xmlns:pvml="urn:schemas-microsoft-com:office:powerpoint" xmlns:com="http://schemas.openxmlformats.org/drawingml/2006/compatibility" xmlns:p14="http://schemas.microsoft.com/office/powerpoint/2010/main" xmlns:p15="http://schemas.microsoft.com/office/powerpoint/2012/main" xmlns:ahyp="http://schemas.microsoft.com/office/drawing/2018/hyperlinkcolor">
   <p:cSld>
     <p:spTree>
       <p:nvGrpSpPr>
-        <p:cNvPr id="157" name="Shape 157"/>
+        <p:cNvPr id="167" name="Shape 167"/>
         <p:cNvGrpSpPr/>
         <p:nvPr/>
       </p:nvGrpSpPr>
@@ -12021,7 +13223,7 @@
       </p:grpSpPr>
       <p:sp>
         <p:nvSpPr>
-          <p:cNvPr id="158" name="Google Shape;158;p24"/>
+          <p:cNvPr id="168" name="Google Shape;168;p26"/>
           <p:cNvSpPr txBox="1"/>
           <p:nvPr>
             <p:ph type="title"/>
@@ -12069,7 +13271,7 @@
       </p:sp>
       <p:pic>
         <p:nvPicPr>
-          <p:cNvPr id="159" name="Google Shape;159;p24"/>
+          <p:cNvPr id="169" name="Google Shape;169;p26"/>
           <p:cNvPicPr preferRelativeResize="0"/>
           <p:nvPr/>
         </p:nvPicPr>
@@ -12102,12 +13304,12 @@
 </p:sld>
 </file>
 
-<file path=ppt/slides/slide12.xml><?xml version="1.0" encoding="utf-8"?>
+<file path=ppt/slides/slide14.xml><?xml version="1.0" encoding="utf-8"?>
 <p:sld xmlns:a="http://schemas.openxmlformats.org/drawingml/2006/main" xmlns:r="http://schemas.openxmlformats.org/officeDocument/2006/relationships" xmlns:mc="http://schemas.openxmlformats.org/markup-compatibility/2006" xmlns:mv="urn:schemas-microsoft-com:mac:vml" xmlns:p="http://schemas.openxmlformats.org/presentationml/2006/main" xmlns:c="http://schemas.openxmlformats.org/drawingml/2006/chart" xmlns:dgm="http://schemas.openxmlformats.org/drawingml/2006/diagram" xmlns:o="urn:schemas-microsoft-com:office:office" xmlns:v="urn:schemas-microsoft-com:vml" xmlns:pvml="urn:schemas-microsoft-com:office:powerpoint" xmlns:com="http://schemas.openxmlformats.org/drawingml/2006/compatibility" xmlns:p14="http://schemas.microsoft.com/office/powerpoint/2010/main" xmlns:p15="http://schemas.microsoft.com/office/powerpoint/2012/main" xmlns:ahyp="http://schemas.microsoft.com/office/drawing/2018/hyperlinkcolor">
   <p:cSld>
     <p:spTree>
       <p:nvGrpSpPr>
-        <p:cNvPr id="163" name="Shape 163"/>
+        <p:cNvPr id="173" name="Shape 173"/>
         <p:cNvGrpSpPr/>
         <p:nvPr/>
       </p:nvGrpSpPr>
@@ -12121,7 +13323,7 @@
       </p:grpSpPr>
       <p:sp>
         <p:nvSpPr>
-          <p:cNvPr id="164" name="Google Shape;164;p25"/>
+          <p:cNvPr id="174" name="Google Shape;174;p27"/>
           <p:cNvSpPr txBox="1"/>
           <p:nvPr>
             <p:ph type="title"/>
@@ -12169,7 +13371,7 @@
       </p:sp>
       <p:pic>
         <p:nvPicPr>
-          <p:cNvPr id="165" name="Google Shape;165;p25"/>
+          <p:cNvPr id="175" name="Google Shape;175;p27"/>
           <p:cNvPicPr preferRelativeResize="0"/>
           <p:nvPr/>
         </p:nvPicPr>
@@ -12196,7 +13398,7 @@
       </p:pic>
       <p:pic>
         <p:nvPicPr>
-          <p:cNvPr id="166" name="Google Shape;166;p25"/>
+          <p:cNvPr id="176" name="Google Shape;176;p27"/>
           <p:cNvPicPr preferRelativeResize="0"/>
           <p:nvPr/>
         </p:nvPicPr>
@@ -12223,7 +13425,7 @@
       </p:pic>
       <p:sp>
         <p:nvSpPr>
-          <p:cNvPr id="167" name="Google Shape;167;p25"/>
+          <p:cNvPr id="177" name="Google Shape;177;p27"/>
           <p:cNvSpPr txBox="1"/>
           <p:nvPr/>
         </p:nvSpPr>
@@ -12332,442 +13534,7 @@
       </p:sp>
       <p:pic>
         <p:nvPicPr>
-          <p:cNvPr id="168" name="Google Shape;168;p25"/>
-          <p:cNvPicPr preferRelativeResize="0"/>
-          <p:nvPr/>
-        </p:nvPicPr>
-        <p:blipFill>
-          <a:blip r:embed="rId5">
-            <a:alphaModFix/>
-          </a:blip>
-          <a:stretch>
-            <a:fillRect/>
-          </a:stretch>
-        </p:blipFill>
-        <p:spPr>
-          <a:xfrm>
-            <a:off x="292375" y="3909700"/>
-            <a:ext cx="2638425" cy="342900"/>
-          </a:xfrm>
-          <a:prstGeom prst="rect">
-            <a:avLst/>
-          </a:prstGeom>
-          <a:noFill/>
-          <a:ln>
-            <a:noFill/>
-          </a:ln>
-        </p:spPr>
-      </p:pic>
-    </p:spTree>
-  </p:cSld>
-  <p:clrMapOvr>
-    <a:masterClrMapping/>
-  </p:clrMapOvr>
-</p:sld>
-</file>
-
-<file path=ppt/slides/slide13.xml><?xml version="1.0" encoding="utf-8"?>
-<p:sld xmlns:a="http://schemas.openxmlformats.org/drawingml/2006/main" xmlns:r="http://schemas.openxmlformats.org/officeDocument/2006/relationships" xmlns:mc="http://schemas.openxmlformats.org/markup-compatibility/2006" xmlns:mv="urn:schemas-microsoft-com:mac:vml" xmlns:p="http://schemas.openxmlformats.org/presentationml/2006/main" xmlns:c="http://schemas.openxmlformats.org/drawingml/2006/chart" xmlns:dgm="http://schemas.openxmlformats.org/drawingml/2006/diagram" xmlns:o="urn:schemas-microsoft-com:office:office" xmlns:v="urn:schemas-microsoft-com:vml" xmlns:pvml="urn:schemas-microsoft-com:office:powerpoint" xmlns:com="http://schemas.openxmlformats.org/drawingml/2006/compatibility" xmlns:p14="http://schemas.microsoft.com/office/powerpoint/2010/main" xmlns:p15="http://schemas.microsoft.com/office/powerpoint/2012/main" xmlns:ahyp="http://schemas.microsoft.com/office/drawing/2018/hyperlinkcolor">
-  <p:cSld>
-    <p:spTree>
-      <p:nvGrpSpPr>
-        <p:cNvPr id="172" name="Shape 172"/>
-        <p:cNvGrpSpPr/>
-        <p:nvPr/>
-      </p:nvGrpSpPr>
-      <p:grpSpPr>
-        <a:xfrm>
-          <a:off x="0" y="0"/>
-          <a:ext cx="0" cy="0"/>
-          <a:chOff x="0" y="0"/>
-          <a:chExt cx="0" cy="0"/>
-        </a:xfrm>
-      </p:grpSpPr>
-      <p:sp>
-        <p:nvSpPr>
-          <p:cNvPr id="173" name="Google Shape;173;p26"/>
-          <p:cNvSpPr txBox="1"/>
-          <p:nvPr>
-            <p:ph type="title"/>
-          </p:nvPr>
-        </p:nvSpPr>
-        <p:spPr>
-          <a:xfrm>
-            <a:off x="311700" y="445025"/>
-            <a:ext cx="8520600" cy="572700"/>
-          </a:xfrm>
-          <a:prstGeom prst="rect">
-            <a:avLst/>
-          </a:prstGeom>
-          <a:noFill/>
-          <a:ln>
-            <a:noFill/>
-          </a:ln>
-        </p:spPr>
-        <p:txBody>
-          <a:bodyPr anchorCtr="0" anchor="t" bIns="91425" lIns="91425" spcFirstLastPara="1" rIns="91425" wrap="square" tIns="91425">
-            <a:normAutofit fontScale="90000"/>
-          </a:bodyPr>
-          <a:lstStyle/>
-          <a:p>
-            <a:pPr indent="0" lvl="0" marL="0" rtl="0" algn="l">
-              <a:lnSpc>
-                <a:spcPct val="100000"/>
-              </a:lnSpc>
-              <a:spcBef>
-                <a:spcPts val="0"/>
-              </a:spcBef>
-              <a:spcAft>
-                <a:spcPts val="0"/>
-              </a:spcAft>
-              <a:buSzPct val="111111"/>
-              <a:buNone/>
-            </a:pPr>
-            <a:r>
-              <a:rPr lang="en-GB"/>
-              <a:t>e. Feature Scaling</a:t>
-            </a:r>
-            <a:endParaRPr/>
-          </a:p>
-        </p:txBody>
-      </p:sp>
-      <p:sp>
-        <p:nvSpPr>
-          <p:cNvPr id="174" name="Google Shape;174;p26"/>
-          <p:cNvSpPr txBox="1"/>
-          <p:nvPr>
-            <p:ph idx="1" type="body"/>
-          </p:nvPr>
-        </p:nvSpPr>
-        <p:spPr>
-          <a:xfrm>
-            <a:off x="311700" y="1152475"/>
-            <a:ext cx="8520600" cy="3416400"/>
-          </a:xfrm>
-          <a:prstGeom prst="rect">
-            <a:avLst/>
-          </a:prstGeom>
-          <a:noFill/>
-          <a:ln>
-            <a:noFill/>
-          </a:ln>
-        </p:spPr>
-        <p:txBody>
-          <a:bodyPr anchorCtr="0" anchor="t" bIns="91425" lIns="91425" spcFirstLastPara="1" rIns="91425" wrap="square" tIns="91425">
-            <a:normAutofit/>
-          </a:bodyPr>
-          <a:lstStyle/>
-          <a:p>
-            <a:pPr indent="-342900" lvl="0" marL="457200" rtl="0" algn="l">
-              <a:lnSpc>
-                <a:spcPct val="115000"/>
-              </a:lnSpc>
-              <a:spcBef>
-                <a:spcPts val="0"/>
-              </a:spcBef>
-              <a:spcAft>
-                <a:spcPts val="0"/>
-              </a:spcAft>
-              <a:buClr>
-                <a:schemeClr val="dk1"/>
-              </a:buClr>
-              <a:buSzPts val="1800"/>
-              <a:buAutoNum type="arabicPeriod"/>
-            </a:pPr>
-            <a:r>
-              <a:rPr lang="en-GB">
-                <a:solidFill>
-                  <a:schemeClr val="dk1"/>
-                </a:solidFill>
-              </a:rPr>
-              <a:t>Standardization</a:t>
-            </a:r>
-            <a:endParaRPr>
-              <a:solidFill>
-                <a:schemeClr val="dk1"/>
-              </a:solidFill>
-            </a:endParaRPr>
-          </a:p>
-          <a:p>
-            <a:pPr indent="-342900" lvl="0" marL="457200" rtl="0" algn="l">
-              <a:lnSpc>
-                <a:spcPct val="100000"/>
-              </a:lnSpc>
-              <a:spcBef>
-                <a:spcPts val="0"/>
-              </a:spcBef>
-              <a:spcAft>
-                <a:spcPts val="0"/>
-              </a:spcAft>
-              <a:buClr>
-                <a:schemeClr val="dk1"/>
-              </a:buClr>
-              <a:buSzPts val="1800"/>
-              <a:buAutoNum type="arabicPeriod"/>
-            </a:pPr>
-            <a:r>
-              <a:rPr lang="en-GB">
-                <a:solidFill>
-                  <a:schemeClr val="dk1"/>
-                </a:solidFill>
-              </a:rPr>
-              <a:t>Normalization</a:t>
-            </a:r>
-            <a:endParaRPr>
-              <a:solidFill>
-                <a:schemeClr val="dk1"/>
-              </a:solidFill>
-            </a:endParaRPr>
-          </a:p>
-          <a:p>
-            <a:pPr indent="-342900" lvl="0" marL="914400" rtl="0" algn="l">
-              <a:lnSpc>
-                <a:spcPct val="100000"/>
-              </a:lnSpc>
-              <a:spcBef>
-                <a:spcPts val="0"/>
-              </a:spcBef>
-              <a:spcAft>
-                <a:spcPts val="0"/>
-              </a:spcAft>
-              <a:buClr>
-                <a:schemeClr val="dk1"/>
-              </a:buClr>
-              <a:buSzPts val="1800"/>
-              <a:buChar char="●"/>
-            </a:pPr>
-            <a:r>
-              <a:rPr lang="en-GB">
-                <a:solidFill>
-                  <a:schemeClr val="dk1"/>
-                </a:solidFill>
-              </a:rPr>
-              <a:t>Minmax scaling</a:t>
-            </a:r>
-            <a:endParaRPr>
-              <a:solidFill>
-                <a:schemeClr val="dk1"/>
-              </a:solidFill>
-            </a:endParaRPr>
-          </a:p>
-        </p:txBody>
-      </p:sp>
-      <p:pic>
-        <p:nvPicPr>
-          <p:cNvPr id="175" name="Google Shape;175;p26"/>
-          <p:cNvPicPr preferRelativeResize="0"/>
-          <p:nvPr/>
-        </p:nvPicPr>
-        <p:blipFill rotWithShape="1">
-          <a:blip r:embed="rId3">
-            <a:alphaModFix/>
-          </a:blip>
-          <a:srcRect b="0" l="0" r="0" t="0"/>
-          <a:stretch/>
-        </p:blipFill>
-        <p:spPr>
-          <a:xfrm>
-            <a:off x="3362181" y="1152475"/>
-            <a:ext cx="5079494" cy="3416400"/>
-          </a:xfrm>
-          <a:prstGeom prst="rect">
-            <a:avLst/>
-          </a:prstGeom>
-          <a:noFill/>
-          <a:ln>
-            <a:noFill/>
-          </a:ln>
-        </p:spPr>
-      </p:pic>
-    </p:spTree>
-  </p:cSld>
-  <p:clrMapOvr>
-    <a:masterClrMapping/>
-  </p:clrMapOvr>
-</p:sld>
-</file>
-
-<file path=ppt/slides/slide14.xml><?xml version="1.0" encoding="utf-8"?>
-<p:sld xmlns:a="http://schemas.openxmlformats.org/drawingml/2006/main" xmlns:r="http://schemas.openxmlformats.org/officeDocument/2006/relationships" xmlns:mc="http://schemas.openxmlformats.org/markup-compatibility/2006" xmlns:mv="urn:schemas-microsoft-com:mac:vml" xmlns:p="http://schemas.openxmlformats.org/presentationml/2006/main" xmlns:c="http://schemas.openxmlformats.org/drawingml/2006/chart" xmlns:dgm="http://schemas.openxmlformats.org/drawingml/2006/diagram" xmlns:o="urn:schemas-microsoft-com:office:office" xmlns:v="urn:schemas-microsoft-com:vml" xmlns:pvml="urn:schemas-microsoft-com:office:powerpoint" xmlns:com="http://schemas.openxmlformats.org/drawingml/2006/compatibility" xmlns:p14="http://schemas.microsoft.com/office/powerpoint/2010/main" xmlns:p15="http://schemas.microsoft.com/office/powerpoint/2012/main" xmlns:ahyp="http://schemas.microsoft.com/office/drawing/2018/hyperlinkcolor">
-  <p:cSld>
-    <p:spTree>
-      <p:nvGrpSpPr>
-        <p:cNvPr id="179" name="Shape 179"/>
-        <p:cNvGrpSpPr/>
-        <p:nvPr/>
-      </p:nvGrpSpPr>
-      <p:grpSpPr>
-        <a:xfrm>
-          <a:off x="0" y="0"/>
-          <a:ext cx="0" cy="0"/>
-          <a:chOff x="0" y="0"/>
-          <a:chExt cx="0" cy="0"/>
-        </a:xfrm>
-      </p:grpSpPr>
-      <p:sp>
-        <p:nvSpPr>
-          <p:cNvPr id="180" name="Google Shape;180;p27"/>
-          <p:cNvSpPr txBox="1"/>
-          <p:nvPr>
-            <p:ph type="title"/>
-          </p:nvPr>
-        </p:nvSpPr>
-        <p:spPr>
-          <a:xfrm>
-            <a:off x="0" y="38975"/>
-            <a:ext cx="8520600" cy="572700"/>
-          </a:xfrm>
-          <a:prstGeom prst="rect">
-            <a:avLst/>
-          </a:prstGeom>
-          <a:noFill/>
-          <a:ln>
-            <a:noFill/>
-          </a:ln>
-        </p:spPr>
-        <p:txBody>
-          <a:bodyPr anchorCtr="0" anchor="t" bIns="91425" lIns="91425" spcFirstLastPara="1" rIns="91425" wrap="square" tIns="91425">
-            <a:normAutofit fontScale="90000"/>
-          </a:bodyPr>
-          <a:lstStyle/>
-          <a:p>
-            <a:pPr indent="0" lvl="0" marL="0" rtl="0" algn="l">
-              <a:lnSpc>
-                <a:spcPct val="100000"/>
-              </a:lnSpc>
-              <a:spcBef>
-                <a:spcPts val="0"/>
-              </a:spcBef>
-              <a:spcAft>
-                <a:spcPts val="0"/>
-              </a:spcAft>
-              <a:buSzPct val="111111"/>
-              <a:buNone/>
-            </a:pPr>
-            <a:r>
-              <a:rPr lang="en-GB"/>
-              <a:t>2. Feature Extraction &amp; Construction/Splitting</a:t>
-            </a:r>
-            <a:endParaRPr/>
-          </a:p>
-        </p:txBody>
-      </p:sp>
-      <p:sp>
-        <p:nvSpPr>
-          <p:cNvPr id="181" name="Google Shape;181;p27"/>
-          <p:cNvSpPr txBox="1"/>
-          <p:nvPr>
-            <p:ph idx="1" type="body"/>
-          </p:nvPr>
-        </p:nvSpPr>
-        <p:spPr>
-          <a:xfrm>
-            <a:off x="311700" y="1152475"/>
-            <a:ext cx="8520600" cy="3416400"/>
-          </a:xfrm>
-          <a:prstGeom prst="rect">
-            <a:avLst/>
-          </a:prstGeom>
-          <a:noFill/>
-          <a:ln>
-            <a:noFill/>
-          </a:ln>
-        </p:spPr>
-        <p:txBody>
-          <a:bodyPr anchorCtr="0" anchor="t" bIns="91425" lIns="91425" spcFirstLastPara="1" rIns="91425" wrap="square" tIns="91425">
-            <a:normAutofit/>
-          </a:bodyPr>
-          <a:lstStyle/>
-          <a:p>
-            <a:pPr indent="-342900" lvl="0" marL="457200" rtl="0" algn="l">
-              <a:lnSpc>
-                <a:spcPct val="115000"/>
-              </a:lnSpc>
-              <a:spcBef>
-                <a:spcPts val="0"/>
-              </a:spcBef>
-              <a:spcAft>
-                <a:spcPts val="0"/>
-              </a:spcAft>
-              <a:buClr>
-                <a:schemeClr val="dk1"/>
-              </a:buClr>
-              <a:buSzPts val="1800"/>
-              <a:buChar char="●"/>
-            </a:pPr>
-            <a:r>
-              <a:rPr lang="en-GB">
-                <a:solidFill>
-                  <a:schemeClr val="dk1"/>
-                </a:solidFill>
-              </a:rPr>
-              <a:t>PCA, LDA, NN etc.</a:t>
-            </a:r>
-            <a:endParaRPr>
-              <a:solidFill>
-                <a:schemeClr val="dk1"/>
-              </a:solidFill>
-            </a:endParaRPr>
-          </a:p>
-        </p:txBody>
-      </p:sp>
-      <p:pic>
-        <p:nvPicPr>
-          <p:cNvPr id="182" name="Google Shape;182;p27"/>
-          <p:cNvPicPr preferRelativeResize="0"/>
-          <p:nvPr/>
-        </p:nvPicPr>
-        <p:blipFill rotWithShape="1">
-          <a:blip r:embed="rId3">
-            <a:alphaModFix/>
-          </a:blip>
-          <a:srcRect b="0" l="0" r="0" t="0"/>
-          <a:stretch/>
-        </p:blipFill>
-        <p:spPr>
-          <a:xfrm>
-            <a:off x="144350" y="1989350"/>
-            <a:ext cx="4511876" cy="2991699"/>
-          </a:xfrm>
-          <a:prstGeom prst="rect">
-            <a:avLst/>
-          </a:prstGeom>
-          <a:noFill/>
-          <a:ln>
-            <a:noFill/>
-          </a:ln>
-        </p:spPr>
-      </p:pic>
-      <p:pic>
-        <p:nvPicPr>
-          <p:cNvPr id="183" name="Google Shape;183;p27"/>
-          <p:cNvPicPr preferRelativeResize="0"/>
-          <p:nvPr/>
-        </p:nvPicPr>
-        <p:blipFill rotWithShape="1">
-          <a:blip r:embed="rId4">
-            <a:alphaModFix/>
-          </a:blip>
-          <a:srcRect b="0" l="0" r="0" t="0"/>
-          <a:stretch/>
-        </p:blipFill>
-        <p:spPr>
-          <a:xfrm>
-            <a:off x="4572000" y="929425"/>
-            <a:ext cx="4572000" cy="2814512"/>
-          </a:xfrm>
-          <a:prstGeom prst="rect">
-            <a:avLst/>
-          </a:prstGeom>
-          <a:noFill/>
-          <a:ln>
-            <a:noFill/>
-          </a:ln>
-        </p:spPr>
-      </p:pic>
-      <p:pic>
-        <p:nvPicPr>
-          <p:cNvPr id="184" name="Google Shape;184;p27"/>
+          <p:cNvPr id="178" name="Google Shape;178;p27"/>
           <p:cNvPicPr preferRelativeResize="0"/>
           <p:nvPr/>
         </p:nvPicPr>
@@ -12780,8 +13547,8 @@
         </p:blipFill>
         <p:spPr>
           <a:xfrm>
-            <a:off x="-2633650" y="611675"/>
-            <a:ext cx="2561450" cy="3810000"/>
+            <a:off x="292375" y="3909700"/>
+            <a:ext cx="2638425" cy="342900"/>
           </a:xfrm>
           <a:prstGeom prst="rect">
             <a:avLst/>
@@ -12805,7 +13572,7 @@
   <p:cSld>
     <p:spTree>
       <p:nvGrpSpPr>
-        <p:cNvPr id="188" name="Shape 188"/>
+        <p:cNvPr id="182" name="Shape 182"/>
         <p:cNvGrpSpPr/>
         <p:nvPr/>
       </p:nvGrpSpPr>
@@ -12817,24 +13584,18 @@
           <a:chExt cx="0" cy="0"/>
         </a:xfrm>
       </p:grpSpPr>
-      <p:pic>
-        <p:nvPicPr>
-          <p:cNvPr id="189" name="Google Shape;189;p28"/>
-          <p:cNvPicPr preferRelativeResize="0"/>
-          <p:nvPr/>
-        </p:nvPicPr>
-        <p:blipFill>
-          <a:blip r:embed="rId3">
-            <a:alphaModFix/>
-          </a:blip>
-          <a:stretch>
-            <a:fillRect/>
-          </a:stretch>
-        </p:blipFill>
-        <p:spPr>
-          <a:xfrm>
-            <a:off x="152400" y="152400"/>
-            <a:ext cx="5010150" cy="400050"/>
+      <p:sp>
+        <p:nvSpPr>
+          <p:cNvPr id="183" name="Google Shape;183;p28"/>
+          <p:cNvSpPr txBox="1"/>
+          <p:nvPr>
+            <p:ph type="title"/>
+          </p:nvPr>
+        </p:nvSpPr>
+        <p:spPr>
+          <a:xfrm>
+            <a:off x="311700" y="445025"/>
+            <a:ext cx="8520600" cy="572700"/>
           </a:xfrm>
           <a:prstGeom prst="rect">
             <a:avLst/>
@@ -12844,25 +13605,45 @@
             <a:noFill/>
           </a:ln>
         </p:spPr>
-      </p:pic>
-      <p:pic>
-        <p:nvPicPr>
-          <p:cNvPr id="190" name="Google Shape;190;p28"/>
-          <p:cNvPicPr preferRelativeResize="0"/>
-          <p:nvPr/>
-        </p:nvPicPr>
-        <p:blipFill>
-          <a:blip r:embed="rId4">
-            <a:alphaModFix/>
-          </a:blip>
-          <a:stretch>
-            <a:fillRect/>
-          </a:stretch>
-        </p:blipFill>
-        <p:spPr>
-          <a:xfrm>
-            <a:off x="152400" y="552450"/>
-            <a:ext cx="3067050" cy="628650"/>
+        <p:txBody>
+          <a:bodyPr anchorCtr="0" anchor="t" bIns="91425" lIns="91425" spcFirstLastPara="1" rIns="91425" wrap="square" tIns="91425">
+            <a:normAutofit fontScale="90000"/>
+          </a:bodyPr>
+          <a:lstStyle/>
+          <a:p>
+            <a:pPr indent="0" lvl="0" marL="0" rtl="0" algn="l">
+              <a:lnSpc>
+                <a:spcPct val="100000"/>
+              </a:lnSpc>
+              <a:spcBef>
+                <a:spcPts val="0"/>
+              </a:spcBef>
+              <a:spcAft>
+                <a:spcPts val="0"/>
+              </a:spcAft>
+              <a:buSzPct val="111111"/>
+              <a:buNone/>
+            </a:pPr>
+            <a:r>
+              <a:rPr lang="en-GB"/>
+              <a:t>e. Feature Scaling</a:t>
+            </a:r>
+            <a:endParaRPr/>
+          </a:p>
+        </p:txBody>
+      </p:sp>
+      <p:sp>
+        <p:nvSpPr>
+          <p:cNvPr id="184" name="Google Shape;184;p28"/>
+          <p:cNvSpPr txBox="1"/>
+          <p:nvPr>
+            <p:ph idx="1" type="body"/>
+          </p:nvPr>
+        </p:nvSpPr>
+        <p:spPr>
+          <a:xfrm>
+            <a:off x="311700" y="1152475"/>
+            <a:ext cx="8520600" cy="3416400"/>
           </a:xfrm>
           <a:prstGeom prst="rect">
             <a:avLst/>
@@ -12872,221 +13653,123 @@
             <a:noFill/>
           </a:ln>
         </p:spPr>
-      </p:pic>
+        <p:txBody>
+          <a:bodyPr anchorCtr="0" anchor="t" bIns="91425" lIns="91425" spcFirstLastPara="1" rIns="91425" wrap="square" tIns="91425">
+            <a:normAutofit/>
+          </a:bodyPr>
+          <a:lstStyle/>
+          <a:p>
+            <a:pPr indent="-342900" lvl="0" marL="457200" rtl="0" algn="l">
+              <a:lnSpc>
+                <a:spcPct val="115000"/>
+              </a:lnSpc>
+              <a:spcBef>
+                <a:spcPts val="0"/>
+              </a:spcBef>
+              <a:spcAft>
+                <a:spcPts val="0"/>
+              </a:spcAft>
+              <a:buClr>
+                <a:schemeClr val="dk1"/>
+              </a:buClr>
+              <a:buSzPts val="1800"/>
+              <a:buAutoNum type="arabicPeriod"/>
+            </a:pPr>
+            <a:r>
+              <a:rPr lang="en-GB">
+                <a:solidFill>
+                  <a:schemeClr val="dk1"/>
+                </a:solidFill>
+              </a:rPr>
+              <a:t>Standardization</a:t>
+            </a:r>
+            <a:endParaRPr>
+              <a:solidFill>
+                <a:schemeClr val="dk1"/>
+              </a:solidFill>
+            </a:endParaRPr>
+          </a:p>
+          <a:p>
+            <a:pPr indent="-342900" lvl="0" marL="457200" rtl="0" algn="l">
+              <a:lnSpc>
+                <a:spcPct val="100000"/>
+              </a:lnSpc>
+              <a:spcBef>
+                <a:spcPts val="0"/>
+              </a:spcBef>
+              <a:spcAft>
+                <a:spcPts val="0"/>
+              </a:spcAft>
+              <a:buClr>
+                <a:schemeClr val="dk1"/>
+              </a:buClr>
+              <a:buSzPts val="1800"/>
+              <a:buAutoNum type="arabicPeriod"/>
+            </a:pPr>
+            <a:r>
+              <a:rPr lang="en-GB">
+                <a:solidFill>
+                  <a:schemeClr val="dk1"/>
+                </a:solidFill>
+              </a:rPr>
+              <a:t>Normalization</a:t>
+            </a:r>
+            <a:endParaRPr>
+              <a:solidFill>
+                <a:schemeClr val="dk1"/>
+              </a:solidFill>
+            </a:endParaRPr>
+          </a:p>
+          <a:p>
+            <a:pPr indent="-342900" lvl="0" marL="914400" rtl="0" algn="l">
+              <a:lnSpc>
+                <a:spcPct val="100000"/>
+              </a:lnSpc>
+              <a:spcBef>
+                <a:spcPts val="0"/>
+              </a:spcBef>
+              <a:spcAft>
+                <a:spcPts val="0"/>
+              </a:spcAft>
+              <a:buClr>
+                <a:schemeClr val="dk1"/>
+              </a:buClr>
+              <a:buSzPts val="1800"/>
+              <a:buChar char="●"/>
+            </a:pPr>
+            <a:r>
+              <a:rPr lang="en-GB">
+                <a:solidFill>
+                  <a:schemeClr val="dk1"/>
+                </a:solidFill>
+              </a:rPr>
+              <a:t>Minmax scaling</a:t>
+            </a:r>
+            <a:endParaRPr>
+              <a:solidFill>
+                <a:schemeClr val="dk1"/>
+              </a:solidFill>
+            </a:endParaRPr>
+          </a:p>
+        </p:txBody>
+      </p:sp>
       <p:pic>
         <p:nvPicPr>
-          <p:cNvPr id="191" name="Google Shape;191;p28"/>
+          <p:cNvPr id="185" name="Google Shape;185;p28"/>
           <p:cNvPicPr preferRelativeResize="0"/>
           <p:nvPr/>
         </p:nvPicPr>
-        <p:blipFill>
-          <a:blip r:embed="rId5">
+        <p:blipFill rotWithShape="1">
+          <a:blip r:embed="rId3">
             <a:alphaModFix/>
           </a:blip>
-          <a:stretch>
-            <a:fillRect/>
-          </a:stretch>
+          <a:srcRect b="0" l="0" r="0" t="0"/>
+          <a:stretch/>
         </p:blipFill>
         <p:spPr>
           <a:xfrm>
-            <a:off x="92038" y="1938825"/>
-            <a:ext cx="3267075" cy="609600"/>
-          </a:xfrm>
-          <a:prstGeom prst="rect">
-            <a:avLst/>
-          </a:prstGeom>
-          <a:noFill/>
-          <a:ln>
-            <a:noFill/>
-          </a:ln>
-        </p:spPr>
-      </p:pic>
-      <p:pic>
-        <p:nvPicPr>
-          <p:cNvPr id="192" name="Google Shape;192;p28"/>
-          <p:cNvPicPr preferRelativeResize="0"/>
-          <p:nvPr/>
-        </p:nvPicPr>
-        <p:blipFill>
-          <a:blip r:embed="rId6">
-            <a:alphaModFix/>
-          </a:blip>
-          <a:stretch>
-            <a:fillRect/>
-          </a:stretch>
-        </p:blipFill>
-        <p:spPr>
-          <a:xfrm>
-            <a:off x="92050" y="1128375"/>
-            <a:ext cx="4972100" cy="744125"/>
-          </a:xfrm>
-          <a:prstGeom prst="rect">
-            <a:avLst/>
-          </a:prstGeom>
-          <a:noFill/>
-          <a:ln>
-            <a:noFill/>
-          </a:ln>
-        </p:spPr>
-      </p:pic>
-      <p:pic>
-        <p:nvPicPr>
-          <p:cNvPr id="193" name="Google Shape;193;p28"/>
-          <p:cNvPicPr preferRelativeResize="0"/>
-          <p:nvPr/>
-        </p:nvPicPr>
-        <p:blipFill>
-          <a:blip r:embed="rId7">
-            <a:alphaModFix/>
-          </a:blip>
-          <a:stretch>
-            <a:fillRect/>
-          </a:stretch>
-        </p:blipFill>
-        <p:spPr>
-          <a:xfrm>
-            <a:off x="92050" y="2891438"/>
-            <a:ext cx="4552950" cy="600075"/>
-          </a:xfrm>
-          <a:prstGeom prst="rect">
-            <a:avLst/>
-          </a:prstGeom>
-          <a:noFill/>
-          <a:ln>
-            <a:noFill/>
-          </a:ln>
-        </p:spPr>
-      </p:pic>
-      <p:pic>
-        <p:nvPicPr>
-          <p:cNvPr id="194" name="Google Shape;194;p28"/>
-          <p:cNvPicPr preferRelativeResize="0"/>
-          <p:nvPr/>
-        </p:nvPicPr>
-        <p:blipFill>
-          <a:blip r:embed="rId8">
-            <a:alphaModFix/>
-          </a:blip>
-          <a:stretch>
-            <a:fillRect/>
-          </a:stretch>
-        </p:blipFill>
-        <p:spPr>
-          <a:xfrm>
-            <a:off x="5788725" y="152400"/>
-            <a:ext cx="1914525" cy="1257300"/>
-          </a:xfrm>
-          <a:prstGeom prst="rect">
-            <a:avLst/>
-          </a:prstGeom>
-          <a:noFill/>
-          <a:ln>
-            <a:noFill/>
-          </a:ln>
-        </p:spPr>
-      </p:pic>
-      <p:pic>
-        <p:nvPicPr>
-          <p:cNvPr id="195" name="Google Shape;195;p28"/>
-          <p:cNvPicPr preferRelativeResize="0"/>
-          <p:nvPr/>
-        </p:nvPicPr>
-        <p:blipFill>
-          <a:blip r:embed="rId9">
-            <a:alphaModFix/>
-          </a:blip>
-          <a:stretch>
-            <a:fillRect/>
-          </a:stretch>
-        </p:blipFill>
-        <p:spPr>
-          <a:xfrm>
-            <a:off x="5788725" y="1478950"/>
-            <a:ext cx="3124200" cy="752475"/>
-          </a:xfrm>
-          <a:prstGeom prst="rect">
-            <a:avLst/>
-          </a:prstGeom>
-          <a:noFill/>
-          <a:ln>
-            <a:noFill/>
-          </a:ln>
-        </p:spPr>
-      </p:pic>
-      <p:pic>
-        <p:nvPicPr>
-          <p:cNvPr id="196" name="Google Shape;196;p28"/>
-          <p:cNvPicPr preferRelativeResize="0"/>
-          <p:nvPr/>
-        </p:nvPicPr>
-        <p:blipFill>
-          <a:blip r:embed="rId10">
-            <a:alphaModFix/>
-          </a:blip>
-          <a:stretch>
-            <a:fillRect/>
-          </a:stretch>
-        </p:blipFill>
-        <p:spPr>
-          <a:xfrm>
-            <a:off x="4498088" y="2348388"/>
-            <a:ext cx="4495800" cy="200025"/>
-          </a:xfrm>
-          <a:prstGeom prst="rect">
-            <a:avLst/>
-          </a:prstGeom>
-          <a:noFill/>
-          <a:ln>
-            <a:noFill/>
-          </a:ln>
-        </p:spPr>
-      </p:pic>
-      <p:pic>
-        <p:nvPicPr>
-          <p:cNvPr id="197" name="Google Shape;197;p28"/>
-          <p:cNvPicPr preferRelativeResize="0"/>
-          <p:nvPr/>
-        </p:nvPicPr>
-        <p:blipFill>
-          <a:blip r:embed="rId11">
-            <a:alphaModFix/>
-          </a:blip>
-          <a:stretch>
-            <a:fillRect/>
-          </a:stretch>
-        </p:blipFill>
-        <p:spPr>
-          <a:xfrm>
-            <a:off x="92050" y="2614750"/>
-            <a:ext cx="3187750" cy="241090"/>
-          </a:xfrm>
-          <a:prstGeom prst="rect">
-            <a:avLst/>
-          </a:prstGeom>
-          <a:noFill/>
-          <a:ln>
-            <a:noFill/>
-          </a:ln>
-        </p:spPr>
-      </p:pic>
-      <p:pic>
-        <p:nvPicPr>
-          <p:cNvPr id="198" name="Google Shape;198;p28"/>
-          <p:cNvPicPr preferRelativeResize="0"/>
-          <p:nvPr/>
-        </p:nvPicPr>
-        <p:blipFill>
-          <a:blip r:embed="rId12">
-            <a:alphaModFix/>
-          </a:blip>
-          <a:stretch>
-            <a:fillRect/>
-          </a:stretch>
-        </p:blipFill>
-        <p:spPr>
-          <a:xfrm>
-            <a:off x="61788" y="3527088"/>
-            <a:ext cx="6372225" cy="942975"/>
+            <a:off x="3362181" y="1152475"/>
+            <a:ext cx="5079494" cy="3416400"/>
           </a:xfrm>
           <a:prstGeom prst="rect">
             <a:avLst/>
@@ -13110,7 +13793,7 @@
   <p:cSld>
     <p:spTree>
       <p:nvGrpSpPr>
-        <p:cNvPr id="202" name="Shape 202"/>
+        <p:cNvPr id="189" name="Shape 189"/>
         <p:cNvGrpSpPr/>
         <p:nvPr/>
       </p:nvGrpSpPr>
@@ -13124,7 +13807,515 @@
       </p:grpSpPr>
       <p:sp>
         <p:nvSpPr>
-          <p:cNvPr id="203" name="Google Shape;203;p29"/>
+          <p:cNvPr id="190" name="Google Shape;190;p29"/>
+          <p:cNvSpPr txBox="1"/>
+          <p:nvPr>
+            <p:ph type="title"/>
+          </p:nvPr>
+        </p:nvSpPr>
+        <p:spPr>
+          <a:xfrm>
+            <a:off x="0" y="38975"/>
+            <a:ext cx="8520600" cy="572700"/>
+          </a:xfrm>
+          <a:prstGeom prst="rect">
+            <a:avLst/>
+          </a:prstGeom>
+          <a:noFill/>
+          <a:ln>
+            <a:noFill/>
+          </a:ln>
+        </p:spPr>
+        <p:txBody>
+          <a:bodyPr anchorCtr="0" anchor="t" bIns="91425" lIns="91425" spcFirstLastPara="1" rIns="91425" wrap="square" tIns="91425">
+            <a:normAutofit fontScale="90000"/>
+          </a:bodyPr>
+          <a:lstStyle/>
+          <a:p>
+            <a:pPr indent="0" lvl="0" marL="0" rtl="0" algn="l">
+              <a:lnSpc>
+                <a:spcPct val="100000"/>
+              </a:lnSpc>
+              <a:spcBef>
+                <a:spcPts val="0"/>
+              </a:spcBef>
+              <a:spcAft>
+                <a:spcPts val="0"/>
+              </a:spcAft>
+              <a:buSzPct val="111111"/>
+              <a:buNone/>
+            </a:pPr>
+            <a:r>
+              <a:rPr lang="en-GB"/>
+              <a:t>2. Feature Extraction &amp; Construction/Splitting</a:t>
+            </a:r>
+            <a:endParaRPr/>
+          </a:p>
+        </p:txBody>
+      </p:sp>
+      <p:sp>
+        <p:nvSpPr>
+          <p:cNvPr id="191" name="Google Shape;191;p29"/>
+          <p:cNvSpPr txBox="1"/>
+          <p:nvPr>
+            <p:ph idx="1" type="body"/>
+          </p:nvPr>
+        </p:nvSpPr>
+        <p:spPr>
+          <a:xfrm>
+            <a:off x="311700" y="1152475"/>
+            <a:ext cx="8520600" cy="3416400"/>
+          </a:xfrm>
+          <a:prstGeom prst="rect">
+            <a:avLst/>
+          </a:prstGeom>
+          <a:noFill/>
+          <a:ln>
+            <a:noFill/>
+          </a:ln>
+        </p:spPr>
+        <p:txBody>
+          <a:bodyPr anchorCtr="0" anchor="t" bIns="91425" lIns="91425" spcFirstLastPara="1" rIns="91425" wrap="square" tIns="91425">
+            <a:normAutofit/>
+          </a:bodyPr>
+          <a:lstStyle/>
+          <a:p>
+            <a:pPr indent="-342900" lvl="0" marL="457200" rtl="0" algn="l">
+              <a:lnSpc>
+                <a:spcPct val="115000"/>
+              </a:lnSpc>
+              <a:spcBef>
+                <a:spcPts val="0"/>
+              </a:spcBef>
+              <a:spcAft>
+                <a:spcPts val="0"/>
+              </a:spcAft>
+              <a:buClr>
+                <a:schemeClr val="dk1"/>
+              </a:buClr>
+              <a:buSzPts val="1800"/>
+              <a:buChar char="●"/>
+            </a:pPr>
+            <a:r>
+              <a:rPr lang="en-GB">
+                <a:solidFill>
+                  <a:schemeClr val="dk1"/>
+                </a:solidFill>
+              </a:rPr>
+              <a:t>PCA, LDA, NN etc.</a:t>
+            </a:r>
+            <a:endParaRPr>
+              <a:solidFill>
+                <a:schemeClr val="dk1"/>
+              </a:solidFill>
+            </a:endParaRPr>
+          </a:p>
+        </p:txBody>
+      </p:sp>
+      <p:pic>
+        <p:nvPicPr>
+          <p:cNvPr id="192" name="Google Shape;192;p29"/>
+          <p:cNvPicPr preferRelativeResize="0"/>
+          <p:nvPr/>
+        </p:nvPicPr>
+        <p:blipFill rotWithShape="1">
+          <a:blip r:embed="rId3">
+            <a:alphaModFix/>
+          </a:blip>
+          <a:srcRect b="0" l="0" r="0" t="0"/>
+          <a:stretch/>
+        </p:blipFill>
+        <p:spPr>
+          <a:xfrm>
+            <a:off x="144350" y="1989350"/>
+            <a:ext cx="4511876" cy="2991699"/>
+          </a:xfrm>
+          <a:prstGeom prst="rect">
+            <a:avLst/>
+          </a:prstGeom>
+          <a:noFill/>
+          <a:ln>
+            <a:noFill/>
+          </a:ln>
+        </p:spPr>
+      </p:pic>
+      <p:pic>
+        <p:nvPicPr>
+          <p:cNvPr id="193" name="Google Shape;193;p29"/>
+          <p:cNvPicPr preferRelativeResize="0"/>
+          <p:nvPr/>
+        </p:nvPicPr>
+        <p:blipFill rotWithShape="1">
+          <a:blip r:embed="rId4">
+            <a:alphaModFix/>
+          </a:blip>
+          <a:srcRect b="0" l="0" r="0" t="0"/>
+          <a:stretch/>
+        </p:blipFill>
+        <p:spPr>
+          <a:xfrm>
+            <a:off x="4572000" y="929425"/>
+            <a:ext cx="4572000" cy="2814512"/>
+          </a:xfrm>
+          <a:prstGeom prst="rect">
+            <a:avLst/>
+          </a:prstGeom>
+          <a:noFill/>
+          <a:ln>
+            <a:noFill/>
+          </a:ln>
+        </p:spPr>
+      </p:pic>
+      <p:pic>
+        <p:nvPicPr>
+          <p:cNvPr id="194" name="Google Shape;194;p29"/>
+          <p:cNvPicPr preferRelativeResize="0"/>
+          <p:nvPr/>
+        </p:nvPicPr>
+        <p:blipFill rotWithShape="1">
+          <a:blip r:embed="rId5">
+            <a:alphaModFix/>
+          </a:blip>
+          <a:srcRect b="0" l="0" r="0" t="0"/>
+          <a:stretch/>
+        </p:blipFill>
+        <p:spPr>
+          <a:xfrm>
+            <a:off x="-2633650" y="611675"/>
+            <a:ext cx="2561450" cy="3810000"/>
+          </a:xfrm>
+          <a:prstGeom prst="rect">
+            <a:avLst/>
+          </a:prstGeom>
+          <a:noFill/>
+          <a:ln>
+            <a:noFill/>
+          </a:ln>
+        </p:spPr>
+      </p:pic>
+    </p:spTree>
+  </p:cSld>
+  <p:clrMapOvr>
+    <a:masterClrMapping/>
+  </p:clrMapOvr>
+</p:sld>
+</file>
+
+<file path=ppt/slides/slide17.xml><?xml version="1.0" encoding="utf-8"?>
+<p:sld xmlns:a="http://schemas.openxmlformats.org/drawingml/2006/main" xmlns:r="http://schemas.openxmlformats.org/officeDocument/2006/relationships" xmlns:mc="http://schemas.openxmlformats.org/markup-compatibility/2006" xmlns:mv="urn:schemas-microsoft-com:mac:vml" xmlns:p="http://schemas.openxmlformats.org/presentationml/2006/main" xmlns:c="http://schemas.openxmlformats.org/drawingml/2006/chart" xmlns:dgm="http://schemas.openxmlformats.org/drawingml/2006/diagram" xmlns:o="urn:schemas-microsoft-com:office:office" xmlns:v="urn:schemas-microsoft-com:vml" xmlns:pvml="urn:schemas-microsoft-com:office:powerpoint" xmlns:com="http://schemas.openxmlformats.org/drawingml/2006/compatibility" xmlns:p14="http://schemas.microsoft.com/office/powerpoint/2010/main" xmlns:p15="http://schemas.microsoft.com/office/powerpoint/2012/main" xmlns:ahyp="http://schemas.microsoft.com/office/drawing/2018/hyperlinkcolor">
+  <p:cSld>
+    <p:spTree>
+      <p:nvGrpSpPr>
+        <p:cNvPr id="198" name="Shape 198"/>
+        <p:cNvGrpSpPr/>
+        <p:nvPr/>
+      </p:nvGrpSpPr>
+      <p:grpSpPr>
+        <a:xfrm>
+          <a:off x="0" y="0"/>
+          <a:ext cx="0" cy="0"/>
+          <a:chOff x="0" y="0"/>
+          <a:chExt cx="0" cy="0"/>
+        </a:xfrm>
+      </p:grpSpPr>
+      <p:pic>
+        <p:nvPicPr>
+          <p:cNvPr id="199" name="Google Shape;199;p30"/>
+          <p:cNvPicPr preferRelativeResize="0"/>
+          <p:nvPr/>
+        </p:nvPicPr>
+        <p:blipFill rotWithShape="1">
+          <a:blip r:embed="rId3">
+            <a:alphaModFix/>
+          </a:blip>
+          <a:srcRect b="0" l="0" r="0" t="0"/>
+          <a:stretch/>
+        </p:blipFill>
+        <p:spPr>
+          <a:xfrm>
+            <a:off x="152400" y="152400"/>
+            <a:ext cx="5010150" cy="400050"/>
+          </a:xfrm>
+          <a:prstGeom prst="rect">
+            <a:avLst/>
+          </a:prstGeom>
+          <a:noFill/>
+          <a:ln>
+            <a:noFill/>
+          </a:ln>
+        </p:spPr>
+      </p:pic>
+      <p:pic>
+        <p:nvPicPr>
+          <p:cNvPr id="200" name="Google Shape;200;p30"/>
+          <p:cNvPicPr preferRelativeResize="0"/>
+          <p:nvPr/>
+        </p:nvPicPr>
+        <p:blipFill rotWithShape="1">
+          <a:blip r:embed="rId4">
+            <a:alphaModFix/>
+          </a:blip>
+          <a:srcRect b="0" l="0" r="0" t="0"/>
+          <a:stretch/>
+        </p:blipFill>
+        <p:spPr>
+          <a:xfrm>
+            <a:off x="152400" y="552450"/>
+            <a:ext cx="3067050" cy="628650"/>
+          </a:xfrm>
+          <a:prstGeom prst="rect">
+            <a:avLst/>
+          </a:prstGeom>
+          <a:noFill/>
+          <a:ln>
+            <a:noFill/>
+          </a:ln>
+        </p:spPr>
+      </p:pic>
+      <p:pic>
+        <p:nvPicPr>
+          <p:cNvPr id="201" name="Google Shape;201;p30"/>
+          <p:cNvPicPr preferRelativeResize="0"/>
+          <p:nvPr/>
+        </p:nvPicPr>
+        <p:blipFill rotWithShape="1">
+          <a:blip r:embed="rId5">
+            <a:alphaModFix/>
+          </a:blip>
+          <a:srcRect b="0" l="0" r="0" t="0"/>
+          <a:stretch/>
+        </p:blipFill>
+        <p:spPr>
+          <a:xfrm>
+            <a:off x="92038" y="1938825"/>
+            <a:ext cx="3267075" cy="609600"/>
+          </a:xfrm>
+          <a:prstGeom prst="rect">
+            <a:avLst/>
+          </a:prstGeom>
+          <a:noFill/>
+          <a:ln>
+            <a:noFill/>
+          </a:ln>
+        </p:spPr>
+      </p:pic>
+      <p:pic>
+        <p:nvPicPr>
+          <p:cNvPr id="202" name="Google Shape;202;p30"/>
+          <p:cNvPicPr preferRelativeResize="0"/>
+          <p:nvPr/>
+        </p:nvPicPr>
+        <p:blipFill rotWithShape="1">
+          <a:blip r:embed="rId6">
+            <a:alphaModFix/>
+          </a:blip>
+          <a:srcRect b="0" l="0" r="0" t="0"/>
+          <a:stretch/>
+        </p:blipFill>
+        <p:spPr>
+          <a:xfrm>
+            <a:off x="92050" y="1128375"/>
+            <a:ext cx="4972100" cy="744125"/>
+          </a:xfrm>
+          <a:prstGeom prst="rect">
+            <a:avLst/>
+          </a:prstGeom>
+          <a:noFill/>
+          <a:ln>
+            <a:noFill/>
+          </a:ln>
+        </p:spPr>
+      </p:pic>
+      <p:pic>
+        <p:nvPicPr>
+          <p:cNvPr id="203" name="Google Shape;203;p30"/>
+          <p:cNvPicPr preferRelativeResize="0"/>
+          <p:nvPr/>
+        </p:nvPicPr>
+        <p:blipFill rotWithShape="1">
+          <a:blip r:embed="rId7">
+            <a:alphaModFix/>
+          </a:blip>
+          <a:srcRect b="0" l="0" r="0" t="0"/>
+          <a:stretch/>
+        </p:blipFill>
+        <p:spPr>
+          <a:xfrm>
+            <a:off x="92050" y="2891438"/>
+            <a:ext cx="4552950" cy="600075"/>
+          </a:xfrm>
+          <a:prstGeom prst="rect">
+            <a:avLst/>
+          </a:prstGeom>
+          <a:noFill/>
+          <a:ln>
+            <a:noFill/>
+          </a:ln>
+        </p:spPr>
+      </p:pic>
+      <p:pic>
+        <p:nvPicPr>
+          <p:cNvPr id="204" name="Google Shape;204;p30"/>
+          <p:cNvPicPr preferRelativeResize="0"/>
+          <p:nvPr/>
+        </p:nvPicPr>
+        <p:blipFill rotWithShape="1">
+          <a:blip r:embed="rId8">
+            <a:alphaModFix/>
+          </a:blip>
+          <a:srcRect b="0" l="0" r="0" t="0"/>
+          <a:stretch/>
+        </p:blipFill>
+        <p:spPr>
+          <a:xfrm>
+            <a:off x="5788725" y="152400"/>
+            <a:ext cx="1914525" cy="1257300"/>
+          </a:xfrm>
+          <a:prstGeom prst="rect">
+            <a:avLst/>
+          </a:prstGeom>
+          <a:noFill/>
+          <a:ln>
+            <a:noFill/>
+          </a:ln>
+        </p:spPr>
+      </p:pic>
+      <p:pic>
+        <p:nvPicPr>
+          <p:cNvPr id="205" name="Google Shape;205;p30"/>
+          <p:cNvPicPr preferRelativeResize="0"/>
+          <p:nvPr/>
+        </p:nvPicPr>
+        <p:blipFill rotWithShape="1">
+          <a:blip r:embed="rId9">
+            <a:alphaModFix/>
+          </a:blip>
+          <a:srcRect b="0" l="0" r="0" t="0"/>
+          <a:stretch/>
+        </p:blipFill>
+        <p:spPr>
+          <a:xfrm>
+            <a:off x="5788725" y="1478950"/>
+            <a:ext cx="3124200" cy="752475"/>
+          </a:xfrm>
+          <a:prstGeom prst="rect">
+            <a:avLst/>
+          </a:prstGeom>
+          <a:noFill/>
+          <a:ln>
+            <a:noFill/>
+          </a:ln>
+        </p:spPr>
+      </p:pic>
+      <p:pic>
+        <p:nvPicPr>
+          <p:cNvPr id="206" name="Google Shape;206;p30"/>
+          <p:cNvPicPr preferRelativeResize="0"/>
+          <p:nvPr/>
+        </p:nvPicPr>
+        <p:blipFill rotWithShape="1">
+          <a:blip r:embed="rId10">
+            <a:alphaModFix/>
+          </a:blip>
+          <a:srcRect b="0" l="0" r="0" t="0"/>
+          <a:stretch/>
+        </p:blipFill>
+        <p:spPr>
+          <a:xfrm>
+            <a:off x="4498088" y="2348388"/>
+            <a:ext cx="4495800" cy="200025"/>
+          </a:xfrm>
+          <a:prstGeom prst="rect">
+            <a:avLst/>
+          </a:prstGeom>
+          <a:noFill/>
+          <a:ln>
+            <a:noFill/>
+          </a:ln>
+        </p:spPr>
+      </p:pic>
+      <p:pic>
+        <p:nvPicPr>
+          <p:cNvPr id="207" name="Google Shape;207;p30"/>
+          <p:cNvPicPr preferRelativeResize="0"/>
+          <p:nvPr/>
+        </p:nvPicPr>
+        <p:blipFill rotWithShape="1">
+          <a:blip r:embed="rId11">
+            <a:alphaModFix/>
+          </a:blip>
+          <a:srcRect b="0" l="0" r="0" t="0"/>
+          <a:stretch/>
+        </p:blipFill>
+        <p:spPr>
+          <a:xfrm>
+            <a:off x="92050" y="2614750"/>
+            <a:ext cx="3187750" cy="241090"/>
+          </a:xfrm>
+          <a:prstGeom prst="rect">
+            <a:avLst/>
+          </a:prstGeom>
+          <a:noFill/>
+          <a:ln>
+            <a:noFill/>
+          </a:ln>
+        </p:spPr>
+      </p:pic>
+      <p:pic>
+        <p:nvPicPr>
+          <p:cNvPr id="208" name="Google Shape;208;p30"/>
+          <p:cNvPicPr preferRelativeResize="0"/>
+          <p:nvPr/>
+        </p:nvPicPr>
+        <p:blipFill rotWithShape="1">
+          <a:blip r:embed="rId12">
+            <a:alphaModFix/>
+          </a:blip>
+          <a:srcRect b="0" l="0" r="0" t="0"/>
+          <a:stretch/>
+        </p:blipFill>
+        <p:spPr>
+          <a:xfrm>
+            <a:off x="61788" y="3527088"/>
+            <a:ext cx="6372225" cy="942975"/>
+          </a:xfrm>
+          <a:prstGeom prst="rect">
+            <a:avLst/>
+          </a:prstGeom>
+          <a:noFill/>
+          <a:ln>
+            <a:noFill/>
+          </a:ln>
+        </p:spPr>
+      </p:pic>
+    </p:spTree>
+  </p:cSld>
+  <p:clrMapOvr>
+    <a:masterClrMapping/>
+  </p:clrMapOvr>
+</p:sld>
+</file>
+
+<file path=ppt/slides/slide18.xml><?xml version="1.0" encoding="utf-8"?>
+<p:sld xmlns:a="http://schemas.openxmlformats.org/drawingml/2006/main" xmlns:r="http://schemas.openxmlformats.org/officeDocument/2006/relationships" xmlns:mc="http://schemas.openxmlformats.org/markup-compatibility/2006" xmlns:mv="urn:schemas-microsoft-com:mac:vml" xmlns:p="http://schemas.openxmlformats.org/presentationml/2006/main" xmlns:c="http://schemas.openxmlformats.org/drawingml/2006/chart" xmlns:dgm="http://schemas.openxmlformats.org/drawingml/2006/diagram" xmlns:o="urn:schemas-microsoft-com:office:office" xmlns:v="urn:schemas-microsoft-com:vml" xmlns:pvml="urn:schemas-microsoft-com:office:powerpoint" xmlns:com="http://schemas.openxmlformats.org/drawingml/2006/compatibility" xmlns:p14="http://schemas.microsoft.com/office/powerpoint/2010/main" xmlns:p15="http://schemas.microsoft.com/office/powerpoint/2012/main" xmlns:ahyp="http://schemas.microsoft.com/office/drawing/2018/hyperlinkcolor">
+  <p:cSld>
+    <p:spTree>
+      <p:nvGrpSpPr>
+        <p:cNvPr id="212" name="Shape 212"/>
+        <p:cNvGrpSpPr/>
+        <p:nvPr/>
+      </p:nvGrpSpPr>
+      <p:grpSpPr>
+        <a:xfrm>
+          <a:off x="0" y="0"/>
+          <a:ext cx="0" cy="0"/>
+          <a:chOff x="0" y="0"/>
+          <a:chExt cx="0" cy="0"/>
+        </a:xfrm>
+      </p:grpSpPr>
+      <p:sp>
+        <p:nvSpPr>
+          <p:cNvPr id="213" name="Google Shape;213;p31"/>
           <p:cNvSpPr txBox="1"/>
           <p:nvPr>
             <p:ph type="title"/>
@@ -13172,7 +14363,7 @@
       </p:sp>
       <p:sp>
         <p:nvSpPr>
-          <p:cNvPr id="204" name="Google Shape;204;p29"/>
+          <p:cNvPr id="214" name="Google Shape;214;p31"/>
           <p:cNvSpPr txBox="1"/>
           <p:nvPr>
             <p:ph idx="1" type="body"/>
@@ -13263,7 +14454,7 @@
       </p:sp>
       <p:pic>
         <p:nvPicPr>
-          <p:cNvPr id="205" name="Google Shape;205;p29"/>
+          <p:cNvPr id="215" name="Google Shape;215;p31"/>
           <p:cNvPicPr preferRelativeResize="0"/>
           <p:nvPr/>
         </p:nvPicPr>
@@ -13290,7 +14481,7 @@
       </p:pic>
       <p:sp>
         <p:nvSpPr>
-          <p:cNvPr id="206" name="Google Shape;206;p29"/>
+          <p:cNvPr id="216" name="Google Shape;216;p31"/>
           <p:cNvSpPr txBox="1"/>
           <p:nvPr/>
         </p:nvSpPr>
@@ -13347,7 +14538,7 @@
       </p:sp>
       <p:sp>
         <p:nvSpPr>
-          <p:cNvPr id="207" name="Google Shape;207;p29"/>
+          <p:cNvPr id="217" name="Google Shape;217;p31"/>
           <p:cNvSpPr txBox="1"/>
           <p:nvPr/>
         </p:nvSpPr>
@@ -13428,7 +14619,7 @@
       </p:sp>
       <p:pic>
         <p:nvPicPr>
-          <p:cNvPr id="208" name="Google Shape;208;p29"/>
+          <p:cNvPr id="218" name="Google Shape;218;p31"/>
           <p:cNvPicPr preferRelativeResize="0"/>
           <p:nvPr/>
         </p:nvPicPr>
@@ -13455,7 +14646,7 @@
       </p:pic>
       <p:sp>
         <p:nvSpPr>
-          <p:cNvPr id="209" name="Google Shape;209;p29"/>
+          <p:cNvPr id="219" name="Google Shape;219;p31"/>
           <p:cNvSpPr txBox="1"/>
           <p:nvPr/>
         </p:nvSpPr>
@@ -13521,7 +14712,7 @@
       </p:sp>
       <p:pic>
         <p:nvPicPr>
-          <p:cNvPr id="210" name="Google Shape;210;p29"/>
+          <p:cNvPr id="220" name="Google Shape;220;p31"/>
           <p:cNvPicPr preferRelativeResize="0"/>
           <p:nvPr/>
         </p:nvPicPr>
@@ -13548,7 +14739,7 @@
       </p:pic>
       <p:sp>
         <p:nvSpPr>
-          <p:cNvPr id="211" name="Google Shape;211;p29"/>
+          <p:cNvPr id="221" name="Google Shape;221;p31"/>
           <p:cNvSpPr txBox="1"/>
           <p:nvPr/>
         </p:nvSpPr>
@@ -13614,7 +14805,7 @@
       </p:sp>
       <p:pic>
         <p:nvPicPr>
-          <p:cNvPr id="212" name="Google Shape;212;p29"/>
+          <p:cNvPr id="222" name="Google Shape;222;p31"/>
           <p:cNvPicPr preferRelativeResize="0"/>
           <p:nvPr/>
         </p:nvPicPr>
@@ -13641,7 +14832,7 @@
       </p:pic>
       <p:sp>
         <p:nvSpPr>
-          <p:cNvPr id="213" name="Google Shape;213;p29"/>
+          <p:cNvPr id="223" name="Google Shape;223;p31"/>
           <p:cNvSpPr txBox="1"/>
           <p:nvPr/>
         </p:nvSpPr>
@@ -13713,12 +14904,12 @@
 </p:sld>
 </file>
 
-<file path=ppt/slides/slide17.xml><?xml version="1.0" encoding="utf-8"?>
+<file path=ppt/slides/slide19.xml><?xml version="1.0" encoding="utf-8"?>
 <p:sld xmlns:a="http://schemas.openxmlformats.org/drawingml/2006/main" xmlns:r="http://schemas.openxmlformats.org/officeDocument/2006/relationships" xmlns:mc="http://schemas.openxmlformats.org/markup-compatibility/2006" xmlns:mv="urn:schemas-microsoft-com:mac:vml" xmlns:p="http://schemas.openxmlformats.org/presentationml/2006/main" xmlns:c="http://schemas.openxmlformats.org/drawingml/2006/chart" xmlns:dgm="http://schemas.openxmlformats.org/drawingml/2006/diagram" xmlns:o="urn:schemas-microsoft-com:office:office" xmlns:v="urn:schemas-microsoft-com:vml" xmlns:pvml="urn:schemas-microsoft-com:office:powerpoint" xmlns:com="http://schemas.openxmlformats.org/drawingml/2006/compatibility" xmlns:p14="http://schemas.microsoft.com/office/powerpoint/2010/main" xmlns:p15="http://schemas.microsoft.com/office/powerpoint/2012/main" xmlns:ahyp="http://schemas.microsoft.com/office/drawing/2018/hyperlinkcolor">
   <p:cSld>
     <p:spTree>
       <p:nvGrpSpPr>
-        <p:cNvPr id="217" name="Shape 217"/>
+        <p:cNvPr id="227" name="Shape 227"/>
         <p:cNvGrpSpPr/>
         <p:nvPr/>
       </p:nvGrpSpPr>
@@ -13732,7 +14923,7 @@
       </p:grpSpPr>
       <p:sp>
         <p:nvSpPr>
-          <p:cNvPr id="218" name="Google Shape;218;p30"/>
+          <p:cNvPr id="228" name="Google Shape;228;p32"/>
           <p:cNvSpPr txBox="1"/>
           <p:nvPr>
             <p:ph type="title"/>
@@ -13780,7 +14971,7 @@
       </p:sp>
       <p:sp>
         <p:nvSpPr>
-          <p:cNvPr id="219" name="Google Shape;219;p30"/>
+          <p:cNvPr id="229" name="Google Shape;229;p32"/>
           <p:cNvSpPr txBox="1"/>
           <p:nvPr>
             <p:ph idx="1" type="body"/>
@@ -14004,7 +15195,7 @@
       </p:sp>
       <p:pic>
         <p:nvPicPr>
-          <p:cNvPr id="220" name="Google Shape;220;p30"/>
+          <p:cNvPr id="230" name="Google Shape;230;p32"/>
           <p:cNvPicPr preferRelativeResize="0"/>
           <p:nvPr/>
         </p:nvPicPr>
@@ -14031,7 +15222,7 @@
       </p:pic>
       <p:pic>
         <p:nvPicPr>
-          <p:cNvPr id="221" name="Google Shape;221;p30"/>
+          <p:cNvPr id="231" name="Google Shape;231;p32"/>
           <p:cNvPicPr preferRelativeResize="0"/>
           <p:nvPr/>
         </p:nvPicPr>
@@ -14058,7 +15249,7 @@
       </p:pic>
       <p:pic>
         <p:nvPicPr>
-          <p:cNvPr id="222" name="Google Shape;222;p30"/>
+          <p:cNvPr id="232" name="Google Shape;232;p32"/>
           <p:cNvPicPr preferRelativeResize="0"/>
           <p:nvPr/>
         </p:nvPicPr>
@@ -14085,7 +15276,7 @@
       </p:pic>
       <p:sp>
         <p:nvSpPr>
-          <p:cNvPr id="223" name="Google Shape;223;p30"/>
+          <p:cNvPr id="233" name="Google Shape;233;p32"/>
           <p:cNvSpPr txBox="1"/>
           <p:nvPr/>
         </p:nvSpPr>
@@ -14151,17 +15342,16 @@
       </p:sp>
       <p:pic>
         <p:nvPicPr>
-          <p:cNvPr id="224" name="Google Shape;224;p30"/>
+          <p:cNvPr id="234" name="Google Shape;234;p32"/>
           <p:cNvPicPr preferRelativeResize="0"/>
           <p:nvPr/>
         </p:nvPicPr>
-        <p:blipFill>
+        <p:blipFill rotWithShape="1">
           <a:blip r:embed="rId6">
             <a:alphaModFix/>
           </a:blip>
-          <a:stretch>
-            <a:fillRect/>
-          </a:stretch>
+          <a:srcRect b="0" l="0" r="0" t="0"/>
+          <a:stretch/>
         </p:blipFill>
         <p:spPr>
           <a:xfrm>
@@ -14202,23 +15392,129 @@
           <a:chExt cx="0" cy="0"/>
         </a:xfrm>
       </p:grpSpPr>
+      <p:sp>
+        <p:nvSpPr>
+          <p:cNvPr id="66" name="Google Shape;66;p15"/>
+          <p:cNvSpPr txBox="1"/>
+          <p:nvPr>
+            <p:ph idx="1" type="subTitle"/>
+          </p:nvPr>
+        </p:nvSpPr>
+        <p:spPr>
+          <a:xfrm>
+            <a:off x="429000" y="2031000"/>
+            <a:ext cx="8520600" cy="792600"/>
+          </a:xfrm>
+          <a:prstGeom prst="rect">
+            <a:avLst/>
+          </a:prstGeom>
+        </p:spPr>
+        <p:txBody>
+          <a:bodyPr anchorCtr="0" anchor="t" bIns="91425" lIns="91425" spcFirstLastPara="1" rIns="91425" wrap="square" tIns="91425">
+            <a:normAutofit/>
+          </a:bodyPr>
+          <a:lstStyle/>
+          <a:p>
+            <a:pPr indent="0" lvl="0" marL="0" rtl="0" algn="ctr">
+              <a:spcBef>
+                <a:spcPts val="0"/>
+              </a:spcBef>
+              <a:spcAft>
+                <a:spcPts val="0"/>
+              </a:spcAft>
+              <a:buNone/>
+            </a:pPr>
+            <a:r>
+              <a:rPr lang="en-GB"/>
+              <a:t>Data Analysis &amp; Preprocessing</a:t>
+            </a:r>
+            <a:endParaRPr/>
+          </a:p>
+        </p:txBody>
+      </p:sp>
+    </p:spTree>
+  </p:cSld>
+  <p:clrMapOvr>
+    <a:masterClrMapping/>
+  </p:clrMapOvr>
+</p:sld>
+</file>
+
+<file path=ppt/slides/slide20.xml><?xml version="1.0" encoding="utf-8"?>
+<p:sld xmlns:a="http://schemas.openxmlformats.org/drawingml/2006/main" xmlns:r="http://schemas.openxmlformats.org/officeDocument/2006/relationships" xmlns:mc="http://schemas.openxmlformats.org/markup-compatibility/2006" xmlns:mv="urn:schemas-microsoft-com:mac:vml" xmlns:p="http://schemas.openxmlformats.org/presentationml/2006/main" xmlns:c="http://schemas.openxmlformats.org/drawingml/2006/chart" xmlns:dgm="http://schemas.openxmlformats.org/drawingml/2006/diagram" xmlns:o="urn:schemas-microsoft-com:office:office" xmlns:v="urn:schemas-microsoft-com:vml" xmlns:pvml="urn:schemas-microsoft-com:office:powerpoint" xmlns:com="http://schemas.openxmlformats.org/drawingml/2006/compatibility" xmlns:p14="http://schemas.microsoft.com/office/powerpoint/2010/main" xmlns:p15="http://schemas.microsoft.com/office/powerpoint/2012/main" xmlns:ahyp="http://schemas.microsoft.com/office/drawing/2018/hyperlinkcolor">
+  <p:cSld>
+    <p:spTree>
+      <p:nvGrpSpPr>
+        <p:cNvPr id="238" name="Shape 238"/>
+        <p:cNvGrpSpPr/>
+        <p:nvPr/>
+      </p:nvGrpSpPr>
+      <p:grpSpPr>
+        <a:xfrm>
+          <a:off x="0" y="0"/>
+          <a:ext cx="0" cy="0"/>
+          <a:chOff x="0" y="0"/>
+          <a:chExt cx="0" cy="0"/>
+        </a:xfrm>
+      </p:grpSpPr>
+      <p:sp>
+        <p:nvSpPr>
+          <p:cNvPr id="239" name="Google Shape;239;p33"/>
+          <p:cNvSpPr txBox="1"/>
+          <p:nvPr>
+            <p:ph type="title"/>
+          </p:nvPr>
+        </p:nvSpPr>
+        <p:spPr>
+          <a:xfrm>
+            <a:off x="628652" y="273847"/>
+            <a:ext cx="7886700" cy="994200"/>
+          </a:xfrm>
+          <a:prstGeom prst="rect">
+            <a:avLst/>
+          </a:prstGeom>
+        </p:spPr>
+        <p:txBody>
+          <a:bodyPr anchorCtr="0" anchor="ctr" bIns="34275" lIns="68575" spcFirstLastPara="1" rIns="68575" wrap="square" tIns="34275">
+            <a:normAutofit/>
+          </a:bodyPr>
+          <a:lstStyle/>
+          <a:p>
+            <a:pPr indent="0" lvl="0" marL="0" rtl="0" algn="l">
+              <a:spcBef>
+                <a:spcPts val="0"/>
+              </a:spcBef>
+              <a:spcAft>
+                <a:spcPts val="0"/>
+              </a:spcAft>
+              <a:buNone/>
+            </a:pPr>
+            <a:r>
+              <a:rPr lang="en-GB"/>
+              <a:t>NLP- Text Preprocessing</a:t>
+            </a:r>
+            <a:endParaRPr/>
+          </a:p>
+        </p:txBody>
+      </p:sp>
       <p:pic>
         <p:nvPicPr>
-          <p:cNvPr id="66" name="Google Shape;66;p15"/>
+          <p:cNvPr id="240" name="Google Shape;240;p33" title="Text_Preprocessing.png"/>
           <p:cNvPicPr preferRelativeResize="0"/>
           <p:nvPr/>
         </p:nvPicPr>
-        <p:blipFill rotWithShape="1">
+        <p:blipFill>
           <a:blip r:embed="rId3">
             <a:alphaModFix/>
           </a:blip>
-          <a:srcRect b="10038" l="0" r="0" t="10038"/>
-          <a:stretch/>
+          <a:stretch>
+            <a:fillRect/>
+          </a:stretch>
         </p:blipFill>
         <p:spPr>
           <a:xfrm>
-            <a:off x="1913050" y="121813"/>
-            <a:ext cx="5242749" cy="4899875"/>
+            <a:off x="152400" y="1708675"/>
+            <a:ext cx="8839201" cy="2943659"/>
           </a:xfrm>
           <a:prstGeom prst="rect">
             <a:avLst/>
@@ -14229,6 +15525,110 @@
           </a:ln>
         </p:spPr>
       </p:pic>
+    </p:spTree>
+  </p:cSld>
+  <p:clrMapOvr>
+    <a:masterClrMapping/>
+  </p:clrMapOvr>
+</p:sld>
+</file>
+
+<file path=ppt/slides/slide21.xml><?xml version="1.0" encoding="utf-8"?>
+<p:sld xmlns:a="http://schemas.openxmlformats.org/drawingml/2006/main" xmlns:r="http://schemas.openxmlformats.org/officeDocument/2006/relationships" xmlns:mc="http://schemas.openxmlformats.org/markup-compatibility/2006" xmlns:mv="urn:schemas-microsoft-com:mac:vml" xmlns:p="http://schemas.openxmlformats.org/presentationml/2006/main" xmlns:c="http://schemas.openxmlformats.org/drawingml/2006/chart" xmlns:dgm="http://schemas.openxmlformats.org/drawingml/2006/diagram" xmlns:o="urn:schemas-microsoft-com:office:office" xmlns:v="urn:schemas-microsoft-com:vml" xmlns:pvml="urn:schemas-microsoft-com:office:powerpoint" xmlns:com="http://schemas.openxmlformats.org/drawingml/2006/compatibility" xmlns:p14="http://schemas.microsoft.com/office/powerpoint/2010/main" xmlns:p15="http://schemas.microsoft.com/office/powerpoint/2012/main" xmlns:ahyp="http://schemas.microsoft.com/office/drawing/2018/hyperlinkcolor">
+  <p:cSld>
+    <p:spTree>
+      <p:nvGrpSpPr>
+        <p:cNvPr id="244" name="Shape 244"/>
+        <p:cNvGrpSpPr/>
+        <p:nvPr/>
+      </p:nvGrpSpPr>
+      <p:grpSpPr>
+        <a:xfrm>
+          <a:off x="0" y="0"/>
+          <a:ext cx="0" cy="0"/>
+          <a:chOff x="0" y="0"/>
+          <a:chExt cx="0" cy="0"/>
+        </a:xfrm>
+      </p:grpSpPr>
+      <p:sp>
+        <p:nvSpPr>
+          <p:cNvPr id="245" name="Google Shape;245;p34"/>
+          <p:cNvSpPr txBox="1"/>
+          <p:nvPr>
+            <p:ph type="title"/>
+          </p:nvPr>
+        </p:nvSpPr>
+        <p:spPr>
+          <a:xfrm>
+            <a:off x="628652" y="273847"/>
+            <a:ext cx="7886700" cy="994200"/>
+          </a:xfrm>
+          <a:prstGeom prst="rect">
+            <a:avLst/>
+          </a:prstGeom>
+        </p:spPr>
+        <p:txBody>
+          <a:bodyPr anchorCtr="0" anchor="ctr" bIns="34275" lIns="68575" spcFirstLastPara="1" rIns="68575" wrap="square" tIns="34275">
+            <a:normAutofit/>
+          </a:bodyPr>
+          <a:lstStyle/>
+          <a:p>
+            <a:pPr indent="0" lvl="0" marL="0" rtl="0" algn="l">
+              <a:spcBef>
+                <a:spcPts val="0"/>
+              </a:spcBef>
+              <a:spcAft>
+                <a:spcPts val="0"/>
+              </a:spcAft>
+              <a:buNone/>
+            </a:pPr>
+            <a:r>
+              <a:rPr lang="en-GB"/>
+              <a:t>CV-Image Preprocessing</a:t>
+            </a:r>
+            <a:endParaRPr/>
+          </a:p>
+        </p:txBody>
+      </p:sp>
+      <p:sp>
+        <p:nvSpPr>
+          <p:cNvPr id="246" name="Google Shape;246;p34"/>
+          <p:cNvSpPr txBox="1"/>
+          <p:nvPr>
+            <p:ph idx="1" type="body"/>
+          </p:nvPr>
+        </p:nvSpPr>
+        <p:spPr>
+          <a:xfrm>
+            <a:off x="628652" y="1369220"/>
+            <a:ext cx="7886700" cy="3263400"/>
+          </a:xfrm>
+          <a:prstGeom prst="rect">
+            <a:avLst/>
+          </a:prstGeom>
+        </p:spPr>
+        <p:txBody>
+          <a:bodyPr anchorCtr="0" anchor="t" bIns="34275" lIns="68575" spcFirstLastPara="1" rIns="68575" wrap="square" tIns="34275">
+            <a:normAutofit/>
+          </a:bodyPr>
+          <a:lstStyle/>
+          <a:p>
+            <a:pPr indent="0" lvl="0" marL="0" rtl="0" algn="l">
+              <a:spcBef>
+                <a:spcPts val="800"/>
+              </a:spcBef>
+              <a:spcAft>
+                <a:spcPts val="0"/>
+              </a:spcAft>
+              <a:buNone/>
+            </a:pPr>
+            <a:r>
+              <a:t/>
+            </a:r>
+            <a:endParaRPr/>
+          </a:p>
+        </p:txBody>
+      </p:sp>
     </p:spTree>
   </p:cSld>
   <p:clrMapOvr>
@@ -14264,13 +15664,13 @@
           <a:blip r:embed="rId3">
             <a:alphaModFix/>
           </a:blip>
-          <a:srcRect b="73402" l="0" r="0" t="0"/>
+          <a:srcRect b="10038" l="0" r="0" t="10038"/>
           <a:stretch/>
         </p:blipFill>
         <p:spPr>
           <a:xfrm>
-            <a:off x="378000" y="2752225"/>
-            <a:ext cx="4088727" cy="2428375"/>
+            <a:off x="1913050" y="121813"/>
+            <a:ext cx="5242749" cy="4899875"/>
           </a:xfrm>
           <a:prstGeom prst="rect">
             <a:avLst/>
@@ -14281,9 +15681,61 @@
           </a:ln>
         </p:spPr>
       </p:pic>
+    </p:spTree>
+  </p:cSld>
+  <p:clrMapOvr>
+    <a:masterClrMapping/>
+  </p:clrMapOvr>
+</p:sld>
+</file>
+
+<file path=ppt/slides/slide4.xml><?xml version="1.0" encoding="utf-8"?>
+<p:sld xmlns:a="http://schemas.openxmlformats.org/drawingml/2006/main" xmlns:r="http://schemas.openxmlformats.org/officeDocument/2006/relationships" xmlns:mc="http://schemas.openxmlformats.org/markup-compatibility/2006" xmlns:mv="urn:schemas-microsoft-com:mac:vml" xmlns:p="http://schemas.openxmlformats.org/presentationml/2006/main" xmlns:c="http://schemas.openxmlformats.org/drawingml/2006/chart" xmlns:dgm="http://schemas.openxmlformats.org/drawingml/2006/diagram" xmlns:o="urn:schemas-microsoft-com:office:office" xmlns:v="urn:schemas-microsoft-com:vml" xmlns:pvml="urn:schemas-microsoft-com:office:powerpoint" xmlns:com="http://schemas.openxmlformats.org/drawingml/2006/compatibility" xmlns:p14="http://schemas.microsoft.com/office/powerpoint/2010/main" xmlns:p15="http://schemas.microsoft.com/office/powerpoint/2012/main" xmlns:ahyp="http://schemas.microsoft.com/office/drawing/2018/hyperlinkcolor">
+  <p:cSld>
+    <p:spTree>
+      <p:nvGrpSpPr>
+        <p:cNvPr id="75" name="Shape 75"/>
+        <p:cNvGrpSpPr/>
+        <p:nvPr/>
+      </p:nvGrpSpPr>
+      <p:grpSpPr>
+        <a:xfrm>
+          <a:off x="0" y="0"/>
+          <a:ext cx="0" cy="0"/>
+          <a:chOff x="0" y="0"/>
+          <a:chExt cx="0" cy="0"/>
+        </a:xfrm>
+      </p:grpSpPr>
       <p:pic>
         <p:nvPicPr>
-          <p:cNvPr id="72" name="Google Shape;72;p16"/>
+          <p:cNvPr id="76" name="Google Shape;76;p17"/>
+          <p:cNvPicPr preferRelativeResize="0"/>
+          <p:nvPr/>
+        </p:nvPicPr>
+        <p:blipFill rotWithShape="1">
+          <a:blip r:embed="rId3">
+            <a:alphaModFix/>
+          </a:blip>
+          <a:srcRect b="73402" l="0" r="0" t="0"/>
+          <a:stretch/>
+        </p:blipFill>
+        <p:spPr>
+          <a:xfrm>
+            <a:off x="378000" y="2752225"/>
+            <a:ext cx="4088727" cy="2428375"/>
+          </a:xfrm>
+          <a:prstGeom prst="rect">
+            <a:avLst/>
+          </a:prstGeom>
+          <a:noFill/>
+          <a:ln>
+            <a:noFill/>
+          </a:ln>
+        </p:spPr>
+      </p:pic>
+      <p:pic>
+        <p:nvPicPr>
+          <p:cNvPr id="77" name="Google Shape;77;p17"/>
           <p:cNvPicPr preferRelativeResize="0"/>
           <p:nvPr/>
         </p:nvPicPr>
@@ -14310,7 +15762,7 @@
       </p:pic>
       <p:pic>
         <p:nvPicPr>
-          <p:cNvPr id="73" name="Google Shape;73;p16"/>
+          <p:cNvPr id="78" name="Google Shape;78;p17"/>
           <p:cNvPicPr preferRelativeResize="0"/>
           <p:nvPr/>
         </p:nvPicPr>
@@ -14337,7 +15789,7 @@
       </p:pic>
       <p:pic>
         <p:nvPicPr>
-          <p:cNvPr id="74" name="Google Shape;74;p16"/>
+          <p:cNvPr id="79" name="Google Shape;79;p17"/>
           <p:cNvPicPr preferRelativeResize="0"/>
           <p:nvPr/>
         </p:nvPicPr>
@@ -14364,7 +15816,7 @@
       </p:pic>
       <p:sp>
         <p:nvSpPr>
-          <p:cNvPr id="75" name="Google Shape;75;p16"/>
+          <p:cNvPr id="80" name="Google Shape;80;p17"/>
           <p:cNvSpPr txBox="1"/>
           <p:nvPr/>
         </p:nvSpPr>
@@ -14405,14 +15857,6 @@
               <a:buNone/>
             </a:pPr>
             <a:r>
-              <a:rPr lang="en-GB" sz="1800">
-                <a:solidFill>
-                  <a:schemeClr val="dk1"/>
-                </a:solidFill>
-              </a:rPr>
-              <a:t>1.</a:t>
-            </a:r>
-            <a:r>
               <a:rPr b="0" i="0" lang="en-GB" sz="1800" u="none" cap="none" strike="noStrike">
                 <a:solidFill>
                   <a:schemeClr val="dk1"/>
@@ -14422,7 +15866,7 @@
                 <a:cs typeface="Arial"/>
                 <a:sym typeface="Arial"/>
               </a:rPr>
-              <a:t>PANDAS</a:t>
+              <a:t>1.PANDAS</a:t>
             </a:r>
             <a:endParaRPr b="0" i="0" sz="1800" u="none" cap="none" strike="noStrike">
               <a:solidFill>
@@ -14438,7 +15882,7 @@
       </p:sp>
       <p:sp>
         <p:nvSpPr>
-          <p:cNvPr id="76" name="Google Shape;76;p16"/>
+          <p:cNvPr id="81" name="Google Shape;81;p17"/>
           <p:cNvSpPr txBox="1"/>
           <p:nvPr/>
         </p:nvSpPr>
@@ -14504,17 +15948,16 @@
       </p:sp>
       <p:pic>
         <p:nvPicPr>
-          <p:cNvPr id="77" name="Google Shape;77;p16"/>
+          <p:cNvPr id="82" name="Google Shape;82;p17"/>
           <p:cNvPicPr preferRelativeResize="0"/>
           <p:nvPr/>
         </p:nvPicPr>
-        <p:blipFill>
+        <p:blipFill rotWithShape="1">
           <a:blip r:embed="rId7">
             <a:alphaModFix/>
           </a:blip>
-          <a:stretch>
-            <a:fillRect/>
-          </a:stretch>
+          <a:srcRect b="0" l="0" r="0" t="0"/>
+          <a:stretch/>
         </p:blipFill>
         <p:spPr>
           <a:xfrm rot="5400000">
@@ -14538,12 +15981,12 @@
 </p:sld>
 </file>
 
-<file path=ppt/slides/slide4.xml><?xml version="1.0" encoding="utf-8"?>
+<file path=ppt/slides/slide5.xml><?xml version="1.0" encoding="utf-8"?>
 <p:sld xmlns:a="http://schemas.openxmlformats.org/drawingml/2006/main" xmlns:r="http://schemas.openxmlformats.org/officeDocument/2006/relationships" xmlns:mc="http://schemas.openxmlformats.org/markup-compatibility/2006" xmlns:mv="urn:schemas-microsoft-com:mac:vml" xmlns:p="http://schemas.openxmlformats.org/presentationml/2006/main" xmlns:c="http://schemas.openxmlformats.org/drawingml/2006/chart" xmlns:dgm="http://schemas.openxmlformats.org/drawingml/2006/diagram" xmlns:o="urn:schemas-microsoft-com:office:office" xmlns:v="urn:schemas-microsoft-com:vml" xmlns:pvml="urn:schemas-microsoft-com:office:powerpoint" xmlns:com="http://schemas.openxmlformats.org/drawingml/2006/compatibility" xmlns:p14="http://schemas.microsoft.com/office/powerpoint/2010/main" xmlns:p15="http://schemas.microsoft.com/office/powerpoint/2012/main" xmlns:ahyp="http://schemas.microsoft.com/office/drawing/2018/hyperlinkcolor">
   <p:cSld>
     <p:spTree>
       <p:nvGrpSpPr>
-        <p:cNvPr id="81" name="Shape 81"/>
+        <p:cNvPr id="86" name="Shape 86"/>
         <p:cNvGrpSpPr/>
         <p:nvPr/>
       </p:nvGrpSpPr>
@@ -14557,7 +16000,7 @@
       </p:grpSpPr>
       <p:sp>
         <p:nvSpPr>
-          <p:cNvPr id="82" name="Google Shape;82;p17"/>
+          <p:cNvPr id="87" name="Google Shape;87;p18"/>
           <p:cNvSpPr txBox="1"/>
           <p:nvPr>
             <p:ph type="title"/>
@@ -14571,6 +16014,10 @@
           <a:prstGeom prst="rect">
             <a:avLst/>
           </a:prstGeom>
+          <a:noFill/>
+          <a:ln>
+            <a:noFill/>
+          </a:ln>
         </p:spPr>
         <p:txBody>
           <a:bodyPr anchorCtr="0" anchor="t" bIns="91425" lIns="91425" spcFirstLastPara="1" rIns="91425" wrap="square" tIns="91425">
@@ -14579,12 +16026,16 @@
           <a:lstStyle/>
           <a:p>
             <a:pPr indent="0" lvl="0" marL="0" rtl="0" algn="l">
-              <a:spcBef>
-                <a:spcPts val="0"/>
-              </a:spcBef>
-              <a:spcAft>
-                <a:spcPts val="0"/>
-              </a:spcAft>
+              <a:lnSpc>
+                <a:spcPct val="100000"/>
+              </a:lnSpc>
+              <a:spcBef>
+                <a:spcPts val="0"/>
+              </a:spcBef>
+              <a:spcAft>
+                <a:spcPts val="0"/>
+              </a:spcAft>
+              <a:buSzPct val="111111"/>
               <a:buNone/>
             </a:pPr>
             <a:r>
@@ -14597,7 +16048,7 @@
       </p:sp>
       <p:sp>
         <p:nvSpPr>
-          <p:cNvPr id="83" name="Google Shape;83;p17"/>
+          <p:cNvPr id="88" name="Google Shape;88;p18"/>
           <p:cNvSpPr txBox="1"/>
           <p:nvPr>
             <p:ph idx="1" type="body"/>
@@ -14611,6 +16062,10 @@
           <a:prstGeom prst="rect">
             <a:avLst/>
           </a:prstGeom>
+          <a:noFill/>
+          <a:ln>
+            <a:noFill/>
+          </a:ln>
         </p:spPr>
         <p:txBody>
           <a:bodyPr anchorCtr="0" anchor="t" bIns="91425" lIns="91425" spcFirstLastPara="1" rIns="91425" wrap="square" tIns="91425">
@@ -14619,12 +16074,16 @@
           <a:lstStyle/>
           <a:p>
             <a:pPr indent="0" lvl="0" marL="0" rtl="0" algn="l">
-              <a:spcBef>
-                <a:spcPts val="0"/>
-              </a:spcBef>
-              <a:spcAft>
-                <a:spcPts val="0"/>
-              </a:spcAft>
+              <a:lnSpc>
+                <a:spcPct val="115000"/>
+              </a:lnSpc>
+              <a:spcBef>
+                <a:spcPts val="0"/>
+              </a:spcBef>
+              <a:spcAft>
+                <a:spcPts val="0"/>
+              </a:spcAft>
+              <a:buSzPts val="1800"/>
               <a:buNone/>
             </a:pPr>
             <a:r>
@@ -14643,12 +16102,16 @@
           </a:p>
           <a:p>
             <a:pPr indent="0" lvl="0" marL="0" rtl="0" algn="l">
-              <a:spcBef>
-                <a:spcPts val="0"/>
-              </a:spcBef>
-              <a:spcAft>
-                <a:spcPts val="0"/>
-              </a:spcAft>
+              <a:lnSpc>
+                <a:spcPct val="115000"/>
+              </a:lnSpc>
+              <a:spcBef>
+                <a:spcPts val="0"/>
+              </a:spcBef>
+              <a:spcAft>
+                <a:spcPts val="0"/>
+              </a:spcAft>
+              <a:buSzPts val="1800"/>
               <a:buNone/>
             </a:pPr>
             <a:r>
@@ -14664,7 +16127,7 @@
       </p:sp>
       <p:pic>
         <p:nvPicPr>
-          <p:cNvPr id="84" name="Google Shape;84;p17"/>
+          <p:cNvPr id="89" name="Google Shape;89;p18"/>
           <p:cNvPicPr preferRelativeResize="0"/>
           <p:nvPr/>
         </p:nvPicPr>
@@ -14672,7 +16135,7 @@
           <a:blip r:embed="rId3">
             <a:alphaModFix/>
           </a:blip>
-          <a:srcRect b="13805" l="23764" r="16282" t="10922"/>
+          <a:srcRect b="13804" l="23764" r="16282" t="10922"/>
           <a:stretch/>
         </p:blipFill>
         <p:spPr>
@@ -14691,17 +16154,16 @@
       </p:pic>
       <p:pic>
         <p:nvPicPr>
-          <p:cNvPr id="85" name="Google Shape;85;p17"/>
+          <p:cNvPr id="90" name="Google Shape;90;p18"/>
           <p:cNvPicPr preferRelativeResize="0"/>
           <p:nvPr/>
         </p:nvPicPr>
-        <p:blipFill>
+        <p:blipFill rotWithShape="1">
           <a:blip r:embed="rId4">
             <a:alphaModFix/>
           </a:blip>
-          <a:stretch>
-            <a:fillRect/>
-          </a:stretch>
+          <a:srcRect b="0" l="0" r="0" t="0"/>
+          <a:stretch/>
         </p:blipFill>
         <p:spPr>
           <a:xfrm>
@@ -14719,7 +16181,7 @@
       </p:pic>
       <p:sp>
         <p:nvSpPr>
-          <p:cNvPr id="86" name="Google Shape;86;p17"/>
+          <p:cNvPr id="91" name="Google Shape;91;p18"/>
           <p:cNvSpPr txBox="1"/>
           <p:nvPr/>
         </p:nvSpPr>
@@ -14742,44 +16204,59 @@
           </a:bodyPr>
           <a:lstStyle/>
           <a:p>
-            <a:pPr indent="0" lvl="0" marL="0" rtl="0" algn="l">
-              <a:spcBef>
-                <a:spcPts val="0"/>
-              </a:spcBef>
-              <a:spcAft>
-                <a:spcPts val="0"/>
-              </a:spcAft>
+            <a:pPr indent="0" lvl="0" marL="0" marR="0" rtl="0" algn="l">
+              <a:lnSpc>
+                <a:spcPct val="100000"/>
+              </a:lnSpc>
+              <a:spcBef>
+                <a:spcPts val="0"/>
+              </a:spcBef>
+              <a:spcAft>
+                <a:spcPts val="0"/>
+              </a:spcAft>
+              <a:buClr>
+                <a:srgbClr val="000000"/>
+              </a:buClr>
+              <a:buSzPts val="1800"/>
+              <a:buFont typeface="Arial"/>
               <a:buNone/>
             </a:pPr>
             <a:r>
-              <a:rPr lang="en-GB" sz="1800">
+              <a:rPr b="0" i="0" lang="en-GB" sz="1800" u="none" cap="none" strike="noStrike">
                 <a:solidFill>
                   <a:schemeClr val="dk1"/>
                 </a:solidFill>
+                <a:latin typeface="Arial"/>
+                <a:ea typeface="Arial"/>
+                <a:cs typeface="Arial"/>
+                <a:sym typeface="Arial"/>
               </a:rPr>
               <a:t>Rows info</a:t>
             </a:r>
-            <a:endParaRPr sz="1800">
+            <a:endParaRPr b="0" i="0" sz="1800" u="none" cap="none" strike="noStrike">
               <a:solidFill>
                 <a:schemeClr val="dk1"/>
               </a:solidFill>
+              <a:latin typeface="Arial"/>
+              <a:ea typeface="Arial"/>
+              <a:cs typeface="Arial"/>
+              <a:sym typeface="Arial"/>
             </a:endParaRPr>
           </a:p>
         </p:txBody>
       </p:sp>
       <p:pic>
         <p:nvPicPr>
-          <p:cNvPr id="87" name="Google Shape;87;p17"/>
+          <p:cNvPr id="92" name="Google Shape;92;p18"/>
           <p:cNvPicPr preferRelativeResize="0"/>
           <p:nvPr/>
         </p:nvPicPr>
-        <p:blipFill>
+        <p:blipFill rotWithShape="1">
           <a:blip r:embed="rId5">
             <a:alphaModFix/>
           </a:blip>
-          <a:stretch>
-            <a:fillRect/>
-          </a:stretch>
+          <a:srcRect b="0" l="0" r="0" t="0"/>
+          <a:stretch/>
         </p:blipFill>
         <p:spPr>
           <a:xfrm>
@@ -14797,7 +16274,7 @@
       </p:pic>
       <p:sp>
         <p:nvSpPr>
-          <p:cNvPr id="88" name="Google Shape;88;p17"/>
+          <p:cNvPr id="93" name="Google Shape;93;p18"/>
           <p:cNvSpPr txBox="1"/>
           <p:nvPr/>
         </p:nvSpPr>
@@ -14820,44 +16297,59 @@
           </a:bodyPr>
           <a:lstStyle/>
           <a:p>
-            <a:pPr indent="0" lvl="0" marL="0" rtl="0" algn="l">
-              <a:spcBef>
-                <a:spcPts val="0"/>
-              </a:spcBef>
-              <a:spcAft>
-                <a:spcPts val="0"/>
-              </a:spcAft>
+            <a:pPr indent="0" lvl="0" marL="0" marR="0" rtl="0" algn="l">
+              <a:lnSpc>
+                <a:spcPct val="100000"/>
+              </a:lnSpc>
+              <a:spcBef>
+                <a:spcPts val="0"/>
+              </a:spcBef>
+              <a:spcAft>
+                <a:spcPts val="0"/>
+              </a:spcAft>
+              <a:buClr>
+                <a:srgbClr val="000000"/>
+              </a:buClr>
+              <a:buSzPts val="1800"/>
+              <a:buFont typeface="Arial"/>
               <a:buNone/>
             </a:pPr>
             <a:r>
-              <a:rPr lang="en-GB" sz="1800">
+              <a:rPr b="0" i="0" lang="en-GB" sz="1800" u="none" cap="none" strike="noStrike">
                 <a:solidFill>
                   <a:schemeClr val="dk1"/>
                 </a:solidFill>
+                <a:latin typeface="Arial"/>
+                <a:ea typeface="Arial"/>
+                <a:cs typeface="Arial"/>
+                <a:sym typeface="Arial"/>
               </a:rPr>
               <a:t>Show selected columns</a:t>
             </a:r>
-            <a:endParaRPr sz="1800">
+            <a:endParaRPr b="0" i="0" sz="1800" u="none" cap="none" strike="noStrike">
               <a:solidFill>
                 <a:schemeClr val="dk1"/>
               </a:solidFill>
+              <a:latin typeface="Arial"/>
+              <a:ea typeface="Arial"/>
+              <a:cs typeface="Arial"/>
+              <a:sym typeface="Arial"/>
             </a:endParaRPr>
           </a:p>
         </p:txBody>
       </p:sp>
       <p:pic>
         <p:nvPicPr>
-          <p:cNvPr id="89" name="Google Shape;89;p17"/>
+          <p:cNvPr id="94" name="Google Shape;94;p18"/>
           <p:cNvPicPr preferRelativeResize="0"/>
           <p:nvPr/>
         </p:nvPicPr>
-        <p:blipFill>
+        <p:blipFill rotWithShape="1">
           <a:blip r:embed="rId6">
             <a:alphaModFix/>
           </a:blip>
-          <a:stretch>
-            <a:fillRect/>
-          </a:stretch>
+          <a:srcRect b="0" l="0" r="0" t="0"/>
+          <a:stretch/>
         </p:blipFill>
         <p:spPr>
           <a:xfrm>
@@ -14875,7 +16367,7 @@
       </p:pic>
       <p:sp>
         <p:nvSpPr>
-          <p:cNvPr id="90" name="Google Shape;90;p17"/>
+          <p:cNvPr id="95" name="Google Shape;95;p18"/>
           <p:cNvSpPr txBox="1"/>
           <p:nvPr/>
         </p:nvSpPr>
@@ -14898,44 +16390,59 @@
           </a:bodyPr>
           <a:lstStyle/>
           <a:p>
-            <a:pPr indent="0" lvl="0" marL="0" rtl="0" algn="l">
-              <a:spcBef>
-                <a:spcPts val="0"/>
-              </a:spcBef>
-              <a:spcAft>
-                <a:spcPts val="0"/>
-              </a:spcAft>
+            <a:pPr indent="0" lvl="0" marL="0" marR="0" rtl="0" algn="l">
+              <a:lnSpc>
+                <a:spcPct val="100000"/>
+              </a:lnSpc>
+              <a:spcBef>
+                <a:spcPts val="0"/>
+              </a:spcBef>
+              <a:spcAft>
+                <a:spcPts val="0"/>
+              </a:spcAft>
+              <a:buClr>
+                <a:srgbClr val="000000"/>
+              </a:buClr>
+              <a:buSzPts val="1800"/>
+              <a:buFont typeface="Arial"/>
               <a:buNone/>
             </a:pPr>
             <a:r>
-              <a:rPr lang="en-GB" sz="1800">
+              <a:rPr b="0" i="0" lang="en-GB" sz="1800" u="none" cap="none" strike="noStrike">
                 <a:solidFill>
                   <a:schemeClr val="dk1"/>
                 </a:solidFill>
+                <a:latin typeface="Arial"/>
+                <a:ea typeface="Arial"/>
+                <a:cs typeface="Arial"/>
+                <a:sym typeface="Arial"/>
               </a:rPr>
               <a:t>Getting dtypes of columns</a:t>
             </a:r>
-            <a:endParaRPr sz="1800">
+            <a:endParaRPr b="0" i="0" sz="1800" u="none" cap="none" strike="noStrike">
               <a:solidFill>
                 <a:schemeClr val="dk1"/>
               </a:solidFill>
+              <a:latin typeface="Arial"/>
+              <a:ea typeface="Arial"/>
+              <a:cs typeface="Arial"/>
+              <a:sym typeface="Arial"/>
             </a:endParaRPr>
           </a:p>
         </p:txBody>
       </p:sp>
       <p:pic>
         <p:nvPicPr>
-          <p:cNvPr id="91" name="Google Shape;91;p17"/>
+          <p:cNvPr id="96" name="Google Shape;96;p18"/>
           <p:cNvPicPr preferRelativeResize="0"/>
           <p:nvPr/>
         </p:nvPicPr>
-        <p:blipFill>
+        <p:blipFill rotWithShape="1">
           <a:blip r:embed="rId7">
             <a:alphaModFix/>
           </a:blip>
-          <a:stretch>
-            <a:fillRect/>
-          </a:stretch>
+          <a:srcRect b="0" l="0" r="0" t="0"/>
+          <a:stretch/>
         </p:blipFill>
         <p:spPr>
           <a:xfrm>
@@ -14953,7 +16460,7 @@
       </p:pic>
       <p:sp>
         <p:nvSpPr>
-          <p:cNvPr id="92" name="Google Shape;92;p17"/>
+          <p:cNvPr id="97" name="Google Shape;97;p18"/>
           <p:cNvSpPr txBox="1"/>
           <p:nvPr/>
         </p:nvSpPr>
@@ -14976,34 +16483,50 @@
           </a:bodyPr>
           <a:lstStyle/>
           <a:p>
-            <a:pPr indent="0" lvl="0" marL="0" rtl="0" algn="l">
-              <a:spcBef>
-                <a:spcPts val="0"/>
-              </a:spcBef>
-              <a:spcAft>
-                <a:spcPts val="0"/>
-              </a:spcAft>
+            <a:pPr indent="0" lvl="0" marL="0" marR="0" rtl="0" algn="l">
+              <a:lnSpc>
+                <a:spcPct val="100000"/>
+              </a:lnSpc>
+              <a:spcBef>
+                <a:spcPts val="0"/>
+              </a:spcBef>
+              <a:spcAft>
+                <a:spcPts val="0"/>
+              </a:spcAft>
+              <a:buClr>
+                <a:srgbClr val="000000"/>
+              </a:buClr>
+              <a:buSzPts val="1800"/>
+              <a:buFont typeface="Arial"/>
               <a:buNone/>
             </a:pPr>
             <a:r>
-              <a:rPr lang="en-GB" sz="1800">
+              <a:rPr b="0" i="0" lang="en-GB" sz="1800" u="none" cap="none" strike="noStrike">
                 <a:solidFill>
                   <a:schemeClr val="dk1"/>
                 </a:solidFill>
+                <a:latin typeface="Arial"/>
+                <a:ea typeface="Arial"/>
+                <a:cs typeface="Arial"/>
+                <a:sym typeface="Arial"/>
               </a:rPr>
               <a:t>Getting dataframe stats</a:t>
             </a:r>
-            <a:endParaRPr sz="1800">
+            <a:endParaRPr b="0" i="0" sz="1800" u="none" cap="none" strike="noStrike">
               <a:solidFill>
                 <a:schemeClr val="dk1"/>
               </a:solidFill>
+              <a:latin typeface="Arial"/>
+              <a:ea typeface="Arial"/>
+              <a:cs typeface="Arial"/>
+              <a:sym typeface="Arial"/>
             </a:endParaRPr>
           </a:p>
         </p:txBody>
       </p:sp>
       <p:pic>
         <p:nvPicPr>
-          <p:cNvPr id="93" name="Google Shape;93;p17"/>
+          <p:cNvPr id="98" name="Google Shape;98;p18"/>
           <p:cNvPicPr preferRelativeResize="0"/>
           <p:nvPr/>
         </p:nvPicPr>
@@ -15030,17 +16553,16 @@
       </p:pic>
       <p:pic>
         <p:nvPicPr>
-          <p:cNvPr id="94" name="Google Shape;94;p17"/>
+          <p:cNvPr id="99" name="Google Shape;99;p18"/>
           <p:cNvPicPr preferRelativeResize="0"/>
           <p:nvPr/>
         </p:nvPicPr>
-        <p:blipFill>
+        <p:blipFill rotWithShape="1">
           <a:blip r:embed="rId9">
             <a:alphaModFix/>
           </a:blip>
-          <a:stretch>
-            <a:fillRect/>
-          </a:stretch>
+          <a:srcRect b="0" l="0" r="0" t="0"/>
+          <a:stretch/>
         </p:blipFill>
         <p:spPr>
           <a:xfrm>
@@ -15058,17 +16580,16 @@
       </p:pic>
       <p:pic>
         <p:nvPicPr>
-          <p:cNvPr id="95" name="Google Shape;95;p17"/>
+          <p:cNvPr id="100" name="Google Shape;100;p18"/>
           <p:cNvPicPr preferRelativeResize="0"/>
           <p:nvPr/>
         </p:nvPicPr>
-        <p:blipFill>
+        <p:blipFill rotWithShape="1">
           <a:blip r:embed="rId10">
             <a:alphaModFix/>
           </a:blip>
-          <a:stretch>
-            <a:fillRect/>
-          </a:stretch>
+          <a:srcRect b="0" l="0" r="0" t="0"/>
+          <a:stretch/>
         </p:blipFill>
         <p:spPr>
           <a:xfrm>
@@ -15086,17 +16607,16 @@
       </p:pic>
       <p:pic>
         <p:nvPicPr>
-          <p:cNvPr id="96" name="Google Shape;96;p17"/>
+          <p:cNvPr id="101" name="Google Shape;101;p18"/>
           <p:cNvPicPr preferRelativeResize="0"/>
           <p:nvPr/>
         </p:nvPicPr>
-        <p:blipFill>
+        <p:blipFill rotWithShape="1">
           <a:blip r:embed="rId11">
             <a:alphaModFix/>
           </a:blip>
-          <a:stretch>
-            <a:fillRect/>
-          </a:stretch>
+          <a:srcRect b="0" l="0" r="0" t="0"/>
+          <a:stretch/>
         </p:blipFill>
         <p:spPr>
           <a:xfrm>
@@ -15114,17 +16634,16 @@
       </p:pic>
       <p:pic>
         <p:nvPicPr>
-          <p:cNvPr id="97" name="Google Shape;97;p17"/>
+          <p:cNvPr id="102" name="Google Shape;102;p18"/>
           <p:cNvPicPr preferRelativeResize="0"/>
           <p:nvPr/>
         </p:nvPicPr>
-        <p:blipFill>
+        <p:blipFill rotWithShape="1">
           <a:blip r:embed="rId12">
             <a:alphaModFix/>
           </a:blip>
-          <a:stretch>
-            <a:fillRect/>
-          </a:stretch>
+          <a:srcRect b="0" l="0" r="0" t="0"/>
+          <a:stretch/>
         </p:blipFill>
         <p:spPr>
           <a:xfrm rot="5400000">
@@ -15142,269 +16661,21 @@
       </p:pic>
       <p:pic>
         <p:nvPicPr>
-          <p:cNvPr id="98" name="Google Shape;98;p17"/>
-          <p:cNvPicPr preferRelativeResize="0"/>
-          <p:nvPr/>
-        </p:nvPicPr>
-        <p:blipFill>
-          <a:blip r:embed="rId13">
-            <a:alphaModFix/>
-          </a:blip>
-          <a:stretch>
-            <a:fillRect/>
-          </a:stretch>
-        </p:blipFill>
-        <p:spPr>
-          <a:xfrm rot="5400000">
-            <a:off x="-4235662" y="2053812"/>
-            <a:ext cx="5249949" cy="929425"/>
-          </a:xfrm>
-          <a:prstGeom prst="rect">
-            <a:avLst/>
-          </a:prstGeom>
-          <a:noFill/>
-          <a:ln>
-            <a:noFill/>
-          </a:ln>
-        </p:spPr>
-      </p:pic>
-    </p:spTree>
-  </p:cSld>
-  <p:clrMapOvr>
-    <a:masterClrMapping/>
-  </p:clrMapOvr>
-</p:sld>
-</file>
-
-<file path=ppt/slides/slide5.xml><?xml version="1.0" encoding="utf-8"?>
-<p:sld xmlns:a="http://schemas.openxmlformats.org/drawingml/2006/main" xmlns:r="http://schemas.openxmlformats.org/officeDocument/2006/relationships" xmlns:mc="http://schemas.openxmlformats.org/markup-compatibility/2006" xmlns:mv="urn:schemas-microsoft-com:mac:vml" xmlns:p="http://schemas.openxmlformats.org/presentationml/2006/main" xmlns:c="http://schemas.openxmlformats.org/drawingml/2006/chart" xmlns:dgm="http://schemas.openxmlformats.org/drawingml/2006/diagram" xmlns:o="urn:schemas-microsoft-com:office:office" xmlns:v="urn:schemas-microsoft-com:vml" xmlns:pvml="urn:schemas-microsoft-com:office:powerpoint" xmlns:com="http://schemas.openxmlformats.org/drawingml/2006/compatibility" xmlns:p14="http://schemas.microsoft.com/office/powerpoint/2010/main" xmlns:p15="http://schemas.microsoft.com/office/powerpoint/2012/main" xmlns:ahyp="http://schemas.microsoft.com/office/drawing/2018/hyperlinkcolor">
-  <p:cSld>
-    <p:spTree>
-      <p:nvGrpSpPr>
-        <p:cNvPr id="102" name="Shape 102"/>
-        <p:cNvGrpSpPr/>
-        <p:nvPr/>
-      </p:nvGrpSpPr>
-      <p:grpSpPr>
-        <a:xfrm>
-          <a:off x="0" y="0"/>
-          <a:ext cx="0" cy="0"/>
-          <a:chOff x="0" y="0"/>
-          <a:chExt cx="0" cy="0"/>
-        </a:xfrm>
-      </p:grpSpPr>
-      <p:pic>
-        <p:nvPicPr>
           <p:cNvPr id="103" name="Google Shape;103;p18"/>
           <p:cNvPicPr preferRelativeResize="0"/>
           <p:nvPr/>
         </p:nvPicPr>
-        <p:blipFill>
-          <a:blip r:embed="rId3">
+        <p:blipFill rotWithShape="1">
+          <a:blip r:embed="rId13">
             <a:alphaModFix/>
           </a:blip>
-          <a:stretch>
-            <a:fillRect/>
-          </a:stretch>
-        </p:blipFill>
-        <p:spPr>
-          <a:xfrm>
-            <a:off x="62175" y="90225"/>
-            <a:ext cx="5824425" cy="386025"/>
-          </a:xfrm>
-          <a:prstGeom prst="rect">
-            <a:avLst/>
-          </a:prstGeom>
-          <a:noFill/>
-          <a:ln>
-            <a:noFill/>
-          </a:ln>
-        </p:spPr>
-      </p:pic>
-      <p:pic>
-        <p:nvPicPr>
-          <p:cNvPr id="104" name="Google Shape;104;p18"/>
-          <p:cNvPicPr preferRelativeResize="0"/>
-          <p:nvPr/>
-        </p:nvPicPr>
-        <p:blipFill>
-          <a:blip r:embed="rId4">
-            <a:alphaModFix/>
-          </a:blip>
-          <a:stretch>
-            <a:fillRect/>
-          </a:stretch>
-        </p:blipFill>
-        <p:spPr>
-          <a:xfrm>
-            <a:off x="0" y="529400"/>
-            <a:ext cx="5647944" cy="323850"/>
-          </a:xfrm>
-          <a:prstGeom prst="rect">
-            <a:avLst/>
-          </a:prstGeom>
-          <a:noFill/>
-          <a:ln>
-            <a:noFill/>
-          </a:ln>
-        </p:spPr>
-      </p:pic>
-      <p:pic>
-        <p:nvPicPr>
-          <p:cNvPr id="105" name="Google Shape;105;p18"/>
-          <p:cNvPicPr preferRelativeResize="0"/>
-          <p:nvPr/>
-        </p:nvPicPr>
-        <p:blipFill>
-          <a:blip r:embed="rId5">
-            <a:alphaModFix/>
-          </a:blip>
-          <a:stretch>
-            <a:fillRect/>
-          </a:stretch>
-        </p:blipFill>
-        <p:spPr>
-          <a:xfrm>
-            <a:off x="152400" y="1005650"/>
-            <a:ext cx="5460999" cy="509184"/>
-          </a:xfrm>
-          <a:prstGeom prst="rect">
-            <a:avLst/>
-          </a:prstGeom>
-          <a:noFill/>
-          <a:ln>
-            <a:noFill/>
-          </a:ln>
-        </p:spPr>
-      </p:pic>
-      <p:pic>
-        <p:nvPicPr>
-          <p:cNvPr id="106" name="Google Shape;106;p18"/>
-          <p:cNvPicPr preferRelativeResize="0"/>
-          <p:nvPr/>
-        </p:nvPicPr>
-        <p:blipFill rotWithShape="1">
-          <a:blip r:embed="rId6">
-            <a:alphaModFix/>
-          </a:blip>
-          <a:srcRect b="0" l="0" r="0" t="15002"/>
+          <a:srcRect b="0" l="0" r="0" t="0"/>
           <a:stretch/>
         </p:blipFill>
         <p:spPr>
-          <a:xfrm>
-            <a:off x="93475" y="1539050"/>
-            <a:ext cx="5461000" cy="323850"/>
-          </a:xfrm>
-          <a:prstGeom prst="rect">
-            <a:avLst/>
-          </a:prstGeom>
-          <a:noFill/>
-          <a:ln>
-            <a:noFill/>
-          </a:ln>
-        </p:spPr>
-      </p:pic>
-      <p:pic>
-        <p:nvPicPr>
-          <p:cNvPr id="107" name="Google Shape;107;p18"/>
-          <p:cNvPicPr preferRelativeResize="0"/>
-          <p:nvPr/>
-        </p:nvPicPr>
-        <p:blipFill>
-          <a:blip r:embed="rId7">
-            <a:alphaModFix/>
-          </a:blip>
-          <a:stretch>
-            <a:fillRect/>
-          </a:stretch>
-        </p:blipFill>
-        <p:spPr>
-          <a:xfrm>
-            <a:off x="93475" y="1887125"/>
-            <a:ext cx="4162557" cy="509175"/>
-          </a:xfrm>
-          <a:prstGeom prst="rect">
-            <a:avLst/>
-          </a:prstGeom>
-          <a:noFill/>
-          <a:ln>
-            <a:noFill/>
-          </a:ln>
-        </p:spPr>
-      </p:pic>
-      <p:pic>
-        <p:nvPicPr>
-          <p:cNvPr id="108" name="Google Shape;108;p18"/>
-          <p:cNvPicPr preferRelativeResize="0"/>
-          <p:nvPr/>
-        </p:nvPicPr>
-        <p:blipFill>
-          <a:blip r:embed="rId8">
-            <a:alphaModFix/>
-          </a:blip>
-          <a:stretch>
-            <a:fillRect/>
-          </a:stretch>
-        </p:blipFill>
-        <p:spPr>
-          <a:xfrm>
-            <a:off x="56525" y="2420525"/>
-            <a:ext cx="4280850" cy="250475"/>
-          </a:xfrm>
-          <a:prstGeom prst="rect">
-            <a:avLst/>
-          </a:prstGeom>
-          <a:noFill/>
-          <a:ln>
-            <a:noFill/>
-          </a:ln>
-        </p:spPr>
-      </p:pic>
-      <p:pic>
-        <p:nvPicPr>
-          <p:cNvPr id="109" name="Google Shape;109;p18"/>
-          <p:cNvPicPr preferRelativeResize="0"/>
-          <p:nvPr/>
-        </p:nvPicPr>
-        <p:blipFill rotWithShape="1">
-          <a:blip r:embed="rId9">
-            <a:alphaModFix/>
-          </a:blip>
-          <a:srcRect b="0" l="0" r="0" t="8592"/>
-          <a:stretch/>
-        </p:blipFill>
-        <p:spPr>
-          <a:xfrm>
-            <a:off x="118975" y="2723043"/>
-            <a:ext cx="4111550" cy="296032"/>
-          </a:xfrm>
-          <a:prstGeom prst="rect">
-            <a:avLst/>
-          </a:prstGeom>
-          <a:noFill/>
-          <a:ln>
-            <a:noFill/>
-          </a:ln>
-        </p:spPr>
-      </p:pic>
-      <p:pic>
-        <p:nvPicPr>
-          <p:cNvPr id="110" name="Google Shape;110;p18"/>
-          <p:cNvPicPr preferRelativeResize="0"/>
-          <p:nvPr/>
-        </p:nvPicPr>
-        <p:blipFill>
-          <a:blip r:embed="rId10">
-            <a:alphaModFix/>
-          </a:blip>
-          <a:stretch>
-            <a:fillRect/>
-          </a:stretch>
-        </p:blipFill>
-        <p:spPr>
-          <a:xfrm>
-            <a:off x="118975" y="3071125"/>
-            <a:ext cx="2924175" cy="285750"/>
+          <a:xfrm rot="5400000">
+            <a:off x="-4235662" y="2053812"/>
+            <a:ext cx="5249949" cy="929425"/>
           </a:xfrm>
           <a:prstGeom prst="rect">
             <a:avLst/>
@@ -15428,7 +16699,301 @@
   <p:cSld>
     <p:spTree>
       <p:nvGrpSpPr>
-        <p:cNvPr id="114" name="Shape 114"/>
+        <p:cNvPr id="107" name="Shape 107"/>
+        <p:cNvGrpSpPr/>
+        <p:nvPr/>
+      </p:nvGrpSpPr>
+      <p:grpSpPr>
+        <a:xfrm>
+          <a:off x="0" y="0"/>
+          <a:ext cx="0" cy="0"/>
+          <a:chOff x="0" y="0"/>
+          <a:chExt cx="0" cy="0"/>
+        </a:xfrm>
+      </p:grpSpPr>
+      <p:pic>
+        <p:nvPicPr>
+          <p:cNvPr id="108" name="Google Shape;108;p19"/>
+          <p:cNvPicPr preferRelativeResize="0"/>
+          <p:nvPr/>
+        </p:nvPicPr>
+        <p:blipFill rotWithShape="1">
+          <a:blip r:embed="rId3">
+            <a:alphaModFix/>
+          </a:blip>
+          <a:srcRect b="0" l="0" r="0" t="0"/>
+          <a:stretch/>
+        </p:blipFill>
+        <p:spPr>
+          <a:xfrm>
+            <a:off x="62175" y="90225"/>
+            <a:ext cx="5824425" cy="386025"/>
+          </a:xfrm>
+          <a:prstGeom prst="rect">
+            <a:avLst/>
+          </a:prstGeom>
+          <a:noFill/>
+          <a:ln>
+            <a:noFill/>
+          </a:ln>
+        </p:spPr>
+      </p:pic>
+      <p:pic>
+        <p:nvPicPr>
+          <p:cNvPr id="109" name="Google Shape;109;p19"/>
+          <p:cNvPicPr preferRelativeResize="0"/>
+          <p:nvPr/>
+        </p:nvPicPr>
+        <p:blipFill rotWithShape="1">
+          <a:blip r:embed="rId4">
+            <a:alphaModFix/>
+          </a:blip>
+          <a:srcRect b="0" l="0" r="0" t="0"/>
+          <a:stretch/>
+        </p:blipFill>
+        <p:spPr>
+          <a:xfrm>
+            <a:off x="0" y="529400"/>
+            <a:ext cx="5647944" cy="323850"/>
+          </a:xfrm>
+          <a:prstGeom prst="rect">
+            <a:avLst/>
+          </a:prstGeom>
+          <a:noFill/>
+          <a:ln>
+            <a:noFill/>
+          </a:ln>
+        </p:spPr>
+      </p:pic>
+      <p:pic>
+        <p:nvPicPr>
+          <p:cNvPr id="110" name="Google Shape;110;p19"/>
+          <p:cNvPicPr preferRelativeResize="0"/>
+          <p:nvPr/>
+        </p:nvPicPr>
+        <p:blipFill rotWithShape="1">
+          <a:blip r:embed="rId5">
+            <a:alphaModFix/>
+          </a:blip>
+          <a:srcRect b="0" l="0" r="0" t="0"/>
+          <a:stretch/>
+        </p:blipFill>
+        <p:spPr>
+          <a:xfrm>
+            <a:off x="152400" y="1005650"/>
+            <a:ext cx="5460999" cy="509184"/>
+          </a:xfrm>
+          <a:prstGeom prst="rect">
+            <a:avLst/>
+          </a:prstGeom>
+          <a:noFill/>
+          <a:ln>
+            <a:noFill/>
+          </a:ln>
+        </p:spPr>
+      </p:pic>
+      <p:pic>
+        <p:nvPicPr>
+          <p:cNvPr id="111" name="Google Shape;111;p19"/>
+          <p:cNvPicPr preferRelativeResize="0"/>
+          <p:nvPr/>
+        </p:nvPicPr>
+        <p:blipFill rotWithShape="1">
+          <a:blip r:embed="rId6">
+            <a:alphaModFix/>
+          </a:blip>
+          <a:srcRect b="0" l="0" r="0" t="15002"/>
+          <a:stretch/>
+        </p:blipFill>
+        <p:spPr>
+          <a:xfrm>
+            <a:off x="93475" y="1539050"/>
+            <a:ext cx="5461000" cy="323850"/>
+          </a:xfrm>
+          <a:prstGeom prst="rect">
+            <a:avLst/>
+          </a:prstGeom>
+          <a:noFill/>
+          <a:ln>
+            <a:noFill/>
+          </a:ln>
+        </p:spPr>
+      </p:pic>
+      <p:pic>
+        <p:nvPicPr>
+          <p:cNvPr id="112" name="Google Shape;112;p19"/>
+          <p:cNvPicPr preferRelativeResize="0"/>
+          <p:nvPr/>
+        </p:nvPicPr>
+        <p:blipFill rotWithShape="1">
+          <a:blip r:embed="rId7">
+            <a:alphaModFix/>
+          </a:blip>
+          <a:srcRect b="0" l="0" r="0" t="0"/>
+          <a:stretch/>
+        </p:blipFill>
+        <p:spPr>
+          <a:xfrm>
+            <a:off x="93475" y="1887125"/>
+            <a:ext cx="4162557" cy="509175"/>
+          </a:xfrm>
+          <a:prstGeom prst="rect">
+            <a:avLst/>
+          </a:prstGeom>
+          <a:noFill/>
+          <a:ln>
+            <a:noFill/>
+          </a:ln>
+        </p:spPr>
+      </p:pic>
+      <p:pic>
+        <p:nvPicPr>
+          <p:cNvPr id="113" name="Google Shape;113;p19"/>
+          <p:cNvPicPr preferRelativeResize="0"/>
+          <p:nvPr/>
+        </p:nvPicPr>
+        <p:blipFill rotWithShape="1">
+          <a:blip r:embed="rId8">
+            <a:alphaModFix/>
+          </a:blip>
+          <a:srcRect b="0" l="0" r="0" t="0"/>
+          <a:stretch/>
+        </p:blipFill>
+        <p:spPr>
+          <a:xfrm>
+            <a:off x="56525" y="2420525"/>
+            <a:ext cx="4280850" cy="250475"/>
+          </a:xfrm>
+          <a:prstGeom prst="rect">
+            <a:avLst/>
+          </a:prstGeom>
+          <a:noFill/>
+          <a:ln>
+            <a:noFill/>
+          </a:ln>
+        </p:spPr>
+      </p:pic>
+      <p:pic>
+        <p:nvPicPr>
+          <p:cNvPr id="114" name="Google Shape;114;p19"/>
+          <p:cNvPicPr preferRelativeResize="0"/>
+          <p:nvPr/>
+        </p:nvPicPr>
+        <p:blipFill rotWithShape="1">
+          <a:blip r:embed="rId9">
+            <a:alphaModFix/>
+          </a:blip>
+          <a:srcRect b="0" l="0" r="0" t="8591"/>
+          <a:stretch/>
+        </p:blipFill>
+        <p:spPr>
+          <a:xfrm>
+            <a:off x="118975" y="2723043"/>
+            <a:ext cx="4111550" cy="296032"/>
+          </a:xfrm>
+          <a:prstGeom prst="rect">
+            <a:avLst/>
+          </a:prstGeom>
+          <a:noFill/>
+          <a:ln>
+            <a:noFill/>
+          </a:ln>
+        </p:spPr>
+      </p:pic>
+      <p:pic>
+        <p:nvPicPr>
+          <p:cNvPr id="115" name="Google Shape;115;p19"/>
+          <p:cNvPicPr preferRelativeResize="0"/>
+          <p:nvPr/>
+        </p:nvPicPr>
+        <p:blipFill rotWithShape="1">
+          <a:blip r:embed="rId10">
+            <a:alphaModFix/>
+          </a:blip>
+          <a:srcRect b="0" l="0" r="0" t="0"/>
+          <a:stretch/>
+        </p:blipFill>
+        <p:spPr>
+          <a:xfrm>
+            <a:off x="118975" y="3071125"/>
+            <a:ext cx="2924175" cy="285750"/>
+          </a:xfrm>
+          <a:prstGeom prst="rect">
+            <a:avLst/>
+          </a:prstGeom>
+          <a:noFill/>
+          <a:ln>
+            <a:noFill/>
+          </a:ln>
+        </p:spPr>
+      </p:pic>
+    </p:spTree>
+  </p:cSld>
+  <p:clrMapOvr>
+    <a:masterClrMapping/>
+  </p:clrMapOvr>
+</p:sld>
+</file>
+
+<file path=ppt/slides/slide7.xml><?xml version="1.0" encoding="utf-8"?>
+<p:sld xmlns:a="http://schemas.openxmlformats.org/drawingml/2006/main" xmlns:r="http://schemas.openxmlformats.org/officeDocument/2006/relationships" xmlns:mc="http://schemas.openxmlformats.org/markup-compatibility/2006" xmlns:mv="urn:schemas-microsoft-com:mac:vml" xmlns:p="http://schemas.openxmlformats.org/presentationml/2006/main" xmlns:c="http://schemas.openxmlformats.org/drawingml/2006/chart" xmlns:dgm="http://schemas.openxmlformats.org/drawingml/2006/diagram" xmlns:o="urn:schemas-microsoft-com:office:office" xmlns:v="urn:schemas-microsoft-com:vml" xmlns:pvml="urn:schemas-microsoft-com:office:powerpoint" xmlns:com="http://schemas.openxmlformats.org/drawingml/2006/compatibility" xmlns:p14="http://schemas.microsoft.com/office/powerpoint/2010/main" xmlns:p15="http://schemas.microsoft.com/office/powerpoint/2012/main" xmlns:ahyp="http://schemas.microsoft.com/office/drawing/2018/hyperlinkcolor">
+  <p:cSld>
+    <p:spTree>
+      <p:nvGrpSpPr>
+        <p:cNvPr id="119" name="Shape 119"/>
+        <p:cNvGrpSpPr/>
+        <p:nvPr/>
+      </p:nvGrpSpPr>
+      <p:grpSpPr>
+        <a:xfrm>
+          <a:off x="0" y="0"/>
+          <a:ext cx="0" cy="0"/>
+          <a:chOff x="0" y="0"/>
+          <a:chExt cx="0" cy="0"/>
+        </a:xfrm>
+      </p:grpSpPr>
+      <p:pic>
+        <p:nvPicPr>
+          <p:cNvPr id="120" name="Google Shape;120;p20"/>
+          <p:cNvPicPr preferRelativeResize="0"/>
+          <p:nvPr/>
+        </p:nvPicPr>
+        <p:blipFill>
+          <a:blip r:embed="rId3">
+            <a:alphaModFix/>
+          </a:blip>
+          <a:stretch>
+            <a:fillRect/>
+          </a:stretch>
+        </p:blipFill>
+        <p:spPr>
+          <a:xfrm>
+            <a:off x="2058434" y="0"/>
+            <a:ext cx="5027130" cy="5143499"/>
+          </a:xfrm>
+          <a:prstGeom prst="rect">
+            <a:avLst/>
+          </a:prstGeom>
+          <a:noFill/>
+          <a:ln>
+            <a:noFill/>
+          </a:ln>
+        </p:spPr>
+      </p:pic>
+    </p:spTree>
+  </p:cSld>
+  <p:clrMapOvr>
+    <a:masterClrMapping/>
+  </p:clrMapOvr>
+</p:sld>
+</file>
+
+<file path=ppt/slides/slide8.xml><?xml version="1.0" encoding="utf-8"?>
+<p:sld xmlns:a="http://schemas.openxmlformats.org/drawingml/2006/main" xmlns:r="http://schemas.openxmlformats.org/officeDocument/2006/relationships" xmlns:mc="http://schemas.openxmlformats.org/markup-compatibility/2006" xmlns:mv="urn:schemas-microsoft-com:mac:vml" xmlns:p="http://schemas.openxmlformats.org/presentationml/2006/main" xmlns:c="http://schemas.openxmlformats.org/drawingml/2006/chart" xmlns:dgm="http://schemas.openxmlformats.org/drawingml/2006/diagram" xmlns:o="urn:schemas-microsoft-com:office:office" xmlns:v="urn:schemas-microsoft-com:vml" xmlns:pvml="urn:schemas-microsoft-com:office:powerpoint" xmlns:com="http://schemas.openxmlformats.org/drawingml/2006/compatibility" xmlns:p14="http://schemas.microsoft.com/office/powerpoint/2010/main" xmlns:p15="http://schemas.microsoft.com/office/powerpoint/2012/main" xmlns:ahyp="http://schemas.microsoft.com/office/drawing/2018/hyperlinkcolor">
+  <p:cSld>
+    <p:spTree>
+      <p:nvGrpSpPr>
+        <p:cNvPr id="124" name="Shape 124"/>
         <p:cNvGrpSpPr/>
         <p:nvPr/>
       </p:nvGrpSpPr>
@@ -15442,7 +17007,7 @@
       </p:grpSpPr>
       <p:sp>
         <p:nvSpPr>
-          <p:cNvPr id="115" name="Google Shape;115;p19"/>
+          <p:cNvPr id="125" name="Google Shape;125;p21"/>
           <p:cNvSpPr txBox="1"/>
           <p:nvPr>
             <p:ph type="title"/>
@@ -15490,7 +17055,7 @@
       </p:sp>
       <p:sp>
         <p:nvSpPr>
-          <p:cNvPr id="116" name="Google Shape;116;p19"/>
+          <p:cNvPr id="126" name="Google Shape;126;p21"/>
           <p:cNvSpPr txBox="1"/>
           <p:nvPr/>
         </p:nvSpPr>
@@ -15556,7 +17121,7 @@
       </p:sp>
       <p:sp>
         <p:nvSpPr>
-          <p:cNvPr id="117" name="Google Shape;117;p19"/>
+          <p:cNvPr id="127" name="Google Shape;127;p21"/>
           <p:cNvSpPr txBox="1"/>
           <p:nvPr/>
         </p:nvSpPr>
@@ -15819,12 +17384,12 @@
 </p:sld>
 </file>
 
-<file path=ppt/slides/slide7.xml><?xml version="1.0" encoding="utf-8"?>
+<file path=ppt/slides/slide9.xml><?xml version="1.0" encoding="utf-8"?>
 <p:sld xmlns:a="http://schemas.openxmlformats.org/drawingml/2006/main" xmlns:r="http://schemas.openxmlformats.org/officeDocument/2006/relationships" xmlns:mc="http://schemas.openxmlformats.org/markup-compatibility/2006" xmlns:mv="urn:schemas-microsoft-com:mac:vml" xmlns:p="http://schemas.openxmlformats.org/presentationml/2006/main" xmlns:c="http://schemas.openxmlformats.org/drawingml/2006/chart" xmlns:dgm="http://schemas.openxmlformats.org/drawingml/2006/diagram" xmlns:o="urn:schemas-microsoft-com:office:office" xmlns:v="urn:schemas-microsoft-com:vml" xmlns:pvml="urn:schemas-microsoft-com:office:powerpoint" xmlns:com="http://schemas.openxmlformats.org/drawingml/2006/compatibility" xmlns:p14="http://schemas.microsoft.com/office/powerpoint/2010/main" xmlns:p15="http://schemas.microsoft.com/office/powerpoint/2012/main" xmlns:ahyp="http://schemas.microsoft.com/office/drawing/2018/hyperlinkcolor">
   <p:cSld>
     <p:spTree>
       <p:nvGrpSpPr>
-        <p:cNvPr id="121" name="Shape 121"/>
+        <p:cNvPr id="131" name="Shape 131"/>
         <p:cNvGrpSpPr/>
         <p:nvPr/>
       </p:nvGrpSpPr>
@@ -15838,7 +17403,7 @@
       </p:grpSpPr>
       <p:sp>
         <p:nvSpPr>
-          <p:cNvPr id="122" name="Google Shape;122;p20"/>
+          <p:cNvPr id="132" name="Google Shape;132;p22"/>
           <p:cNvSpPr txBox="1"/>
           <p:nvPr>
             <p:ph type="title"/>
@@ -15886,7 +17451,7 @@
       </p:sp>
       <p:pic>
         <p:nvPicPr>
-          <p:cNvPr id="123" name="Google Shape;123;p20"/>
+          <p:cNvPr id="133" name="Google Shape;133;p22"/>
           <p:cNvPicPr preferRelativeResize="0"/>
           <p:nvPr/>
         </p:nvPicPr>
@@ -15901,751 +17466,6 @@
           <a:xfrm>
             <a:off x="2568500" y="1579150"/>
             <a:ext cx="2863875" cy="2773750"/>
-          </a:xfrm>
-          <a:prstGeom prst="rect">
-            <a:avLst/>
-          </a:prstGeom>
-          <a:noFill/>
-          <a:ln>
-            <a:noFill/>
-          </a:ln>
-        </p:spPr>
-      </p:pic>
-    </p:spTree>
-  </p:cSld>
-  <p:clrMapOvr>
-    <a:masterClrMapping/>
-  </p:clrMapOvr>
-</p:sld>
-</file>
-
-<file path=ppt/slides/slide8.xml><?xml version="1.0" encoding="utf-8"?>
-<p:sld xmlns:a="http://schemas.openxmlformats.org/drawingml/2006/main" xmlns:r="http://schemas.openxmlformats.org/officeDocument/2006/relationships" xmlns:mc="http://schemas.openxmlformats.org/markup-compatibility/2006" xmlns:mv="urn:schemas-microsoft-com:mac:vml" xmlns:p="http://schemas.openxmlformats.org/presentationml/2006/main" xmlns:c="http://schemas.openxmlformats.org/drawingml/2006/chart" xmlns:dgm="http://schemas.openxmlformats.org/drawingml/2006/diagram" xmlns:o="urn:schemas-microsoft-com:office:office" xmlns:v="urn:schemas-microsoft-com:vml" xmlns:pvml="urn:schemas-microsoft-com:office:powerpoint" xmlns:com="http://schemas.openxmlformats.org/drawingml/2006/compatibility" xmlns:p14="http://schemas.microsoft.com/office/powerpoint/2010/main" xmlns:p15="http://schemas.microsoft.com/office/powerpoint/2012/main" xmlns:ahyp="http://schemas.microsoft.com/office/drawing/2018/hyperlinkcolor">
-  <p:cSld>
-    <p:spTree>
-      <p:nvGrpSpPr>
-        <p:cNvPr id="127" name="Shape 127"/>
-        <p:cNvGrpSpPr/>
-        <p:nvPr/>
-      </p:nvGrpSpPr>
-      <p:grpSpPr>
-        <a:xfrm>
-          <a:off x="0" y="0"/>
-          <a:ext cx="0" cy="0"/>
-          <a:chOff x="0" y="0"/>
-          <a:chExt cx="0" cy="0"/>
-        </a:xfrm>
-      </p:grpSpPr>
-      <p:sp>
-        <p:nvSpPr>
-          <p:cNvPr id="128" name="Google Shape;128;p21"/>
-          <p:cNvSpPr txBox="1"/>
-          <p:nvPr>
-            <p:ph type="title"/>
-          </p:nvPr>
-        </p:nvSpPr>
-        <p:spPr>
-          <a:xfrm>
-            <a:off x="0" y="0"/>
-            <a:ext cx="8520600" cy="572700"/>
-          </a:xfrm>
-          <a:prstGeom prst="rect">
-            <a:avLst/>
-          </a:prstGeom>
-          <a:noFill/>
-          <a:ln>
-            <a:noFill/>
-          </a:ln>
-        </p:spPr>
-        <p:txBody>
-          <a:bodyPr anchorCtr="0" anchor="t" bIns="91425" lIns="91425" spcFirstLastPara="1" rIns="91425" wrap="square" tIns="91425">
-            <a:normAutofit fontScale="90000"/>
-          </a:bodyPr>
-          <a:lstStyle/>
-          <a:p>
-            <a:pPr indent="-388620" lvl="0" marL="457200" rtl="0" algn="l">
-              <a:lnSpc>
-                <a:spcPct val="100000"/>
-              </a:lnSpc>
-              <a:spcBef>
-                <a:spcPts val="0"/>
-              </a:spcBef>
-              <a:spcAft>
-                <a:spcPts val="0"/>
-              </a:spcAft>
-              <a:buSzPct val="100000"/>
-              <a:buAutoNum type="alphaLcPeriod"/>
-            </a:pPr>
-            <a:r>
-              <a:rPr lang="en-GB"/>
-              <a:t>Missing values imputation</a:t>
-            </a:r>
-            <a:endParaRPr/>
-          </a:p>
-        </p:txBody>
-      </p:sp>
-      <p:sp>
-        <p:nvSpPr>
-          <p:cNvPr id="129" name="Google Shape;129;p21"/>
-          <p:cNvSpPr txBox="1"/>
-          <p:nvPr>
-            <p:ph idx="1" type="body"/>
-          </p:nvPr>
-        </p:nvSpPr>
-        <p:spPr>
-          <a:xfrm>
-            <a:off x="59025" y="511800"/>
-            <a:ext cx="8520600" cy="3416400"/>
-          </a:xfrm>
-          <a:prstGeom prst="rect">
-            <a:avLst/>
-          </a:prstGeom>
-          <a:noFill/>
-          <a:ln>
-            <a:noFill/>
-          </a:ln>
-        </p:spPr>
-        <p:txBody>
-          <a:bodyPr anchorCtr="0" anchor="t" bIns="91425" lIns="91425" spcFirstLastPara="1" rIns="91425" wrap="square" tIns="91425">
-            <a:normAutofit/>
-          </a:bodyPr>
-          <a:lstStyle/>
-          <a:p>
-            <a:pPr indent="-342900" lvl="0" marL="457200" rtl="0" algn="l">
-              <a:lnSpc>
-                <a:spcPct val="100000"/>
-              </a:lnSpc>
-              <a:spcBef>
-                <a:spcPts val="0"/>
-              </a:spcBef>
-              <a:spcAft>
-                <a:spcPts val="0"/>
-              </a:spcAft>
-              <a:buClr>
-                <a:schemeClr val="dk1"/>
-              </a:buClr>
-              <a:buSzPts val="1800"/>
-              <a:buAutoNum type="arabicPeriod"/>
-            </a:pPr>
-            <a:r>
-              <a:rPr lang="en-GB">
-                <a:solidFill>
-                  <a:schemeClr val="dk1"/>
-                </a:solidFill>
-              </a:rPr>
-              <a:t>Simple Imputer</a:t>
-            </a:r>
-            <a:endParaRPr>
-              <a:solidFill>
-                <a:schemeClr val="dk1"/>
-              </a:solidFill>
-            </a:endParaRPr>
-          </a:p>
-          <a:p>
-            <a:pPr indent="-342900" lvl="0" marL="457200" rtl="0" algn="l">
-              <a:lnSpc>
-                <a:spcPct val="100000"/>
-              </a:lnSpc>
-              <a:spcBef>
-                <a:spcPts val="0"/>
-              </a:spcBef>
-              <a:spcAft>
-                <a:spcPts val="0"/>
-              </a:spcAft>
-              <a:buClr>
-                <a:schemeClr val="dk1"/>
-              </a:buClr>
-              <a:buSzPts val="1800"/>
-              <a:buChar char="●"/>
-            </a:pPr>
-            <a:r>
-              <a:rPr lang="en-GB">
-                <a:solidFill>
-                  <a:schemeClr val="dk1"/>
-                </a:solidFill>
-              </a:rPr>
-              <a:t>Categorical (Most repeated)</a:t>
-            </a:r>
-            <a:endParaRPr>
-              <a:solidFill>
-                <a:schemeClr val="dk1"/>
-              </a:solidFill>
-            </a:endParaRPr>
-          </a:p>
-          <a:p>
-            <a:pPr indent="-342900" lvl="0" marL="457200" rtl="0" algn="l">
-              <a:lnSpc>
-                <a:spcPct val="100000"/>
-              </a:lnSpc>
-              <a:spcBef>
-                <a:spcPts val="0"/>
-              </a:spcBef>
-              <a:spcAft>
-                <a:spcPts val="0"/>
-              </a:spcAft>
-              <a:buClr>
-                <a:schemeClr val="dk1"/>
-              </a:buClr>
-              <a:buSzPts val="1800"/>
-              <a:buChar char="●"/>
-            </a:pPr>
-            <a:r>
-              <a:rPr lang="en-GB">
-                <a:solidFill>
-                  <a:schemeClr val="dk1"/>
-                </a:solidFill>
-              </a:rPr>
-              <a:t>Numerical (mean, mode, median)</a:t>
-            </a:r>
-            <a:endParaRPr>
-              <a:solidFill>
-                <a:schemeClr val="dk1"/>
-              </a:solidFill>
-            </a:endParaRPr>
-          </a:p>
-          <a:p>
-            <a:pPr indent="0" lvl="0" marL="0" rtl="0" algn="l">
-              <a:lnSpc>
-                <a:spcPct val="100000"/>
-              </a:lnSpc>
-              <a:spcBef>
-                <a:spcPts val="0"/>
-              </a:spcBef>
-              <a:spcAft>
-                <a:spcPts val="0"/>
-              </a:spcAft>
-              <a:buSzPts val="1800"/>
-              <a:buNone/>
-            </a:pPr>
-            <a:r>
-              <a:t/>
-            </a:r>
-            <a:endParaRPr>
-              <a:solidFill>
-                <a:schemeClr val="dk1"/>
-              </a:solidFill>
-            </a:endParaRPr>
-          </a:p>
-          <a:p>
-            <a:pPr indent="-342900" lvl="0" marL="457200" rtl="0" algn="l">
-              <a:lnSpc>
-                <a:spcPct val="100000"/>
-              </a:lnSpc>
-              <a:spcBef>
-                <a:spcPts val="0"/>
-              </a:spcBef>
-              <a:spcAft>
-                <a:spcPts val="0"/>
-              </a:spcAft>
-              <a:buClr>
-                <a:schemeClr val="dk1"/>
-              </a:buClr>
-              <a:buSzPts val="1800"/>
-              <a:buAutoNum type="arabicPeriod"/>
-            </a:pPr>
-            <a:r>
-              <a:rPr lang="en-GB">
-                <a:solidFill>
-                  <a:schemeClr val="dk1"/>
-                </a:solidFill>
-              </a:rPr>
-              <a:t>Missing Indicator</a:t>
-            </a:r>
-            <a:endParaRPr>
-              <a:solidFill>
-                <a:schemeClr val="dk1"/>
-              </a:solidFill>
-            </a:endParaRPr>
-          </a:p>
-          <a:p>
-            <a:pPr indent="0" lvl="0" marL="457200" rtl="0" algn="l">
-              <a:lnSpc>
-                <a:spcPct val="100000"/>
-              </a:lnSpc>
-              <a:spcBef>
-                <a:spcPts val="0"/>
-              </a:spcBef>
-              <a:spcAft>
-                <a:spcPts val="0"/>
-              </a:spcAft>
-              <a:buSzPts val="1800"/>
-              <a:buNone/>
-            </a:pPr>
-            <a:r>
-              <a:t/>
-            </a:r>
-            <a:endParaRPr>
-              <a:solidFill>
-                <a:schemeClr val="dk1"/>
-              </a:solidFill>
-            </a:endParaRPr>
-          </a:p>
-          <a:p>
-            <a:pPr indent="-342900" lvl="0" marL="457200" rtl="0" algn="l">
-              <a:lnSpc>
-                <a:spcPct val="100000"/>
-              </a:lnSpc>
-              <a:spcBef>
-                <a:spcPts val="0"/>
-              </a:spcBef>
-              <a:spcAft>
-                <a:spcPts val="0"/>
-              </a:spcAft>
-              <a:buClr>
-                <a:schemeClr val="dk1"/>
-              </a:buClr>
-              <a:buSzPts val="1800"/>
-              <a:buAutoNum type="arabicPeriod"/>
-            </a:pPr>
-            <a:r>
-              <a:rPr lang="en-GB">
-                <a:solidFill>
-                  <a:schemeClr val="dk1"/>
-                </a:solidFill>
-              </a:rPr>
-              <a:t>Random Sample Imputation</a:t>
-            </a:r>
-            <a:endParaRPr>
-              <a:solidFill>
-                <a:schemeClr val="dk1"/>
-              </a:solidFill>
-            </a:endParaRPr>
-          </a:p>
-          <a:p>
-            <a:pPr indent="0" lvl="0" marL="0" rtl="0" algn="l">
-              <a:lnSpc>
-                <a:spcPct val="100000"/>
-              </a:lnSpc>
-              <a:spcBef>
-                <a:spcPts val="0"/>
-              </a:spcBef>
-              <a:spcAft>
-                <a:spcPts val="0"/>
-              </a:spcAft>
-              <a:buSzPts val="1800"/>
-              <a:buNone/>
-            </a:pPr>
-            <a:r>
-              <a:t/>
-            </a:r>
-            <a:endParaRPr>
-              <a:solidFill>
-                <a:schemeClr val="dk1"/>
-              </a:solidFill>
-            </a:endParaRPr>
-          </a:p>
-          <a:p>
-            <a:pPr indent="-342900" lvl="0" marL="457200" rtl="0" algn="l">
-              <a:lnSpc>
-                <a:spcPct val="100000"/>
-              </a:lnSpc>
-              <a:spcBef>
-                <a:spcPts val="0"/>
-              </a:spcBef>
-              <a:spcAft>
-                <a:spcPts val="0"/>
-              </a:spcAft>
-              <a:buClr>
-                <a:schemeClr val="dk1"/>
-              </a:buClr>
-              <a:buSzPts val="1800"/>
-              <a:buAutoNum type="arabicPeriod"/>
-            </a:pPr>
-            <a:r>
-              <a:rPr lang="en-GB">
-                <a:solidFill>
-                  <a:schemeClr val="dk1"/>
-                </a:solidFill>
-              </a:rPr>
-              <a:t>Multivariate Imputer</a:t>
-            </a:r>
-            <a:endParaRPr>
-              <a:solidFill>
-                <a:schemeClr val="dk1"/>
-              </a:solidFill>
-            </a:endParaRPr>
-          </a:p>
-          <a:p>
-            <a:pPr indent="-342900" lvl="0" marL="457200" rtl="0" algn="l">
-              <a:lnSpc>
-                <a:spcPct val="100000"/>
-              </a:lnSpc>
-              <a:spcBef>
-                <a:spcPts val="0"/>
-              </a:spcBef>
-              <a:spcAft>
-                <a:spcPts val="0"/>
-              </a:spcAft>
-              <a:buClr>
-                <a:schemeClr val="dk1"/>
-              </a:buClr>
-              <a:buSzPts val="1800"/>
-              <a:buChar char="●"/>
-            </a:pPr>
-            <a:r>
-              <a:rPr lang="en-GB">
-                <a:solidFill>
-                  <a:schemeClr val="dk1"/>
-                </a:solidFill>
-              </a:rPr>
-              <a:t>kNN</a:t>
-            </a:r>
-            <a:endParaRPr>
-              <a:solidFill>
-                <a:schemeClr val="dk1"/>
-              </a:solidFill>
-            </a:endParaRPr>
-          </a:p>
-          <a:p>
-            <a:pPr indent="-342900" lvl="0" marL="457200" rtl="0" algn="l">
-              <a:lnSpc>
-                <a:spcPct val="100000"/>
-              </a:lnSpc>
-              <a:spcBef>
-                <a:spcPts val="0"/>
-              </a:spcBef>
-              <a:spcAft>
-                <a:spcPts val="0"/>
-              </a:spcAft>
-              <a:buClr>
-                <a:schemeClr val="dk1"/>
-              </a:buClr>
-              <a:buSzPts val="1800"/>
-              <a:buChar char="●"/>
-            </a:pPr>
-            <a:r>
-              <a:rPr lang="en-GB">
-                <a:solidFill>
-                  <a:schemeClr val="dk1"/>
-                </a:solidFill>
-              </a:rPr>
-              <a:t>Chained Equations/Iterative Imputer</a:t>
-            </a:r>
-            <a:endParaRPr>
-              <a:solidFill>
-                <a:schemeClr val="dk1"/>
-              </a:solidFill>
-            </a:endParaRPr>
-          </a:p>
-        </p:txBody>
-      </p:sp>
-      <p:pic>
-        <p:nvPicPr>
-          <p:cNvPr id="130" name="Google Shape;130;p21"/>
-          <p:cNvPicPr preferRelativeResize="0"/>
-          <p:nvPr/>
-        </p:nvPicPr>
-        <p:blipFill rotWithShape="1">
-          <a:blip r:embed="rId3">
-            <a:alphaModFix/>
-          </a:blip>
-          <a:srcRect b="0" l="0" r="0" t="0"/>
-          <a:stretch/>
-        </p:blipFill>
-        <p:spPr>
-          <a:xfrm>
-            <a:off x="4701350" y="96700"/>
-            <a:ext cx="4395525" cy="1517875"/>
-          </a:xfrm>
-          <a:prstGeom prst="rect">
-            <a:avLst/>
-          </a:prstGeom>
-          <a:noFill/>
-          <a:ln>
-            <a:noFill/>
-          </a:ln>
-        </p:spPr>
-      </p:pic>
-      <p:pic>
-        <p:nvPicPr>
-          <p:cNvPr id="131" name="Google Shape;131;p21"/>
-          <p:cNvPicPr preferRelativeResize="0"/>
-          <p:nvPr/>
-        </p:nvPicPr>
-        <p:blipFill rotWithShape="1">
-          <a:blip r:embed="rId4">
-            <a:alphaModFix/>
-          </a:blip>
-          <a:srcRect b="0" l="0" r="0" t="0"/>
-          <a:stretch/>
-        </p:blipFill>
-        <p:spPr>
-          <a:xfrm>
-            <a:off x="4809625" y="1739313"/>
-            <a:ext cx="3212025" cy="1664875"/>
-          </a:xfrm>
-          <a:prstGeom prst="rect">
-            <a:avLst/>
-          </a:prstGeom>
-          <a:noFill/>
-          <a:ln>
-            <a:noFill/>
-          </a:ln>
-        </p:spPr>
-      </p:pic>
-      <p:pic>
-        <p:nvPicPr>
-          <p:cNvPr id="132" name="Google Shape;132;p21"/>
-          <p:cNvPicPr preferRelativeResize="0"/>
-          <p:nvPr/>
-        </p:nvPicPr>
-        <p:blipFill rotWithShape="1">
-          <a:blip r:embed="rId5">
-            <a:alphaModFix/>
-          </a:blip>
-          <a:srcRect b="0" l="0" r="0" t="0"/>
-          <a:stretch/>
-        </p:blipFill>
-        <p:spPr>
-          <a:xfrm>
-            <a:off x="59025" y="3693023"/>
-            <a:ext cx="4482275" cy="1377300"/>
-          </a:xfrm>
-          <a:prstGeom prst="rect">
-            <a:avLst/>
-          </a:prstGeom>
-          <a:noFill/>
-          <a:ln>
-            <a:noFill/>
-          </a:ln>
-        </p:spPr>
-      </p:pic>
-      <p:pic>
-        <p:nvPicPr>
-          <p:cNvPr id="133" name="Google Shape;133;p21"/>
-          <p:cNvPicPr preferRelativeResize="0"/>
-          <p:nvPr/>
-        </p:nvPicPr>
-        <p:blipFill rotWithShape="1">
-          <a:blip r:embed="rId6">
-            <a:alphaModFix/>
-          </a:blip>
-          <a:srcRect b="0" l="0" r="0" t="0"/>
-          <a:stretch/>
-        </p:blipFill>
-        <p:spPr>
-          <a:xfrm>
-            <a:off x="4572000" y="3693025"/>
-            <a:ext cx="4482276" cy="1315125"/>
-          </a:xfrm>
-          <a:prstGeom prst="rect">
-            <a:avLst/>
-          </a:prstGeom>
-          <a:noFill/>
-          <a:ln>
-            <a:noFill/>
-          </a:ln>
-        </p:spPr>
-      </p:pic>
-    </p:spTree>
-  </p:cSld>
-  <p:clrMapOvr>
-    <a:masterClrMapping/>
-  </p:clrMapOvr>
-</p:sld>
-</file>
-
-<file path=ppt/slides/slide9.xml><?xml version="1.0" encoding="utf-8"?>
-<p:sld xmlns:a="http://schemas.openxmlformats.org/drawingml/2006/main" xmlns:r="http://schemas.openxmlformats.org/officeDocument/2006/relationships" xmlns:mc="http://schemas.openxmlformats.org/markup-compatibility/2006" xmlns:mv="urn:schemas-microsoft-com:mac:vml" xmlns:p="http://schemas.openxmlformats.org/presentationml/2006/main" xmlns:c="http://schemas.openxmlformats.org/drawingml/2006/chart" xmlns:dgm="http://schemas.openxmlformats.org/drawingml/2006/diagram" xmlns:o="urn:schemas-microsoft-com:office:office" xmlns:v="urn:schemas-microsoft-com:vml" xmlns:pvml="urn:schemas-microsoft-com:office:powerpoint" xmlns:com="http://schemas.openxmlformats.org/drawingml/2006/compatibility" xmlns:p14="http://schemas.microsoft.com/office/powerpoint/2010/main" xmlns:p15="http://schemas.microsoft.com/office/powerpoint/2012/main" xmlns:ahyp="http://schemas.microsoft.com/office/drawing/2018/hyperlinkcolor">
-  <p:cSld>
-    <p:spTree>
-      <p:nvGrpSpPr>
-        <p:cNvPr id="137" name="Shape 137"/>
-        <p:cNvGrpSpPr/>
-        <p:nvPr/>
-      </p:nvGrpSpPr>
-      <p:grpSpPr>
-        <a:xfrm>
-          <a:off x="0" y="0"/>
-          <a:ext cx="0" cy="0"/>
-          <a:chOff x="0" y="0"/>
-          <a:chExt cx="0" cy="0"/>
-        </a:xfrm>
-      </p:grpSpPr>
-      <p:pic>
-        <p:nvPicPr>
-          <p:cNvPr id="138" name="Google Shape;138;p22"/>
-          <p:cNvPicPr preferRelativeResize="0"/>
-          <p:nvPr/>
-        </p:nvPicPr>
-        <p:blipFill rotWithShape="1">
-          <a:blip r:embed="rId3">
-            <a:alphaModFix/>
-          </a:blip>
-          <a:srcRect b="0" l="14507" r="0" t="25628"/>
-          <a:stretch/>
-        </p:blipFill>
-        <p:spPr>
-          <a:xfrm>
-            <a:off x="93725" y="189500"/>
-            <a:ext cx="2717675" cy="360925"/>
-          </a:xfrm>
-          <a:prstGeom prst="rect">
-            <a:avLst/>
-          </a:prstGeom>
-          <a:noFill/>
-          <a:ln>
-            <a:noFill/>
-          </a:ln>
-        </p:spPr>
-      </p:pic>
-      <p:pic>
-        <p:nvPicPr>
-          <p:cNvPr id="139" name="Google Shape;139;p22"/>
-          <p:cNvPicPr preferRelativeResize="0"/>
-          <p:nvPr/>
-        </p:nvPicPr>
-        <p:blipFill>
-          <a:blip r:embed="rId4">
-            <a:alphaModFix/>
-          </a:blip>
-          <a:stretch>
-            <a:fillRect/>
-          </a:stretch>
-        </p:blipFill>
-        <p:spPr>
-          <a:xfrm>
-            <a:off x="93725" y="675750"/>
-            <a:ext cx="2600325" cy="495300"/>
-          </a:xfrm>
-          <a:prstGeom prst="rect">
-            <a:avLst/>
-          </a:prstGeom>
-          <a:noFill/>
-          <a:ln>
-            <a:noFill/>
-          </a:ln>
-        </p:spPr>
-      </p:pic>
-      <p:pic>
-        <p:nvPicPr>
-          <p:cNvPr id="140" name="Google Shape;140;p22"/>
-          <p:cNvPicPr preferRelativeResize="0"/>
-          <p:nvPr/>
-        </p:nvPicPr>
-        <p:blipFill>
-          <a:blip r:embed="rId5">
-            <a:alphaModFix/>
-          </a:blip>
-          <a:stretch>
-            <a:fillRect/>
-          </a:stretch>
-        </p:blipFill>
-        <p:spPr>
-          <a:xfrm>
-            <a:off x="93725" y="1251275"/>
-            <a:ext cx="4501000" cy="598600"/>
-          </a:xfrm>
-          <a:prstGeom prst="rect">
-            <a:avLst/>
-          </a:prstGeom>
-          <a:noFill/>
-          <a:ln>
-            <a:noFill/>
-          </a:ln>
-        </p:spPr>
-      </p:pic>
-      <p:pic>
-        <p:nvPicPr>
-          <p:cNvPr id="141" name="Google Shape;141;p22"/>
-          <p:cNvPicPr preferRelativeResize="0"/>
-          <p:nvPr/>
-        </p:nvPicPr>
-        <p:blipFill rotWithShape="1">
-          <a:blip r:embed="rId6">
-            <a:alphaModFix/>
-          </a:blip>
-          <a:srcRect b="0" l="0" r="0" t="17627"/>
-          <a:stretch/>
-        </p:blipFill>
-        <p:spPr>
-          <a:xfrm>
-            <a:off x="93725" y="1930100"/>
-            <a:ext cx="6509471" cy="495300"/>
-          </a:xfrm>
-          <a:prstGeom prst="rect">
-            <a:avLst/>
-          </a:prstGeom>
-          <a:noFill/>
-          <a:ln>
-            <a:noFill/>
-          </a:ln>
-        </p:spPr>
-      </p:pic>
-      <p:pic>
-        <p:nvPicPr>
-          <p:cNvPr id="142" name="Google Shape;142;p22"/>
-          <p:cNvPicPr preferRelativeResize="0"/>
-          <p:nvPr/>
-        </p:nvPicPr>
-        <p:blipFill>
-          <a:blip r:embed="rId7">
-            <a:alphaModFix/>
-          </a:blip>
-          <a:stretch>
-            <a:fillRect/>
-          </a:stretch>
-        </p:blipFill>
-        <p:spPr>
-          <a:xfrm>
-            <a:off x="152400" y="2577800"/>
-            <a:ext cx="4767263" cy="495300"/>
-          </a:xfrm>
-          <a:prstGeom prst="rect">
-            <a:avLst/>
-          </a:prstGeom>
-          <a:noFill/>
-          <a:ln>
-            <a:noFill/>
-          </a:ln>
-        </p:spPr>
-      </p:pic>
-      <p:pic>
-        <p:nvPicPr>
-          <p:cNvPr id="143" name="Google Shape;143;p22"/>
-          <p:cNvPicPr preferRelativeResize="0"/>
-          <p:nvPr/>
-        </p:nvPicPr>
-        <p:blipFill>
-          <a:blip r:embed="rId8">
-            <a:alphaModFix/>
-          </a:blip>
-          <a:stretch>
-            <a:fillRect/>
-          </a:stretch>
-        </p:blipFill>
-        <p:spPr>
-          <a:xfrm>
-            <a:off x="152400" y="3225500"/>
-            <a:ext cx="5884636" cy="495300"/>
-          </a:xfrm>
-          <a:prstGeom prst="rect">
-            <a:avLst/>
-          </a:prstGeom>
-          <a:noFill/>
-          <a:ln>
-            <a:noFill/>
-          </a:ln>
-        </p:spPr>
-      </p:pic>
-      <p:pic>
-        <p:nvPicPr>
-          <p:cNvPr id="144" name="Google Shape;144;p22"/>
-          <p:cNvPicPr preferRelativeResize="0"/>
-          <p:nvPr/>
-        </p:nvPicPr>
-        <p:blipFill>
-          <a:blip r:embed="rId9">
-            <a:alphaModFix/>
-          </a:blip>
-          <a:stretch>
-            <a:fillRect/>
-          </a:stretch>
-        </p:blipFill>
-        <p:spPr>
-          <a:xfrm>
-            <a:off x="152400" y="3873200"/>
-            <a:ext cx="6079875" cy="1162025"/>
           </a:xfrm>
           <a:prstGeom prst="rect">
             <a:avLst/>
